--- a/14_linked_lists/14_linked_lists.pptx
+++ b/14_linked_lists/14_linked_lists.pptx
@@ -5,7 +5,7 @@
     <p:sldMasterId id="2147483660" r:id="rId1"/>
   </p:sldMasterIdLst>
   <p:notesMasterIdLst>
-    <p:notesMasterId r:id="rId46"/>
+    <p:notesMasterId r:id="rId48"/>
   </p:notesMasterIdLst>
   <p:sldIdLst>
     <p:sldId id="256" r:id="rId2"/>
@@ -28,30 +28,32 @@
     <p:sldId id="341" r:id="rId19"/>
     <p:sldId id="377" r:id="rId20"/>
     <p:sldId id="338" r:id="rId21"/>
-    <p:sldId id="344" r:id="rId22"/>
-    <p:sldId id="374" r:id="rId23"/>
-    <p:sldId id="346" r:id="rId24"/>
-    <p:sldId id="375" r:id="rId25"/>
-    <p:sldId id="347" r:id="rId26"/>
-    <p:sldId id="348" r:id="rId27"/>
-    <p:sldId id="349" r:id="rId28"/>
-    <p:sldId id="350" r:id="rId29"/>
-    <p:sldId id="351" r:id="rId30"/>
-    <p:sldId id="352" r:id="rId31"/>
-    <p:sldId id="353" r:id="rId32"/>
-    <p:sldId id="355" r:id="rId33"/>
-    <p:sldId id="356" r:id="rId34"/>
-    <p:sldId id="357" r:id="rId35"/>
-    <p:sldId id="361" r:id="rId36"/>
-    <p:sldId id="362" r:id="rId37"/>
-    <p:sldId id="363" r:id="rId38"/>
-    <p:sldId id="358" r:id="rId39"/>
-    <p:sldId id="359" r:id="rId40"/>
-    <p:sldId id="360" r:id="rId41"/>
-    <p:sldId id="354" r:id="rId42"/>
-    <p:sldId id="364" r:id="rId43"/>
-    <p:sldId id="366" r:id="rId44"/>
-    <p:sldId id="290" r:id="rId45"/>
+    <p:sldId id="378" r:id="rId22"/>
+    <p:sldId id="379" r:id="rId23"/>
+    <p:sldId id="380" r:id="rId24"/>
+    <p:sldId id="381" r:id="rId25"/>
+    <p:sldId id="348" r:id="rId26"/>
+    <p:sldId id="349" r:id="rId27"/>
+    <p:sldId id="350" r:id="rId28"/>
+    <p:sldId id="351" r:id="rId29"/>
+    <p:sldId id="352" r:id="rId30"/>
+    <p:sldId id="353" r:id="rId31"/>
+    <p:sldId id="355" r:id="rId32"/>
+    <p:sldId id="356" r:id="rId33"/>
+    <p:sldId id="357" r:id="rId34"/>
+    <p:sldId id="361" r:id="rId35"/>
+    <p:sldId id="362" r:id="rId36"/>
+    <p:sldId id="363" r:id="rId37"/>
+    <p:sldId id="358" r:id="rId38"/>
+    <p:sldId id="359" r:id="rId39"/>
+    <p:sldId id="360" r:id="rId40"/>
+    <p:sldId id="364" r:id="rId41"/>
+    <p:sldId id="366" r:id="rId42"/>
+    <p:sldId id="382" r:id="rId43"/>
+    <p:sldId id="383" r:id="rId44"/>
+    <p:sldId id="384" r:id="rId45"/>
+    <p:sldId id="385" r:id="rId46"/>
+    <p:sldId id="290" r:id="rId47"/>
   </p:sldIdLst>
   <p:sldSz cx="12192000" cy="6858000"/>
   <p:notesSz cx="6858000" cy="9144000"/>
@@ -252,7 +254,7 @@
           <a:p>
             <a:fld id="{85EF5437-F444-4613-A039-4AD69D91C86A}" type="datetimeFigureOut">
               <a:rPr lang="ru-RU" smtClean="0"/>
-              <a:t>20.02.2026</a:t>
+              <a:t>28.02.2026</a:t>
             </a:fld>
             <a:endParaRPr lang="ru-RU"/>
           </a:p>
@@ -1685,7 +1687,7 @@
     </p:spTree>
     <p:extLst>
       <p:ext uri="{BB962C8B-B14F-4D97-AF65-F5344CB8AC3E}">
-        <p14:creationId xmlns:p14="http://schemas.microsoft.com/office/powerpoint/2010/main" val="3843950888"/>
+        <p14:creationId xmlns:p14="http://schemas.microsoft.com/office/powerpoint/2010/main" val="1999278529"/>
       </p:ext>
     </p:extLst>
   </p:cSld>
@@ -1769,7 +1771,7 @@
     </p:spTree>
     <p:extLst>
       <p:ext uri="{BB962C8B-B14F-4D97-AF65-F5344CB8AC3E}">
-        <p14:creationId xmlns:p14="http://schemas.microsoft.com/office/powerpoint/2010/main" val="1999278529"/>
+        <p14:creationId xmlns:p14="http://schemas.microsoft.com/office/powerpoint/2010/main" val="1415931582"/>
       </p:ext>
     </p:extLst>
   </p:cSld>
@@ -1853,7 +1855,7 @@
     </p:spTree>
     <p:extLst>
       <p:ext uri="{BB962C8B-B14F-4D97-AF65-F5344CB8AC3E}">
-        <p14:creationId xmlns:p14="http://schemas.microsoft.com/office/powerpoint/2010/main" val="1415931582"/>
+        <p14:creationId xmlns:p14="http://schemas.microsoft.com/office/powerpoint/2010/main" val="3843950888"/>
       </p:ext>
     </p:extLst>
   </p:cSld>
@@ -2021,7 +2023,7 @@
     </p:spTree>
     <p:extLst>
       <p:ext uri="{BB962C8B-B14F-4D97-AF65-F5344CB8AC3E}">
-        <p14:creationId xmlns:p14="http://schemas.microsoft.com/office/powerpoint/2010/main" val="3205123854"/>
+        <p14:creationId xmlns:p14="http://schemas.microsoft.com/office/powerpoint/2010/main" val="1864661816"/>
       </p:ext>
     </p:extLst>
   </p:cSld>
@@ -2105,7 +2107,7 @@
     </p:spTree>
     <p:extLst>
       <p:ext uri="{BB962C8B-B14F-4D97-AF65-F5344CB8AC3E}">
-        <p14:creationId xmlns:p14="http://schemas.microsoft.com/office/powerpoint/2010/main" val="1864661816"/>
+        <p14:creationId xmlns:p14="http://schemas.microsoft.com/office/powerpoint/2010/main" val="2123066256"/>
       </p:ext>
     </p:extLst>
   </p:cSld>
@@ -2189,7 +2191,7 @@
     </p:spTree>
     <p:extLst>
       <p:ext uri="{BB962C8B-B14F-4D97-AF65-F5344CB8AC3E}">
-        <p14:creationId xmlns:p14="http://schemas.microsoft.com/office/powerpoint/2010/main" val="2123066256"/>
+        <p14:creationId xmlns:p14="http://schemas.microsoft.com/office/powerpoint/2010/main" val="1393680611"/>
       </p:ext>
     </p:extLst>
   </p:cSld>
@@ -2273,7 +2275,7 @@
     </p:spTree>
     <p:extLst>
       <p:ext uri="{BB962C8B-B14F-4D97-AF65-F5344CB8AC3E}">
-        <p14:creationId xmlns:p14="http://schemas.microsoft.com/office/powerpoint/2010/main" val="1393680611"/>
+        <p14:creationId xmlns:p14="http://schemas.microsoft.com/office/powerpoint/2010/main" val="371479112"/>
       </p:ext>
     </p:extLst>
   </p:cSld>
@@ -2357,7 +2359,7 @@
     </p:spTree>
     <p:extLst>
       <p:ext uri="{BB962C8B-B14F-4D97-AF65-F5344CB8AC3E}">
-        <p14:creationId xmlns:p14="http://schemas.microsoft.com/office/powerpoint/2010/main" val="371479112"/>
+        <p14:creationId xmlns:p14="http://schemas.microsoft.com/office/powerpoint/2010/main" val="4250756658"/>
       </p:ext>
     </p:extLst>
   </p:cSld>
@@ -2525,7 +2527,7 @@
     </p:spTree>
     <p:extLst>
       <p:ext uri="{BB962C8B-B14F-4D97-AF65-F5344CB8AC3E}">
-        <p14:creationId xmlns:p14="http://schemas.microsoft.com/office/powerpoint/2010/main" val="4250756658"/>
+        <p14:creationId xmlns:p14="http://schemas.microsoft.com/office/powerpoint/2010/main" val="446603170"/>
       </p:ext>
     </p:extLst>
   </p:cSld>
@@ -2609,7 +2611,7 @@
     </p:spTree>
     <p:extLst>
       <p:ext uri="{BB962C8B-B14F-4D97-AF65-F5344CB8AC3E}">
-        <p14:creationId xmlns:p14="http://schemas.microsoft.com/office/powerpoint/2010/main" val="446603170"/>
+        <p14:creationId xmlns:p14="http://schemas.microsoft.com/office/powerpoint/2010/main" val="656737961"/>
       </p:ext>
     </p:extLst>
   </p:cSld>
@@ -2693,7 +2695,7 @@
     </p:spTree>
     <p:extLst>
       <p:ext uri="{BB962C8B-B14F-4D97-AF65-F5344CB8AC3E}">
-        <p14:creationId xmlns:p14="http://schemas.microsoft.com/office/powerpoint/2010/main" val="656737961"/>
+        <p14:creationId xmlns:p14="http://schemas.microsoft.com/office/powerpoint/2010/main" val="1365922881"/>
       </p:ext>
     </p:extLst>
   </p:cSld>
@@ -2777,7 +2779,7 @@
     </p:spTree>
     <p:extLst>
       <p:ext uri="{BB962C8B-B14F-4D97-AF65-F5344CB8AC3E}">
-        <p14:creationId xmlns:p14="http://schemas.microsoft.com/office/powerpoint/2010/main" val="1365922881"/>
+        <p14:creationId xmlns:p14="http://schemas.microsoft.com/office/powerpoint/2010/main" val="805533069"/>
       </p:ext>
     </p:extLst>
   </p:cSld>
@@ -2861,7 +2863,7 @@
     </p:spTree>
     <p:extLst>
       <p:ext uri="{BB962C8B-B14F-4D97-AF65-F5344CB8AC3E}">
-        <p14:creationId xmlns:p14="http://schemas.microsoft.com/office/powerpoint/2010/main" val="805533069"/>
+        <p14:creationId xmlns:p14="http://schemas.microsoft.com/office/powerpoint/2010/main" val="1933733857"/>
       </p:ext>
     </p:extLst>
   </p:cSld>
@@ -2945,7 +2947,7 @@
     </p:spTree>
     <p:extLst>
       <p:ext uri="{BB962C8B-B14F-4D97-AF65-F5344CB8AC3E}">
-        <p14:creationId xmlns:p14="http://schemas.microsoft.com/office/powerpoint/2010/main" val="1933733857"/>
+        <p14:creationId xmlns:p14="http://schemas.microsoft.com/office/powerpoint/2010/main" val="1906057761"/>
       </p:ext>
     </p:extLst>
   </p:cSld>
@@ -3029,7 +3031,7 @@
     </p:spTree>
     <p:extLst>
       <p:ext uri="{BB962C8B-B14F-4D97-AF65-F5344CB8AC3E}">
-        <p14:creationId xmlns:p14="http://schemas.microsoft.com/office/powerpoint/2010/main" val="1906057761"/>
+        <p14:creationId xmlns:p14="http://schemas.microsoft.com/office/powerpoint/2010/main" val="344870203"/>
       </p:ext>
     </p:extLst>
   </p:cSld>
@@ -3113,7 +3115,7 @@
     </p:spTree>
     <p:extLst>
       <p:ext uri="{BB962C8B-B14F-4D97-AF65-F5344CB8AC3E}">
-        <p14:creationId xmlns:p14="http://schemas.microsoft.com/office/powerpoint/2010/main" val="344870203"/>
+        <p14:creationId xmlns:p14="http://schemas.microsoft.com/office/powerpoint/2010/main" val="3903357071"/>
       </p:ext>
     </p:extLst>
   </p:cSld>
@@ -3197,7 +3199,7 @@
     </p:spTree>
     <p:extLst>
       <p:ext uri="{BB962C8B-B14F-4D97-AF65-F5344CB8AC3E}">
-        <p14:creationId xmlns:p14="http://schemas.microsoft.com/office/powerpoint/2010/main" val="3903357071"/>
+        <p14:creationId xmlns:p14="http://schemas.microsoft.com/office/powerpoint/2010/main" val="3978924400"/>
       </p:ext>
     </p:extLst>
   </p:cSld>
@@ -3281,7 +3283,7 @@
     </p:spTree>
     <p:extLst>
       <p:ext uri="{BB962C8B-B14F-4D97-AF65-F5344CB8AC3E}">
-        <p14:creationId xmlns:p14="http://schemas.microsoft.com/office/powerpoint/2010/main" val="3978924400"/>
+        <p14:creationId xmlns:p14="http://schemas.microsoft.com/office/powerpoint/2010/main" val="375997281"/>
       </p:ext>
     </p:extLst>
   </p:cSld>
@@ -3449,7 +3451,7 @@
     </p:spTree>
     <p:extLst>
       <p:ext uri="{BB962C8B-B14F-4D97-AF65-F5344CB8AC3E}">
-        <p14:creationId xmlns:p14="http://schemas.microsoft.com/office/powerpoint/2010/main" val="375997281"/>
+        <p14:creationId xmlns:p14="http://schemas.microsoft.com/office/powerpoint/2010/main" val="3090738911"/>
       </p:ext>
     </p:extLst>
   </p:cSld>
@@ -3533,7 +3535,7 @@
     </p:spTree>
     <p:extLst>
       <p:ext uri="{BB962C8B-B14F-4D97-AF65-F5344CB8AC3E}">
-        <p14:creationId xmlns:p14="http://schemas.microsoft.com/office/powerpoint/2010/main" val="3062199109"/>
+        <p14:creationId xmlns:p14="http://schemas.microsoft.com/office/powerpoint/2010/main" val="1873526665"/>
       </p:ext>
     </p:extLst>
   </p:cSld>
@@ -3617,7 +3619,7 @@
     </p:spTree>
     <p:extLst>
       <p:ext uri="{BB962C8B-B14F-4D97-AF65-F5344CB8AC3E}">
-        <p14:creationId xmlns:p14="http://schemas.microsoft.com/office/powerpoint/2010/main" val="3090738911"/>
+        <p14:creationId xmlns:p14="http://schemas.microsoft.com/office/powerpoint/2010/main" val="130615595"/>
       </p:ext>
     </p:extLst>
   </p:cSld>
@@ -3701,7 +3703,7 @@
     </p:spTree>
     <p:extLst>
       <p:ext uri="{BB962C8B-B14F-4D97-AF65-F5344CB8AC3E}">
-        <p14:creationId xmlns:p14="http://schemas.microsoft.com/office/powerpoint/2010/main" val="1873526665"/>
+        <p14:creationId xmlns:p14="http://schemas.microsoft.com/office/powerpoint/2010/main" val="2976871631"/>
       </p:ext>
     </p:extLst>
   </p:cSld>
@@ -3777,6 +3779,174 @@
             <a:fld id="{207EAB29-8E86-49C7-96F5-7C9D72076108}" type="slidenum">
               <a:rPr lang="ru-RU" smtClean="0"/>
               <a:t>44</a:t>
+            </a:fld>
+            <a:endParaRPr lang="ru-RU"/>
+          </a:p>
+        </p:txBody>
+      </p:sp>
+    </p:spTree>
+    <p:extLst>
+      <p:ext uri="{BB962C8B-B14F-4D97-AF65-F5344CB8AC3E}">
+        <p14:creationId xmlns:p14="http://schemas.microsoft.com/office/powerpoint/2010/main" val="2054061359"/>
+      </p:ext>
+    </p:extLst>
+  </p:cSld>
+  <p:clrMapOvr>
+    <a:masterClrMapping/>
+  </p:clrMapOvr>
+</p:notes>
+</file>
+
+<file path=ppt/notesSlides/notesSlide45.xml><?xml version="1.0" encoding="utf-8"?>
+<p:notes xmlns:a="http://schemas.openxmlformats.org/drawingml/2006/main" xmlns:r="http://schemas.openxmlformats.org/officeDocument/2006/relationships" xmlns:p="http://schemas.openxmlformats.org/presentationml/2006/main">
+  <p:cSld>
+    <p:spTree>
+      <p:nvGrpSpPr>
+        <p:cNvPr id="1" name=""/>
+        <p:cNvGrpSpPr/>
+        <p:nvPr/>
+      </p:nvGrpSpPr>
+      <p:grpSpPr>
+        <a:xfrm>
+          <a:off x="0" y="0"/>
+          <a:ext cx="0" cy="0"/>
+          <a:chOff x="0" y="0"/>
+          <a:chExt cx="0" cy="0"/>
+        </a:xfrm>
+      </p:grpSpPr>
+      <p:sp>
+        <p:nvSpPr>
+          <p:cNvPr id="2" name="Образ слайда 1"/>
+          <p:cNvSpPr>
+            <a:spLocks noGrp="1" noRot="1" noChangeAspect="1"/>
+          </p:cNvSpPr>
+          <p:nvPr>
+            <p:ph type="sldImg"/>
+          </p:nvPr>
+        </p:nvSpPr>
+        <p:spPr/>
+      </p:sp>
+      <p:sp>
+        <p:nvSpPr>
+          <p:cNvPr id="3" name="Заметки 2"/>
+          <p:cNvSpPr>
+            <a:spLocks noGrp="1"/>
+          </p:cNvSpPr>
+          <p:nvPr>
+            <p:ph type="body" idx="1"/>
+          </p:nvPr>
+        </p:nvSpPr>
+        <p:spPr/>
+        <p:txBody>
+          <a:bodyPr/>
+          <a:lstStyle/>
+          <a:p>
+            <a:endParaRPr lang="ru-RU" dirty="0"/>
+          </a:p>
+        </p:txBody>
+      </p:sp>
+      <p:sp>
+        <p:nvSpPr>
+          <p:cNvPr id="4" name="Номер слайда 3"/>
+          <p:cNvSpPr>
+            <a:spLocks noGrp="1"/>
+          </p:cNvSpPr>
+          <p:nvPr>
+            <p:ph type="sldNum" sz="quarter" idx="10"/>
+          </p:nvPr>
+        </p:nvSpPr>
+        <p:spPr/>
+        <p:txBody>
+          <a:bodyPr/>
+          <a:lstStyle/>
+          <a:p>
+            <a:fld id="{207EAB29-8E86-49C7-96F5-7C9D72076108}" type="slidenum">
+              <a:rPr lang="ru-RU" smtClean="0"/>
+              <a:t>45</a:t>
+            </a:fld>
+            <a:endParaRPr lang="ru-RU"/>
+          </a:p>
+        </p:txBody>
+      </p:sp>
+    </p:spTree>
+    <p:extLst>
+      <p:ext uri="{BB962C8B-B14F-4D97-AF65-F5344CB8AC3E}">
+        <p14:creationId xmlns:p14="http://schemas.microsoft.com/office/powerpoint/2010/main" val="1888188009"/>
+      </p:ext>
+    </p:extLst>
+  </p:cSld>
+  <p:clrMapOvr>
+    <a:masterClrMapping/>
+  </p:clrMapOvr>
+</p:notes>
+</file>
+
+<file path=ppt/notesSlides/notesSlide46.xml><?xml version="1.0" encoding="utf-8"?>
+<p:notes xmlns:a="http://schemas.openxmlformats.org/drawingml/2006/main" xmlns:r="http://schemas.openxmlformats.org/officeDocument/2006/relationships" xmlns:p="http://schemas.openxmlformats.org/presentationml/2006/main">
+  <p:cSld>
+    <p:spTree>
+      <p:nvGrpSpPr>
+        <p:cNvPr id="1" name=""/>
+        <p:cNvGrpSpPr/>
+        <p:nvPr/>
+      </p:nvGrpSpPr>
+      <p:grpSpPr>
+        <a:xfrm>
+          <a:off x="0" y="0"/>
+          <a:ext cx="0" cy="0"/>
+          <a:chOff x="0" y="0"/>
+          <a:chExt cx="0" cy="0"/>
+        </a:xfrm>
+      </p:grpSpPr>
+      <p:sp>
+        <p:nvSpPr>
+          <p:cNvPr id="2" name="Образ слайда 1"/>
+          <p:cNvSpPr>
+            <a:spLocks noGrp="1" noRot="1" noChangeAspect="1"/>
+          </p:cNvSpPr>
+          <p:nvPr>
+            <p:ph type="sldImg"/>
+          </p:nvPr>
+        </p:nvSpPr>
+        <p:spPr/>
+      </p:sp>
+      <p:sp>
+        <p:nvSpPr>
+          <p:cNvPr id="3" name="Заметки 2"/>
+          <p:cNvSpPr>
+            <a:spLocks noGrp="1"/>
+          </p:cNvSpPr>
+          <p:nvPr>
+            <p:ph type="body" idx="1"/>
+          </p:nvPr>
+        </p:nvSpPr>
+        <p:spPr/>
+        <p:txBody>
+          <a:bodyPr/>
+          <a:lstStyle/>
+          <a:p>
+            <a:endParaRPr lang="ru-RU" dirty="0"/>
+          </a:p>
+        </p:txBody>
+      </p:sp>
+      <p:sp>
+        <p:nvSpPr>
+          <p:cNvPr id="4" name="Номер слайда 3"/>
+          <p:cNvSpPr>
+            <a:spLocks noGrp="1"/>
+          </p:cNvSpPr>
+          <p:nvPr>
+            <p:ph type="sldNum" sz="quarter" idx="10"/>
+          </p:nvPr>
+        </p:nvSpPr>
+        <p:spPr/>
+        <p:txBody>
+          <a:bodyPr/>
+          <a:lstStyle/>
+          <a:p>
+            <a:fld id="{207EAB29-8E86-49C7-96F5-7C9D72076108}" type="slidenum">
+              <a:rPr lang="ru-RU" smtClean="0"/>
+              <a:t>46</a:t>
             </a:fld>
             <a:endParaRPr lang="ru-RU"/>
           </a:p>
@@ -4346,7 +4516,7 @@
           <a:p>
             <a:fld id="{58BF7D01-7D49-4F37-AA30-F04C65571A4A}" type="datetimeFigureOut">
               <a:rPr lang="ru-RU" smtClean="0"/>
-              <a:t>20.02.2026</a:t>
+              <a:t>28.02.2026</a:t>
             </a:fld>
             <a:endParaRPr lang="ru-RU"/>
           </a:p>
@@ -4516,7 +4686,7 @@
           <a:p>
             <a:fld id="{58BF7D01-7D49-4F37-AA30-F04C65571A4A}" type="datetimeFigureOut">
               <a:rPr lang="ru-RU" smtClean="0"/>
-              <a:t>20.02.2026</a:t>
+              <a:t>28.02.2026</a:t>
             </a:fld>
             <a:endParaRPr lang="ru-RU"/>
           </a:p>
@@ -4696,7 +4866,7 @@
           <a:p>
             <a:fld id="{58BF7D01-7D49-4F37-AA30-F04C65571A4A}" type="datetimeFigureOut">
               <a:rPr lang="ru-RU" smtClean="0"/>
-              <a:t>20.02.2026</a:t>
+              <a:t>28.02.2026</a:t>
             </a:fld>
             <a:endParaRPr lang="ru-RU"/>
           </a:p>
@@ -4866,7 +5036,7 @@
           <a:p>
             <a:fld id="{58BF7D01-7D49-4F37-AA30-F04C65571A4A}" type="datetimeFigureOut">
               <a:rPr lang="ru-RU" smtClean="0"/>
-              <a:t>20.02.2026</a:t>
+              <a:t>28.02.2026</a:t>
             </a:fld>
             <a:endParaRPr lang="ru-RU"/>
           </a:p>
@@ -5112,7 +5282,7 @@
           <a:p>
             <a:fld id="{58BF7D01-7D49-4F37-AA30-F04C65571A4A}" type="datetimeFigureOut">
               <a:rPr lang="ru-RU" smtClean="0"/>
-              <a:t>20.02.2026</a:t>
+              <a:t>28.02.2026</a:t>
             </a:fld>
             <a:endParaRPr lang="ru-RU"/>
           </a:p>
@@ -5344,7 +5514,7 @@
           <a:p>
             <a:fld id="{58BF7D01-7D49-4F37-AA30-F04C65571A4A}" type="datetimeFigureOut">
               <a:rPr lang="ru-RU" smtClean="0"/>
-              <a:t>20.02.2026</a:t>
+              <a:t>28.02.2026</a:t>
             </a:fld>
             <a:endParaRPr lang="ru-RU"/>
           </a:p>
@@ -5711,7 +5881,7 @@
           <a:p>
             <a:fld id="{58BF7D01-7D49-4F37-AA30-F04C65571A4A}" type="datetimeFigureOut">
               <a:rPr lang="ru-RU" smtClean="0"/>
-              <a:t>20.02.2026</a:t>
+              <a:t>28.02.2026</a:t>
             </a:fld>
             <a:endParaRPr lang="ru-RU"/>
           </a:p>
@@ -5829,7 +5999,7 @@
           <a:p>
             <a:fld id="{58BF7D01-7D49-4F37-AA30-F04C65571A4A}" type="datetimeFigureOut">
               <a:rPr lang="ru-RU" smtClean="0"/>
-              <a:t>20.02.2026</a:t>
+              <a:t>28.02.2026</a:t>
             </a:fld>
             <a:endParaRPr lang="ru-RU"/>
           </a:p>
@@ -5924,7 +6094,7 @@
           <a:p>
             <a:fld id="{58BF7D01-7D49-4F37-AA30-F04C65571A4A}" type="datetimeFigureOut">
               <a:rPr lang="ru-RU" smtClean="0"/>
-              <a:t>20.02.2026</a:t>
+              <a:t>28.02.2026</a:t>
             </a:fld>
             <a:endParaRPr lang="ru-RU"/>
           </a:p>
@@ -6201,7 +6371,7 @@
           <a:p>
             <a:fld id="{58BF7D01-7D49-4F37-AA30-F04C65571A4A}" type="datetimeFigureOut">
               <a:rPr lang="ru-RU" smtClean="0"/>
-              <a:t>20.02.2026</a:t>
+              <a:t>28.02.2026</a:t>
             </a:fld>
             <a:endParaRPr lang="ru-RU"/>
           </a:p>
@@ -6458,7 +6628,7 @@
           <a:p>
             <a:fld id="{58BF7D01-7D49-4F37-AA30-F04C65571A4A}" type="datetimeFigureOut">
               <a:rPr lang="ru-RU" smtClean="0"/>
-              <a:t>20.02.2026</a:t>
+              <a:t>28.02.2026</a:t>
             </a:fld>
             <a:endParaRPr lang="ru-RU"/>
           </a:p>
@@ -6671,7 +6841,7 @@
           <a:p>
             <a:fld id="{58BF7D01-7D49-4F37-AA30-F04C65571A4A}" type="datetimeFigureOut">
               <a:rPr lang="ru-RU" smtClean="0"/>
-              <a:t>20.02.2026</a:t>
+              <a:t>28.02.2026</a:t>
             </a:fld>
             <a:endParaRPr lang="ru-RU"/>
           </a:p>
@@ -15331,160 +15501,6 @@
         </p:nvSpPr>
         <p:spPr>
           <a:xfrm>
-            <a:off x="1133141" y="149271"/>
-            <a:ext cx="9925717" cy="927688"/>
-          </a:xfrm>
-          <a:prstGeom prst="rect">
-            <a:avLst/>
-          </a:prstGeom>
-        </p:spPr>
-        <p:txBody>
-          <a:bodyPr vert="horz" lIns="91440" tIns="45720" rIns="91440" bIns="45720" rtlCol="0" anchor="b">
-            <a:normAutofit/>
-          </a:bodyPr>
-          <a:lstStyle>
-            <a:lvl1pPr algn="ctr" defTabSz="914400" rtl="0" eaLnBrk="1" latinLnBrk="0" hangingPunct="1">
-              <a:lnSpc>
-                <a:spcPct val="90000"/>
-              </a:lnSpc>
-              <a:spcBef>
-                <a:spcPct val="0"/>
-              </a:spcBef>
-              <a:buNone/>
-              <a:defRPr sz="6000" kern="1200">
-                <a:solidFill>
-                  <a:schemeClr val="tx1"/>
-                </a:solidFill>
-                <a:latin typeface="+mj-lt"/>
-                <a:ea typeface="+mj-ea"/>
-                <a:cs typeface="+mj-cs"/>
-              </a:defRPr>
-            </a:lvl1pPr>
-          </a:lstStyle>
-          <a:p>
-            <a:r>
-              <a:rPr lang="ru-RU" dirty="0">
-                <a:latin typeface="Times New Roman" panose="02020603050405020304" pitchFamily="18" charset="0"/>
-                <a:cs typeface="Times New Roman" panose="02020603050405020304" pitchFamily="18" charset="0"/>
-              </a:rPr>
-              <a:t>Связанный список</a:t>
-            </a:r>
-          </a:p>
-        </p:txBody>
-      </p:sp>
-      <p:sp>
-        <p:nvSpPr>
-          <p:cNvPr id="8" name="TextBox 7">
-            <a:extLst>
-              <a:ext uri="{FF2B5EF4-FFF2-40B4-BE49-F238E27FC236}">
-                <a16:creationId xmlns:a16="http://schemas.microsoft.com/office/drawing/2014/main" id="{561099DA-8A51-4746-863E-498F9D99C754}"/>
-              </a:ext>
-            </a:extLst>
-          </p:cNvPr>
-          <p:cNvSpPr txBox="1"/>
-          <p:nvPr/>
-        </p:nvSpPr>
-        <p:spPr>
-          <a:xfrm>
-            <a:off x="907569" y="1098841"/>
-            <a:ext cx="10597486" cy="923330"/>
-          </a:xfrm>
-          <a:prstGeom prst="rect">
-            <a:avLst/>
-          </a:prstGeom>
-          <a:noFill/>
-        </p:spPr>
-        <p:txBody>
-          <a:bodyPr wrap="square">
-            <a:spAutoFit/>
-          </a:bodyPr>
-          <a:lstStyle/>
-          <a:p>
-            <a:r>
-              <a:rPr lang="ru-RU" dirty="0">
-                <a:latin typeface="Times New Roman" panose="02020603050405020304" pitchFamily="18" charset="0"/>
-                <a:cs typeface="Times New Roman" panose="02020603050405020304" pitchFamily="18" charset="0"/>
-              </a:rPr>
-              <a:t>	Связанные список — это структура данных, которая хранит элементы в линейном порядке и позволяет вставлять и удалять элементы в любом месте последовательности. Списки могут быть односвязными, двусвязными или круговыми (циклическими). </a:t>
-            </a:r>
-          </a:p>
-        </p:txBody>
-      </p:sp>
-      <p:pic>
-        <p:nvPicPr>
-          <p:cNvPr id="17" name="Рисунок 16">
-            <a:extLst>
-              <a:ext uri="{FF2B5EF4-FFF2-40B4-BE49-F238E27FC236}">
-                <a16:creationId xmlns:a16="http://schemas.microsoft.com/office/drawing/2014/main" id="{842C138E-3C6A-4642-BD85-6E4898A2E83E}"/>
-              </a:ext>
-            </a:extLst>
-          </p:cNvPr>
-          <p:cNvPicPr>
-            <a:picLocks noChangeAspect="1"/>
-          </p:cNvPicPr>
-          <p:nvPr/>
-        </p:nvPicPr>
-        <p:blipFill rotWithShape="1">
-          <a:blip r:embed="rId3"/>
-          <a:srcRect l="1207" t="7311" r="-1207" b="213"/>
-          <a:stretch/>
-        </p:blipFill>
-        <p:spPr>
-          <a:xfrm>
-            <a:off x="1133141" y="2281643"/>
-            <a:ext cx="10614433" cy="4181531"/>
-          </a:xfrm>
-          <a:prstGeom prst="rect">
-            <a:avLst/>
-          </a:prstGeom>
-        </p:spPr>
-      </p:pic>
-    </p:spTree>
-    <p:extLst>
-      <p:ext uri="{BB962C8B-B14F-4D97-AF65-F5344CB8AC3E}">
-        <p14:creationId xmlns:p14="http://schemas.microsoft.com/office/powerpoint/2010/main" val="1918170885"/>
-      </p:ext>
-    </p:extLst>
-  </p:cSld>
-  <p:clrMapOvr>
-    <a:masterClrMapping/>
-  </p:clrMapOvr>
-</p:sld>
-</file>
-
-<file path=ppt/slides/slide22.xml><?xml version="1.0" encoding="utf-8"?>
-<p:sld xmlns:a="http://schemas.openxmlformats.org/drawingml/2006/main" xmlns:r="http://schemas.openxmlformats.org/officeDocument/2006/relationships" xmlns:p="http://schemas.openxmlformats.org/presentationml/2006/main">
-  <p:cSld>
-    <p:spTree>
-      <p:nvGrpSpPr>
-        <p:cNvPr id="1" name=""/>
-        <p:cNvGrpSpPr/>
-        <p:nvPr/>
-      </p:nvGrpSpPr>
-      <p:grpSpPr>
-        <a:xfrm>
-          <a:off x="0" y="0"/>
-          <a:ext cx="0" cy="0"/>
-          <a:chOff x="0" y="0"/>
-          <a:chExt cx="0" cy="0"/>
-        </a:xfrm>
-      </p:grpSpPr>
-      <p:sp>
-        <p:nvSpPr>
-          <p:cNvPr id="9" name="Заголовок 2">
-            <a:extLst>
-              <a:ext uri="{FF2B5EF4-FFF2-40B4-BE49-F238E27FC236}">
-                <a16:creationId xmlns:a16="http://schemas.microsoft.com/office/drawing/2014/main" id="{CEF7D3C9-F027-4DFF-AC25-52606D3BE3A7}"/>
-              </a:ext>
-            </a:extLst>
-          </p:cNvPr>
-          <p:cNvSpPr txBox="1">
-            <a:spLocks/>
-          </p:cNvSpPr>
-          <p:nvPr/>
-        </p:nvSpPr>
-        <p:spPr>
-          <a:xfrm>
             <a:off x="1133141" y="289948"/>
             <a:ext cx="9925717" cy="927688"/>
           </a:xfrm>
@@ -15695,7 +15711,7 @@
     </p:spTree>
     <p:extLst>
       <p:ext uri="{BB962C8B-B14F-4D97-AF65-F5344CB8AC3E}">
-        <p14:creationId xmlns:p14="http://schemas.microsoft.com/office/powerpoint/2010/main" val="3639090006"/>
+        <p14:creationId xmlns:p14="http://schemas.microsoft.com/office/powerpoint/2010/main" val="2074312108"/>
       </p:ext>
     </p:extLst>
   </p:cSld>
@@ -15705,7 +15721,7 @@
 </p:sld>
 </file>
 
-<file path=ppt/slides/slide23.xml><?xml version="1.0" encoding="utf-8"?>
+<file path=ppt/slides/slide22.xml><?xml version="1.0" encoding="utf-8"?>
 <p:sld xmlns:a="http://schemas.openxmlformats.org/drawingml/2006/main" xmlns:r="http://schemas.openxmlformats.org/officeDocument/2006/relationships" xmlns:p="http://schemas.openxmlformats.org/presentationml/2006/main">
   <p:cSld>
     <p:spTree>
@@ -15828,239 +15844,6 @@
               </a:rPr>
               <a:t>) указывают на NULL, что указывает на конец связанного списка.</a:t>
             </a:r>
-          </a:p>
-        </p:txBody>
-      </p:sp>
-      <p:sp>
-        <p:nvSpPr>
-          <p:cNvPr id="8" name="TextBox 7">
-            <a:extLst>
-              <a:ext uri="{FF2B5EF4-FFF2-40B4-BE49-F238E27FC236}">
-                <a16:creationId xmlns:a16="http://schemas.microsoft.com/office/drawing/2014/main" id="{7E02DC72-A538-4F6B-B51F-73716448D9D4}"/>
-              </a:ext>
-            </a:extLst>
-          </p:cNvPr>
-          <p:cNvSpPr txBox="1"/>
-          <p:nvPr/>
-        </p:nvSpPr>
-        <p:spPr>
-          <a:xfrm>
-            <a:off x="1133140" y="3499112"/>
-            <a:ext cx="3063546" cy="1477328"/>
-          </a:xfrm>
-          <a:prstGeom prst="rect">
-            <a:avLst/>
-          </a:prstGeom>
-          <a:noFill/>
-        </p:spPr>
-        <p:txBody>
-          <a:bodyPr wrap="square">
-            <a:spAutoFit/>
-          </a:bodyPr>
-          <a:lstStyle/>
-          <a:p>
-            <a:r>
-              <a:rPr lang="ru-RU" b="0" dirty="0" err="1">
-                <a:solidFill>
-                  <a:srgbClr val="569CD6"/>
-                </a:solidFill>
-                <a:effectLst/>
-                <a:latin typeface="Consolas" panose="020B0609020204030204" pitchFamily="49" charset="0"/>
-              </a:rPr>
-              <a:t>struct</a:t>
-            </a:r>
-            <a:r>
-              <a:rPr lang="ru-RU" b="0" dirty="0">
-                <a:solidFill>
-                  <a:srgbClr val="D4D4D4"/>
-                </a:solidFill>
-                <a:effectLst/>
-                <a:latin typeface="Consolas" panose="020B0609020204030204" pitchFamily="49" charset="0"/>
-              </a:rPr>
-              <a:t> </a:t>
-            </a:r>
-            <a:r>
-              <a:rPr lang="ru-RU" b="0" dirty="0" err="1">
-                <a:solidFill>
-                  <a:srgbClr val="D4D4D4"/>
-                </a:solidFill>
-                <a:effectLst/>
-                <a:latin typeface="Consolas" panose="020B0609020204030204" pitchFamily="49" charset="0"/>
-              </a:rPr>
-              <a:t>node</a:t>
-            </a:r>
-            <a:endParaRPr lang="ru-RU" b="0" dirty="0">
-              <a:solidFill>
-                <a:srgbClr val="CCCCCC"/>
-              </a:solidFill>
-              <a:effectLst/>
-              <a:latin typeface="Consolas" panose="020B0609020204030204" pitchFamily="49" charset="0"/>
-            </a:endParaRPr>
-          </a:p>
-          <a:p>
-            <a:r>
-              <a:rPr lang="ru-RU" b="0" dirty="0">
-                <a:solidFill>
-                  <a:srgbClr val="D4D4D4"/>
-                </a:solidFill>
-                <a:effectLst/>
-                <a:latin typeface="Consolas" panose="020B0609020204030204" pitchFamily="49" charset="0"/>
-              </a:rPr>
-              <a:t>{</a:t>
-            </a:r>
-            <a:endParaRPr lang="ru-RU" b="0" dirty="0">
-              <a:solidFill>
-                <a:srgbClr val="CCCCCC"/>
-              </a:solidFill>
-              <a:effectLst/>
-              <a:latin typeface="Consolas" panose="020B0609020204030204" pitchFamily="49" charset="0"/>
-            </a:endParaRPr>
-          </a:p>
-          <a:p>
-            <a:r>
-              <a:rPr lang="ru-RU" b="0" dirty="0">
-                <a:solidFill>
-                  <a:srgbClr val="D4D4D4"/>
-                </a:solidFill>
-                <a:effectLst/>
-                <a:latin typeface="Consolas" panose="020B0609020204030204" pitchFamily="49" charset="0"/>
-              </a:rPr>
-              <a:t>    </a:t>
-            </a:r>
-            <a:r>
-              <a:rPr lang="ru-RU" b="0" dirty="0" err="1">
-                <a:solidFill>
-                  <a:srgbClr val="569CD6"/>
-                </a:solidFill>
-                <a:effectLst/>
-                <a:latin typeface="Consolas" panose="020B0609020204030204" pitchFamily="49" charset="0"/>
-              </a:rPr>
-              <a:t>int</a:t>
-            </a:r>
-            <a:r>
-              <a:rPr lang="ru-RU" b="0" dirty="0">
-                <a:solidFill>
-                  <a:srgbClr val="D4D4D4"/>
-                </a:solidFill>
-                <a:effectLst/>
-                <a:latin typeface="Consolas" panose="020B0609020204030204" pitchFamily="49" charset="0"/>
-              </a:rPr>
-              <a:t> </a:t>
-            </a:r>
-            <a:r>
-              <a:rPr lang="ru-RU" b="0" dirty="0" err="1">
-                <a:solidFill>
-                  <a:srgbClr val="D4D4D4"/>
-                </a:solidFill>
-                <a:effectLst/>
-                <a:latin typeface="Consolas" panose="020B0609020204030204" pitchFamily="49" charset="0"/>
-              </a:rPr>
-              <a:t>data</a:t>
-            </a:r>
-            <a:endParaRPr lang="en-US" dirty="0">
-              <a:solidFill>
-                <a:srgbClr val="D4D4D4"/>
-              </a:solidFill>
-              <a:latin typeface="Consolas" panose="020B0609020204030204" pitchFamily="49" charset="0"/>
-            </a:endParaRPr>
-          </a:p>
-          <a:p>
-            <a:r>
-              <a:rPr lang="ru-RU" b="0" dirty="0">
-                <a:solidFill>
-                  <a:srgbClr val="D4D4D4"/>
-                </a:solidFill>
-                <a:effectLst/>
-                <a:latin typeface="Consolas" panose="020B0609020204030204" pitchFamily="49" charset="0"/>
-              </a:rPr>
-              <a:t>    </a:t>
-            </a:r>
-            <a:r>
-              <a:rPr lang="ru-RU" b="0" dirty="0" err="1">
-                <a:solidFill>
-                  <a:srgbClr val="569CD6"/>
-                </a:solidFill>
-                <a:effectLst/>
-                <a:latin typeface="Consolas" panose="020B0609020204030204" pitchFamily="49" charset="0"/>
-              </a:rPr>
-              <a:t>struct</a:t>
-            </a:r>
-            <a:r>
-              <a:rPr lang="ru-RU" b="0" dirty="0">
-                <a:solidFill>
-                  <a:srgbClr val="D4D4D4"/>
-                </a:solidFill>
-                <a:effectLst/>
-                <a:latin typeface="Consolas" panose="020B0609020204030204" pitchFamily="49" charset="0"/>
-              </a:rPr>
-              <a:t> </a:t>
-            </a:r>
-            <a:r>
-              <a:rPr lang="ru-RU" b="0" dirty="0" err="1">
-                <a:solidFill>
-                  <a:srgbClr val="D4D4D4"/>
-                </a:solidFill>
-                <a:effectLst/>
-                <a:latin typeface="Consolas" panose="020B0609020204030204" pitchFamily="49" charset="0"/>
-              </a:rPr>
-              <a:t>node</a:t>
-            </a:r>
-            <a:r>
-              <a:rPr lang="ru-RU" b="0" dirty="0">
-                <a:solidFill>
-                  <a:srgbClr val="D4D4D4"/>
-                </a:solidFill>
-                <a:effectLst/>
-                <a:latin typeface="Consolas" panose="020B0609020204030204" pitchFamily="49" charset="0"/>
-              </a:rPr>
-              <a:t> *</a:t>
-            </a:r>
-            <a:r>
-              <a:rPr lang="ru-RU" b="0" dirty="0" err="1">
-                <a:solidFill>
-                  <a:srgbClr val="D4D4D4"/>
-                </a:solidFill>
-                <a:effectLst/>
-                <a:latin typeface="Consolas" panose="020B0609020204030204" pitchFamily="49" charset="0"/>
-              </a:rPr>
-              <a:t>next</a:t>
-            </a:r>
-            <a:r>
-              <a:rPr lang="ru-RU" b="0" dirty="0">
-                <a:solidFill>
-                  <a:srgbClr val="D4D4D4"/>
-                </a:solidFill>
-                <a:effectLst/>
-                <a:latin typeface="Consolas" panose="020B0609020204030204" pitchFamily="49" charset="0"/>
-              </a:rPr>
-              <a:t>;</a:t>
-            </a:r>
-            <a:endParaRPr lang="en-US" b="0" dirty="0">
-              <a:solidFill>
-                <a:srgbClr val="D4D4D4"/>
-              </a:solidFill>
-              <a:effectLst/>
-              <a:latin typeface="Consolas" panose="020B0609020204030204" pitchFamily="49" charset="0"/>
-            </a:endParaRPr>
-          </a:p>
-          <a:p>
-            <a:r>
-              <a:rPr lang="ru-RU" b="0" dirty="0">
-                <a:solidFill>
-                  <a:srgbClr val="D4D4D4"/>
-                </a:solidFill>
-                <a:effectLst/>
-                <a:latin typeface="Consolas" panose="020B0609020204030204" pitchFamily="49" charset="0"/>
-              </a:rPr>
-              <a:t>};</a:t>
-            </a:r>
-            <a:endParaRPr lang="ru-RU" b="0" dirty="0">
-              <a:solidFill>
-                <a:srgbClr val="CCCCCC"/>
-              </a:solidFill>
-              <a:effectLst/>
-              <a:latin typeface="Consolas" panose="020B0609020204030204" pitchFamily="49" charset="0"/>
-            </a:endParaRPr>
           </a:p>
         </p:txBody>
       </p:sp>
@@ -16093,7 +15876,7 @@
         </p:blipFill>
         <p:spPr bwMode="auto">
           <a:xfrm>
-            <a:off x="4467186" y="3429000"/>
+            <a:off x="4495761" y="3429000"/>
             <a:ext cx="7460705" cy="1937616"/>
           </a:xfrm>
           <a:prstGeom prst="rect">
@@ -16111,10 +15894,490 @@
           </a:extLst>
         </p:spPr>
       </p:pic>
+      <p:sp>
+        <p:nvSpPr>
+          <p:cNvPr id="11" name="TextBox 10">
+            <a:extLst>
+              <a:ext uri="{FF2B5EF4-FFF2-40B4-BE49-F238E27FC236}">
+                <a16:creationId xmlns:a16="http://schemas.microsoft.com/office/drawing/2014/main" id="{5C0AF7BC-2AF9-4229-92D4-3F7B35EB4FC3}"/>
+              </a:ext>
+            </a:extLst>
+          </p:cNvPr>
+          <p:cNvSpPr txBox="1"/>
+          <p:nvPr/>
+        </p:nvSpPr>
+        <p:spPr>
+          <a:xfrm>
+            <a:off x="921428" y="3243646"/>
+            <a:ext cx="3750617" cy="2308324"/>
+          </a:xfrm>
+          <a:prstGeom prst="rect">
+            <a:avLst/>
+          </a:prstGeom>
+          <a:noFill/>
+        </p:spPr>
+        <p:txBody>
+          <a:bodyPr wrap="square">
+            <a:spAutoFit/>
+          </a:bodyPr>
+          <a:lstStyle/>
+          <a:p>
+            <a:r>
+              <a:rPr lang="en-US" b="0" dirty="0">
+                <a:solidFill>
+                  <a:srgbClr val="569CD6"/>
+                </a:solidFill>
+                <a:effectLst/>
+                <a:latin typeface="Consolas" panose="020B0609020204030204" pitchFamily="49" charset="0"/>
+              </a:rPr>
+              <a:t>struct</a:t>
+            </a:r>
+            <a:r>
+              <a:rPr lang="en-US" b="0" dirty="0">
+                <a:solidFill>
+                  <a:srgbClr val="CCCCCC"/>
+                </a:solidFill>
+                <a:effectLst/>
+                <a:latin typeface="Consolas" panose="020B0609020204030204" pitchFamily="49" charset="0"/>
+              </a:rPr>
+              <a:t> </a:t>
+            </a:r>
+            <a:r>
+              <a:rPr lang="en-US" b="0" dirty="0">
+                <a:solidFill>
+                  <a:srgbClr val="4EC9B0"/>
+                </a:solidFill>
+                <a:effectLst/>
+                <a:latin typeface="Consolas" panose="020B0609020204030204" pitchFamily="49" charset="0"/>
+              </a:rPr>
+              <a:t>node</a:t>
+            </a:r>
+            <a:endParaRPr lang="en-US" b="0" dirty="0">
+              <a:solidFill>
+                <a:srgbClr val="CCCCCC"/>
+              </a:solidFill>
+              <a:effectLst/>
+              <a:latin typeface="Consolas" panose="020B0609020204030204" pitchFamily="49" charset="0"/>
+            </a:endParaRPr>
+          </a:p>
+          <a:p>
+            <a:r>
+              <a:rPr lang="en-US" b="0" dirty="0">
+                <a:solidFill>
+                  <a:srgbClr val="CCCCCC"/>
+                </a:solidFill>
+                <a:effectLst/>
+                <a:latin typeface="Consolas" panose="020B0609020204030204" pitchFamily="49" charset="0"/>
+              </a:rPr>
+              <a:t>{</a:t>
+            </a:r>
+          </a:p>
+          <a:p>
+            <a:r>
+              <a:rPr lang="en-US" b="0" dirty="0">
+                <a:solidFill>
+                  <a:srgbClr val="CCCCCC"/>
+                </a:solidFill>
+                <a:effectLst/>
+                <a:latin typeface="Consolas" panose="020B0609020204030204" pitchFamily="49" charset="0"/>
+              </a:rPr>
+              <a:t>    </a:t>
+            </a:r>
+            <a:r>
+              <a:rPr lang="en-US" b="0" dirty="0">
+                <a:solidFill>
+                  <a:srgbClr val="569CD6"/>
+                </a:solidFill>
+                <a:effectLst/>
+                <a:latin typeface="Consolas" panose="020B0609020204030204" pitchFamily="49" charset="0"/>
+              </a:rPr>
+              <a:t>int</a:t>
+            </a:r>
+            <a:r>
+              <a:rPr lang="en-US" b="0" dirty="0">
+                <a:solidFill>
+                  <a:srgbClr val="CCCCCC"/>
+                </a:solidFill>
+                <a:effectLst/>
+                <a:latin typeface="Consolas" panose="020B0609020204030204" pitchFamily="49" charset="0"/>
+              </a:rPr>
+              <a:t> </a:t>
+            </a:r>
+            <a:r>
+              <a:rPr lang="en-US" b="0" dirty="0">
+                <a:solidFill>
+                  <a:srgbClr val="9CDCFE"/>
+                </a:solidFill>
+                <a:effectLst/>
+                <a:latin typeface="Consolas" panose="020B0609020204030204" pitchFamily="49" charset="0"/>
+              </a:rPr>
+              <a:t>data</a:t>
+            </a:r>
+            <a:r>
+              <a:rPr lang="en-US" b="0" dirty="0">
+                <a:solidFill>
+                  <a:srgbClr val="CCCCCC"/>
+                </a:solidFill>
+                <a:effectLst/>
+                <a:latin typeface="Consolas" panose="020B0609020204030204" pitchFamily="49" charset="0"/>
+              </a:rPr>
+              <a:t>; </a:t>
+            </a:r>
+          </a:p>
+          <a:p>
+            <a:r>
+              <a:rPr lang="en-US" b="0" dirty="0">
+                <a:solidFill>
+                  <a:srgbClr val="CCCCCC"/>
+                </a:solidFill>
+                <a:effectLst/>
+                <a:latin typeface="Consolas" panose="020B0609020204030204" pitchFamily="49" charset="0"/>
+              </a:rPr>
+              <a:t>    </a:t>
+            </a:r>
+            <a:r>
+              <a:rPr lang="en-US" b="0" dirty="0">
+                <a:solidFill>
+                  <a:srgbClr val="569CD6"/>
+                </a:solidFill>
+                <a:effectLst/>
+                <a:latin typeface="Consolas" panose="020B0609020204030204" pitchFamily="49" charset="0"/>
+              </a:rPr>
+              <a:t>struct</a:t>
+            </a:r>
+            <a:r>
+              <a:rPr lang="en-US" b="0" dirty="0">
+                <a:solidFill>
+                  <a:srgbClr val="CCCCCC"/>
+                </a:solidFill>
+                <a:effectLst/>
+                <a:latin typeface="Consolas" panose="020B0609020204030204" pitchFamily="49" charset="0"/>
+              </a:rPr>
+              <a:t> </a:t>
+            </a:r>
+            <a:r>
+              <a:rPr lang="en-US" b="0" dirty="0">
+                <a:solidFill>
+                  <a:srgbClr val="4EC9B0"/>
+                </a:solidFill>
+                <a:effectLst/>
+                <a:latin typeface="Consolas" panose="020B0609020204030204" pitchFamily="49" charset="0"/>
+              </a:rPr>
+              <a:t>node</a:t>
+            </a:r>
+            <a:r>
+              <a:rPr lang="en-US" b="0" dirty="0">
+                <a:solidFill>
+                  <a:srgbClr val="CCCCCC"/>
+                </a:solidFill>
+                <a:effectLst/>
+                <a:latin typeface="Consolas" panose="020B0609020204030204" pitchFamily="49" charset="0"/>
+              </a:rPr>
+              <a:t> </a:t>
+            </a:r>
+            <a:r>
+              <a:rPr lang="en-US" b="0" dirty="0">
+                <a:solidFill>
+                  <a:srgbClr val="D4D4D4"/>
+                </a:solidFill>
+                <a:effectLst/>
+                <a:latin typeface="Consolas" panose="020B0609020204030204" pitchFamily="49" charset="0"/>
+              </a:rPr>
+              <a:t>*</a:t>
+            </a:r>
+            <a:r>
+              <a:rPr lang="en-US" b="0" dirty="0">
+                <a:solidFill>
+                  <a:srgbClr val="9CDCFE"/>
+                </a:solidFill>
+                <a:effectLst/>
+                <a:latin typeface="Consolas" panose="020B0609020204030204" pitchFamily="49" charset="0"/>
+              </a:rPr>
+              <a:t>next</a:t>
+            </a:r>
+            <a:r>
+              <a:rPr lang="en-US" b="0" dirty="0">
+                <a:solidFill>
+                  <a:srgbClr val="CCCCCC"/>
+                </a:solidFill>
+                <a:effectLst/>
+                <a:latin typeface="Consolas" panose="020B0609020204030204" pitchFamily="49" charset="0"/>
+              </a:rPr>
+              <a:t>;</a:t>
+            </a:r>
+          </a:p>
+          <a:p>
+            <a:r>
+              <a:rPr lang="en-US" b="0" dirty="0">
+                <a:solidFill>
+                  <a:srgbClr val="CCCCCC"/>
+                </a:solidFill>
+                <a:effectLst/>
+                <a:latin typeface="Consolas" panose="020B0609020204030204" pitchFamily="49" charset="0"/>
+              </a:rPr>
+              <a:t>};</a:t>
+            </a:r>
+          </a:p>
+          <a:p>
+            <a:r>
+              <a:rPr lang="en-US" b="0" dirty="0">
+                <a:solidFill>
+                  <a:srgbClr val="569CD6"/>
+                </a:solidFill>
+                <a:effectLst/>
+                <a:latin typeface="Consolas" panose="020B0609020204030204" pitchFamily="49" charset="0"/>
+              </a:rPr>
+              <a:t>typedef</a:t>
+            </a:r>
+            <a:r>
+              <a:rPr lang="en-US" b="0" dirty="0">
+                <a:solidFill>
+                  <a:srgbClr val="CCCCCC"/>
+                </a:solidFill>
+                <a:effectLst/>
+                <a:latin typeface="Consolas" panose="020B0609020204030204" pitchFamily="49" charset="0"/>
+              </a:rPr>
+              <a:t> </a:t>
+            </a:r>
+            <a:r>
+              <a:rPr lang="en-US" b="0" dirty="0">
+                <a:solidFill>
+                  <a:srgbClr val="569CD6"/>
+                </a:solidFill>
+                <a:effectLst/>
+                <a:latin typeface="Consolas" panose="020B0609020204030204" pitchFamily="49" charset="0"/>
+              </a:rPr>
+              <a:t>struct</a:t>
+            </a:r>
+            <a:r>
+              <a:rPr lang="en-US" b="0" dirty="0">
+                <a:solidFill>
+                  <a:srgbClr val="CCCCCC"/>
+                </a:solidFill>
+                <a:effectLst/>
+                <a:latin typeface="Consolas" panose="020B0609020204030204" pitchFamily="49" charset="0"/>
+              </a:rPr>
+              <a:t> </a:t>
+            </a:r>
+            <a:r>
+              <a:rPr lang="en-US" b="0" dirty="0">
+                <a:solidFill>
+                  <a:srgbClr val="4EC9B0"/>
+                </a:solidFill>
+                <a:effectLst/>
+                <a:latin typeface="Consolas" panose="020B0609020204030204" pitchFamily="49" charset="0"/>
+              </a:rPr>
+              <a:t>node</a:t>
+            </a:r>
+            <a:r>
+              <a:rPr lang="en-US" b="0" dirty="0">
+                <a:solidFill>
+                  <a:srgbClr val="CCCCCC"/>
+                </a:solidFill>
+                <a:effectLst/>
+                <a:latin typeface="Consolas" panose="020B0609020204030204" pitchFamily="49" charset="0"/>
+              </a:rPr>
+              <a:t> </a:t>
+            </a:r>
+            <a:r>
+              <a:rPr lang="en-US" b="0" dirty="0" err="1">
+                <a:solidFill>
+                  <a:srgbClr val="4EC9B0"/>
+                </a:solidFill>
+                <a:effectLst/>
+                <a:latin typeface="Consolas" panose="020B0609020204030204" pitchFamily="49" charset="0"/>
+              </a:rPr>
+              <a:t>node_t</a:t>
+            </a:r>
+            <a:r>
+              <a:rPr lang="en-US" b="0" dirty="0">
+                <a:solidFill>
+                  <a:srgbClr val="CCCCCC"/>
+                </a:solidFill>
+                <a:effectLst/>
+                <a:latin typeface="Consolas" panose="020B0609020204030204" pitchFamily="49" charset="0"/>
+              </a:rPr>
+              <a:t>;</a:t>
+            </a:r>
+          </a:p>
+          <a:p>
+            <a:br>
+              <a:rPr lang="en-US" b="0" dirty="0">
+                <a:solidFill>
+                  <a:srgbClr val="CCCCCC"/>
+                </a:solidFill>
+                <a:effectLst/>
+                <a:latin typeface="Consolas" panose="020B0609020204030204" pitchFamily="49" charset="0"/>
+              </a:rPr>
+            </a:br>
+            <a:endParaRPr lang="en-US" b="0" dirty="0">
+              <a:solidFill>
+                <a:srgbClr val="CCCCCC"/>
+              </a:solidFill>
+              <a:effectLst/>
+              <a:latin typeface="Consolas" panose="020B0609020204030204" pitchFamily="49" charset="0"/>
+            </a:endParaRPr>
+          </a:p>
+        </p:txBody>
+      </p:sp>
     </p:spTree>
     <p:extLst>
       <p:ext uri="{BB962C8B-B14F-4D97-AF65-F5344CB8AC3E}">
-        <p14:creationId xmlns:p14="http://schemas.microsoft.com/office/powerpoint/2010/main" val="2413847995"/>
+        <p14:creationId xmlns:p14="http://schemas.microsoft.com/office/powerpoint/2010/main" val="2311783935"/>
+      </p:ext>
+    </p:extLst>
+  </p:cSld>
+  <p:clrMapOvr>
+    <a:masterClrMapping/>
+  </p:clrMapOvr>
+</p:sld>
+</file>
+
+<file path=ppt/slides/slide23.xml><?xml version="1.0" encoding="utf-8"?>
+<p:sld xmlns:a="http://schemas.openxmlformats.org/drawingml/2006/main" xmlns:r="http://schemas.openxmlformats.org/officeDocument/2006/relationships" xmlns:p="http://schemas.openxmlformats.org/presentationml/2006/main">
+  <p:cSld>
+    <p:spTree>
+      <p:nvGrpSpPr>
+        <p:cNvPr id="1" name=""/>
+        <p:cNvGrpSpPr/>
+        <p:nvPr/>
+      </p:nvGrpSpPr>
+      <p:grpSpPr>
+        <a:xfrm>
+          <a:off x="0" y="0"/>
+          <a:ext cx="0" cy="0"/>
+          <a:chOff x="0" y="0"/>
+          <a:chExt cx="0" cy="0"/>
+        </a:xfrm>
+      </p:grpSpPr>
+      <p:sp>
+        <p:nvSpPr>
+          <p:cNvPr id="9" name="Заголовок 2">
+            <a:extLst>
+              <a:ext uri="{FF2B5EF4-FFF2-40B4-BE49-F238E27FC236}">
+                <a16:creationId xmlns:a16="http://schemas.microsoft.com/office/drawing/2014/main" id="{CEF7D3C9-F027-4DFF-AC25-52606D3BE3A7}"/>
+              </a:ext>
+            </a:extLst>
+          </p:cNvPr>
+          <p:cNvSpPr txBox="1">
+            <a:spLocks/>
+          </p:cNvSpPr>
+          <p:nvPr/>
+        </p:nvSpPr>
+        <p:spPr>
+          <a:xfrm>
+            <a:off x="1133141" y="149271"/>
+            <a:ext cx="9925717" cy="927688"/>
+          </a:xfrm>
+          <a:prstGeom prst="rect">
+            <a:avLst/>
+          </a:prstGeom>
+        </p:spPr>
+        <p:txBody>
+          <a:bodyPr vert="horz" lIns="91440" tIns="45720" rIns="91440" bIns="45720" rtlCol="0" anchor="b">
+            <a:normAutofit/>
+          </a:bodyPr>
+          <a:lstStyle>
+            <a:lvl1pPr algn="ctr" defTabSz="914400" rtl="0" eaLnBrk="1" latinLnBrk="0" hangingPunct="1">
+              <a:lnSpc>
+                <a:spcPct val="90000"/>
+              </a:lnSpc>
+              <a:spcBef>
+                <a:spcPct val="0"/>
+              </a:spcBef>
+              <a:buNone/>
+              <a:defRPr sz="6000" kern="1200">
+                <a:solidFill>
+                  <a:schemeClr val="tx1"/>
+                </a:solidFill>
+                <a:latin typeface="+mj-lt"/>
+                <a:ea typeface="+mj-ea"/>
+                <a:cs typeface="+mj-cs"/>
+              </a:defRPr>
+            </a:lvl1pPr>
+          </a:lstStyle>
+          <a:p>
+            <a:r>
+              <a:rPr lang="ru-RU" dirty="0">
+                <a:latin typeface="Times New Roman" panose="02020603050405020304" pitchFamily="18" charset="0"/>
+                <a:cs typeface="Times New Roman" panose="02020603050405020304" pitchFamily="18" charset="0"/>
+              </a:rPr>
+              <a:t>Связанный список</a:t>
+            </a:r>
+          </a:p>
+        </p:txBody>
+      </p:sp>
+      <p:sp>
+        <p:nvSpPr>
+          <p:cNvPr id="8" name="TextBox 7">
+            <a:extLst>
+              <a:ext uri="{FF2B5EF4-FFF2-40B4-BE49-F238E27FC236}">
+                <a16:creationId xmlns:a16="http://schemas.microsoft.com/office/drawing/2014/main" id="{561099DA-8A51-4746-863E-498F9D99C754}"/>
+              </a:ext>
+            </a:extLst>
+          </p:cNvPr>
+          <p:cNvSpPr txBox="1"/>
+          <p:nvPr/>
+        </p:nvSpPr>
+        <p:spPr>
+          <a:xfrm>
+            <a:off x="907569" y="1098841"/>
+            <a:ext cx="10597486" cy="923330"/>
+          </a:xfrm>
+          <a:prstGeom prst="rect">
+            <a:avLst/>
+          </a:prstGeom>
+          <a:noFill/>
+        </p:spPr>
+        <p:txBody>
+          <a:bodyPr wrap="square">
+            <a:spAutoFit/>
+          </a:bodyPr>
+          <a:lstStyle/>
+          <a:p>
+            <a:r>
+              <a:rPr lang="ru-RU" dirty="0">
+                <a:latin typeface="Times New Roman" panose="02020603050405020304" pitchFamily="18" charset="0"/>
+                <a:cs typeface="Times New Roman" panose="02020603050405020304" pitchFamily="18" charset="0"/>
+              </a:rPr>
+              <a:t>	Связанные список — это структура данных, которая хранит элементы в линейном порядке и позволяет вставлять и удалять элементы в любом месте последовательности. Списки могут быть односвязными, двусвязными или круговыми (циклическими). </a:t>
+            </a:r>
+          </a:p>
+        </p:txBody>
+      </p:sp>
+      <p:pic>
+        <p:nvPicPr>
+          <p:cNvPr id="17" name="Рисунок 16">
+            <a:extLst>
+              <a:ext uri="{FF2B5EF4-FFF2-40B4-BE49-F238E27FC236}">
+                <a16:creationId xmlns:a16="http://schemas.microsoft.com/office/drawing/2014/main" id="{842C138E-3C6A-4642-BD85-6E4898A2E83E}"/>
+              </a:ext>
+            </a:extLst>
+          </p:cNvPr>
+          <p:cNvPicPr>
+            <a:picLocks noChangeAspect="1"/>
+          </p:cNvPicPr>
+          <p:nvPr/>
+        </p:nvPicPr>
+        <p:blipFill rotWithShape="1">
+          <a:blip r:embed="rId3"/>
+          <a:srcRect l="1207" t="7311" r="-1207" b="213"/>
+          <a:stretch/>
+        </p:blipFill>
+        <p:spPr>
+          <a:xfrm>
+            <a:off x="1133141" y="2281643"/>
+            <a:ext cx="10614433" cy="4181531"/>
+          </a:xfrm>
+          <a:prstGeom prst="rect">
+            <a:avLst/>
+          </a:prstGeom>
+        </p:spPr>
+      </p:pic>
+    </p:spTree>
+    <p:extLst>
+      <p:ext uri="{BB962C8B-B14F-4D97-AF65-F5344CB8AC3E}">
+        <p14:creationId xmlns:p14="http://schemas.microsoft.com/office/powerpoint/2010/main" val="2253777980"/>
       </p:ext>
     </p:extLst>
   </p:cSld>
@@ -16353,10 +16616,10 @@
       </p:pic>
       <p:pic>
         <p:nvPicPr>
-          <p:cNvPr id="5" name="Picture 2" descr="alt text">
+          <p:cNvPr id="6" name="Picture 4" descr="The Linked List Data Structure. Data Structures | by Julia Di Monte | Medium">
             <a:extLst>
               <a:ext uri="{FF2B5EF4-FFF2-40B4-BE49-F238E27FC236}">
-                <a16:creationId xmlns:a16="http://schemas.microsoft.com/office/drawing/2014/main" id="{3128A57A-4357-4D8B-AFAF-2031CB28EF81}"/>
+                <a16:creationId xmlns:a16="http://schemas.microsoft.com/office/drawing/2014/main" id="{8619C321-A1A9-42DB-8D66-885DB56C4C51}"/>
               </a:ext>
             </a:extLst>
           </p:cNvPr>
@@ -16380,8 +16643,8 @@
         </p:blipFill>
         <p:spPr bwMode="auto">
           <a:xfrm>
-            <a:off x="4599071" y="4129274"/>
-            <a:ext cx="7460705" cy="1937616"/>
+            <a:off x="4520863" y="3869367"/>
+            <a:ext cx="7671137" cy="2220592"/>
           </a:xfrm>
           <a:prstGeom prst="rect">
             <a:avLst/>
@@ -16398,10 +16661,139 @@
           </a:extLst>
         </p:spPr>
       </p:pic>
+      <p:pic>
+        <p:nvPicPr>
+          <p:cNvPr id="7" name="Рисунок 6">
+            <a:extLst>
+              <a:ext uri="{FF2B5EF4-FFF2-40B4-BE49-F238E27FC236}">
+                <a16:creationId xmlns:a16="http://schemas.microsoft.com/office/drawing/2014/main" id="{0A4BE6D8-085D-46E2-A989-4791CA66607F}"/>
+              </a:ext>
+            </a:extLst>
+          </p:cNvPr>
+          <p:cNvPicPr>
+            <a:picLocks noChangeAspect="1"/>
+          </p:cNvPicPr>
+          <p:nvPr/>
+        </p:nvPicPr>
+        <p:blipFill rotWithShape="1">
+          <a:blip r:embed="rId5">
+            <a:extLst>
+              <a:ext uri="{28A0092B-C50C-407E-A947-70E740481C1C}">
+                <a14:useLocalDpi xmlns:a14="http://schemas.microsoft.com/office/drawing/2010/main" val="0"/>
+              </a:ext>
+            </a:extLst>
+          </a:blip>
+          <a:srcRect l="12020" t="12071"/>
+          <a:stretch/>
+        </p:blipFill>
+        <p:spPr>
+          <a:xfrm>
+            <a:off x="6819901" y="2988633"/>
+            <a:ext cx="1028700" cy="1202586"/>
+          </a:xfrm>
+          <a:prstGeom prst="rect">
+            <a:avLst/>
+          </a:prstGeom>
+        </p:spPr>
+      </p:pic>
+      <p:sp>
+        <p:nvSpPr>
+          <p:cNvPr id="2" name="Прямоугольник 1">
+            <a:extLst>
+              <a:ext uri="{FF2B5EF4-FFF2-40B4-BE49-F238E27FC236}">
+                <a16:creationId xmlns:a16="http://schemas.microsoft.com/office/drawing/2014/main" id="{AEC3C0BC-09F2-41A1-9443-552D7C35AAAE}"/>
+              </a:ext>
+            </a:extLst>
+          </p:cNvPr>
+          <p:cNvSpPr/>
+          <p:nvPr/>
+        </p:nvSpPr>
+        <p:spPr>
+          <a:xfrm>
+            <a:off x="6819901" y="2988632"/>
+            <a:ext cx="1028700" cy="1202587"/>
+          </a:xfrm>
+          <a:prstGeom prst="rect">
+            <a:avLst/>
+          </a:prstGeom>
+          <a:noFill/>
+          <a:ln w="38100">
+            <a:solidFill>
+              <a:srgbClr val="FF0000"/>
+            </a:solidFill>
+          </a:ln>
+        </p:spPr>
+        <p:style>
+          <a:lnRef idx="2">
+            <a:schemeClr val="accent1">
+              <a:shade val="50000"/>
+            </a:schemeClr>
+          </a:lnRef>
+          <a:fillRef idx="1">
+            <a:schemeClr val="accent1"/>
+          </a:fillRef>
+          <a:effectRef idx="0">
+            <a:schemeClr val="accent1"/>
+          </a:effectRef>
+          <a:fontRef idx="minor">
+            <a:schemeClr val="lt1"/>
+          </a:fontRef>
+        </p:style>
+        <p:txBody>
+          <a:bodyPr rtlCol="0" anchor="ctr"/>
+          <a:lstStyle/>
+          <a:p>
+            <a:pPr algn="ctr"/>
+            <a:endParaRPr lang="ru-RU"/>
+          </a:p>
+        </p:txBody>
+      </p:sp>
+      <p:cxnSp>
+        <p:nvCxnSpPr>
+          <p:cNvPr id="8" name="Прямая со стрелкой 7">
+            <a:extLst>
+              <a:ext uri="{FF2B5EF4-FFF2-40B4-BE49-F238E27FC236}">
+                <a16:creationId xmlns:a16="http://schemas.microsoft.com/office/drawing/2014/main" id="{309EDC3A-21A9-48D2-88E9-E0C457A8EDAB}"/>
+              </a:ext>
+            </a:extLst>
+          </p:cNvPr>
+          <p:cNvCxnSpPr/>
+          <p:nvPr/>
+        </p:nvCxnSpPr>
+        <p:spPr>
+          <a:xfrm>
+            <a:off x="7134225" y="4191219"/>
+            <a:ext cx="66675" cy="495081"/>
+          </a:xfrm>
+          <a:prstGeom prst="straightConnector1">
+            <a:avLst/>
+          </a:prstGeom>
+          <a:ln w="38100">
+            <a:solidFill>
+              <a:srgbClr val="FF0000"/>
+            </a:solidFill>
+            <a:tailEnd type="triangle"/>
+          </a:ln>
+        </p:spPr>
+        <p:style>
+          <a:lnRef idx="1">
+            <a:schemeClr val="accent1"/>
+          </a:lnRef>
+          <a:fillRef idx="0">
+            <a:schemeClr val="accent1"/>
+          </a:fillRef>
+          <a:effectRef idx="0">
+            <a:schemeClr val="accent1"/>
+          </a:effectRef>
+          <a:fontRef idx="minor">
+            <a:schemeClr val="tx1"/>
+          </a:fontRef>
+        </p:style>
+      </p:cxnSp>
     </p:spTree>
     <p:extLst>
       <p:ext uri="{BB962C8B-B14F-4D97-AF65-F5344CB8AC3E}">
-        <p14:creationId xmlns:p14="http://schemas.microsoft.com/office/powerpoint/2010/main" val="2293487565"/>
+        <p14:creationId xmlns:p14="http://schemas.microsoft.com/office/powerpoint/2010/main" val="2671849062"/>
       </p:ext>
     </p:extLst>
   </p:cSld>
@@ -16412,567 +16804,6 @@
 </file>
 
 <file path=ppt/slides/slide25.xml><?xml version="1.0" encoding="utf-8"?>
-<p:sld xmlns:a="http://schemas.openxmlformats.org/drawingml/2006/main" xmlns:r="http://schemas.openxmlformats.org/officeDocument/2006/relationships" xmlns:p="http://schemas.openxmlformats.org/presentationml/2006/main">
-  <p:cSld>
-    <p:spTree>
-      <p:nvGrpSpPr>
-        <p:cNvPr id="1" name=""/>
-        <p:cNvGrpSpPr/>
-        <p:nvPr/>
-      </p:nvGrpSpPr>
-      <p:grpSpPr>
-        <a:xfrm>
-          <a:off x="0" y="0"/>
-          <a:ext cx="0" cy="0"/>
-          <a:chOff x="0" y="0"/>
-          <a:chExt cx="0" cy="0"/>
-        </a:xfrm>
-      </p:grpSpPr>
-      <p:sp>
-        <p:nvSpPr>
-          <p:cNvPr id="5" name="Заголовок 2">
-            <a:extLst>
-              <a:ext uri="{FF2B5EF4-FFF2-40B4-BE49-F238E27FC236}">
-                <a16:creationId xmlns:a16="http://schemas.microsoft.com/office/drawing/2014/main" id="{8B69733F-0158-48CC-AD66-3D9A4AB92330}"/>
-              </a:ext>
-            </a:extLst>
-          </p:cNvPr>
-          <p:cNvSpPr txBox="1">
-            <a:spLocks/>
-          </p:cNvSpPr>
-          <p:nvPr/>
-        </p:nvSpPr>
-        <p:spPr>
-          <a:xfrm>
-            <a:off x="1133141" y="289948"/>
-            <a:ext cx="9925717" cy="927688"/>
-          </a:xfrm>
-          <a:prstGeom prst="rect">
-            <a:avLst/>
-          </a:prstGeom>
-        </p:spPr>
-        <p:txBody>
-          <a:bodyPr vert="horz" lIns="91440" tIns="45720" rIns="91440" bIns="45720" rtlCol="0" anchor="b">
-            <a:normAutofit fontScale="70000" lnSpcReduction="20000"/>
-          </a:bodyPr>
-          <a:lstStyle>
-            <a:lvl1pPr algn="ctr" defTabSz="914400" rtl="0" eaLnBrk="1" latinLnBrk="0" hangingPunct="1">
-              <a:lnSpc>
-                <a:spcPct val="90000"/>
-              </a:lnSpc>
-              <a:spcBef>
-                <a:spcPct val="0"/>
-              </a:spcBef>
-              <a:buNone/>
-              <a:defRPr sz="6000" kern="1200">
-                <a:solidFill>
-                  <a:schemeClr val="tx1"/>
-                </a:solidFill>
-                <a:latin typeface="+mj-lt"/>
-                <a:ea typeface="+mj-ea"/>
-                <a:cs typeface="+mj-cs"/>
-              </a:defRPr>
-            </a:lvl1pPr>
-          </a:lstStyle>
-          <a:p>
-            <a:r>
-              <a:rPr lang="ru-RU" dirty="0">
-                <a:latin typeface="Times New Roman" panose="02020603050405020304" pitchFamily="18" charset="0"/>
-                <a:cs typeface="Times New Roman" panose="02020603050405020304" pitchFamily="18" charset="0"/>
-              </a:rPr>
-              <a:t>Односвязный список (</a:t>
-            </a:r>
-            <a:r>
-              <a:rPr lang="en-US" dirty="0">
-                <a:latin typeface="Times New Roman" panose="02020603050405020304" pitchFamily="18" charset="0"/>
-                <a:cs typeface="Times New Roman" panose="02020603050405020304" pitchFamily="18" charset="0"/>
-              </a:rPr>
-              <a:t>Singly Linked List)</a:t>
-            </a:r>
-            <a:endParaRPr lang="ru-RU" dirty="0">
-              <a:latin typeface="Times New Roman" panose="02020603050405020304" pitchFamily="18" charset="0"/>
-              <a:cs typeface="Times New Roman" panose="02020603050405020304" pitchFamily="18" charset="0"/>
-            </a:endParaRPr>
-          </a:p>
-        </p:txBody>
-      </p:sp>
-      <p:sp>
-        <p:nvSpPr>
-          <p:cNvPr id="10" name="TextBox 9">
-            <a:extLst>
-              <a:ext uri="{FF2B5EF4-FFF2-40B4-BE49-F238E27FC236}">
-                <a16:creationId xmlns:a16="http://schemas.microsoft.com/office/drawing/2014/main" id="{6E21BE18-6217-41B6-A87E-350F1EFEBA5A}"/>
-              </a:ext>
-            </a:extLst>
-          </p:cNvPr>
-          <p:cNvSpPr txBox="1"/>
-          <p:nvPr/>
-        </p:nvSpPr>
-        <p:spPr>
-          <a:xfrm>
-            <a:off x="1502453" y="1600938"/>
-            <a:ext cx="9867638" cy="923330"/>
-          </a:xfrm>
-          <a:prstGeom prst="rect">
-            <a:avLst/>
-          </a:prstGeom>
-          <a:noFill/>
-        </p:spPr>
-        <p:txBody>
-          <a:bodyPr wrap="square">
-            <a:spAutoFit/>
-          </a:bodyPr>
-          <a:lstStyle/>
-          <a:p>
-            <a:r>
-              <a:rPr lang="ru-RU" dirty="0">
-                <a:latin typeface="Times New Roman" panose="02020603050405020304" pitchFamily="18" charset="0"/>
-                <a:cs typeface="Times New Roman" panose="02020603050405020304" pitchFamily="18" charset="0"/>
-              </a:rPr>
-              <a:t>Односвязный список состоит из узлов. В каждом узле хранится указатель на следующий узел и сами данные. Указатели последнего узла (хвост - </a:t>
-            </a:r>
-            <a:r>
-              <a:rPr lang="ru-RU" dirty="0" err="1">
-                <a:latin typeface="Times New Roman" panose="02020603050405020304" pitchFamily="18" charset="0"/>
-                <a:cs typeface="Times New Roman" panose="02020603050405020304" pitchFamily="18" charset="0"/>
-              </a:rPr>
-              <a:t>tail</a:t>
-            </a:r>
-            <a:r>
-              <a:rPr lang="ru-RU" dirty="0">
-                <a:latin typeface="Times New Roman" panose="02020603050405020304" pitchFamily="18" charset="0"/>
-                <a:cs typeface="Times New Roman" panose="02020603050405020304" pitchFamily="18" charset="0"/>
-              </a:rPr>
-              <a:t>) указывают на NULL, что указывает на конец связанного списка (т.е. дальше нет узлов)</a:t>
-            </a:r>
-          </a:p>
-        </p:txBody>
-      </p:sp>
-      <p:pic>
-        <p:nvPicPr>
-          <p:cNvPr id="2051" name="Picture 3" descr="alt text">
-            <a:extLst>
-              <a:ext uri="{FF2B5EF4-FFF2-40B4-BE49-F238E27FC236}">
-                <a16:creationId xmlns:a16="http://schemas.microsoft.com/office/drawing/2014/main" id="{1CB01C8C-B9C7-44F0-8F01-9043955965B9}"/>
-              </a:ext>
-            </a:extLst>
-          </p:cNvPr>
-          <p:cNvPicPr>
-            <a:picLocks noChangeAspect="1" noChangeArrowheads="1"/>
-          </p:cNvPicPr>
-          <p:nvPr/>
-        </p:nvPicPr>
-        <p:blipFill>
-          <a:blip r:embed="rId3">
-            <a:extLst>
-              <a:ext uri="{28A0092B-C50C-407E-A947-70E740481C1C}">
-                <a14:useLocalDpi xmlns:a14="http://schemas.microsoft.com/office/drawing/2010/main" val="0"/>
-              </a:ext>
-            </a:extLst>
-          </a:blip>
-          <a:srcRect/>
-          <a:stretch>
-            <a:fillRect/>
-          </a:stretch>
-        </p:blipFill>
-        <p:spPr bwMode="auto">
-          <a:xfrm>
-            <a:off x="5253070" y="3429000"/>
-            <a:ext cx="6455980" cy="1617791"/>
-          </a:xfrm>
-          <a:prstGeom prst="rect">
-            <a:avLst/>
-          </a:prstGeom>
-          <a:noFill/>
-          <a:extLst>
-            <a:ext uri="{909E8E84-426E-40DD-AFC4-6F175D3DCCD1}">
-              <a14:hiddenFill xmlns:a14="http://schemas.microsoft.com/office/drawing/2010/main">
-                <a:solidFill>
-                  <a:srgbClr val="FFFFFF"/>
-                </a:solidFill>
-              </a14:hiddenFill>
-            </a:ext>
-          </a:extLst>
-        </p:spPr>
-      </p:pic>
-      <p:sp>
-        <p:nvSpPr>
-          <p:cNvPr id="13" name="TextBox 12">
-            <a:extLst>
-              <a:ext uri="{FF2B5EF4-FFF2-40B4-BE49-F238E27FC236}">
-                <a16:creationId xmlns:a16="http://schemas.microsoft.com/office/drawing/2014/main" id="{BF82BCB8-FAAB-4D02-B56B-49CDC2E7FCA5}"/>
-              </a:ext>
-            </a:extLst>
-          </p:cNvPr>
-          <p:cNvSpPr txBox="1"/>
-          <p:nvPr/>
-        </p:nvSpPr>
-        <p:spPr>
-          <a:xfrm>
-            <a:off x="2697315" y="5277658"/>
-            <a:ext cx="5891738" cy="369332"/>
-          </a:xfrm>
-          <a:prstGeom prst="rect">
-            <a:avLst/>
-          </a:prstGeom>
-          <a:noFill/>
-        </p:spPr>
-        <p:txBody>
-          <a:bodyPr wrap="square">
-            <a:spAutoFit/>
-          </a:bodyPr>
-          <a:lstStyle/>
-          <a:p>
-            <a:r>
-              <a:rPr lang="ru-RU" dirty="0">
-                <a:latin typeface="Times New Roman" panose="02020603050405020304" pitchFamily="18" charset="0"/>
-                <a:cs typeface="Times New Roman" panose="02020603050405020304" pitchFamily="18" charset="0"/>
-              </a:rPr>
-              <a:t>Пример структуры узла и односвязного списка из 3 узлов</a:t>
-            </a:r>
-          </a:p>
-        </p:txBody>
-      </p:sp>
-      <p:sp>
-        <p:nvSpPr>
-          <p:cNvPr id="19" name="TextBox 18">
-            <a:extLst>
-              <a:ext uri="{FF2B5EF4-FFF2-40B4-BE49-F238E27FC236}">
-                <a16:creationId xmlns:a16="http://schemas.microsoft.com/office/drawing/2014/main" id="{E6E7D816-7E57-4241-A588-BFFF64D54DF0}"/>
-              </a:ext>
-            </a:extLst>
-          </p:cNvPr>
-          <p:cNvSpPr txBox="1"/>
-          <p:nvPr/>
-        </p:nvSpPr>
-        <p:spPr>
-          <a:xfrm>
-            <a:off x="1502453" y="3359899"/>
-            <a:ext cx="3750617" cy="2308324"/>
-          </a:xfrm>
-          <a:prstGeom prst="rect">
-            <a:avLst/>
-          </a:prstGeom>
-          <a:noFill/>
-        </p:spPr>
-        <p:txBody>
-          <a:bodyPr wrap="square">
-            <a:spAutoFit/>
-          </a:bodyPr>
-          <a:lstStyle/>
-          <a:p>
-            <a:r>
-              <a:rPr lang="en-US" b="0" dirty="0">
-                <a:solidFill>
-                  <a:srgbClr val="569CD6"/>
-                </a:solidFill>
-                <a:effectLst/>
-                <a:latin typeface="Consolas" panose="020B0609020204030204" pitchFamily="49" charset="0"/>
-              </a:rPr>
-              <a:t>struct</a:t>
-            </a:r>
-            <a:r>
-              <a:rPr lang="en-US" b="0" dirty="0">
-                <a:solidFill>
-                  <a:srgbClr val="CCCCCC"/>
-                </a:solidFill>
-                <a:effectLst/>
-                <a:latin typeface="Consolas" panose="020B0609020204030204" pitchFamily="49" charset="0"/>
-              </a:rPr>
-              <a:t> </a:t>
-            </a:r>
-            <a:r>
-              <a:rPr lang="en-US" b="0" dirty="0">
-                <a:solidFill>
-                  <a:srgbClr val="4EC9B0"/>
-                </a:solidFill>
-                <a:effectLst/>
-                <a:latin typeface="Consolas" panose="020B0609020204030204" pitchFamily="49" charset="0"/>
-              </a:rPr>
-              <a:t>node</a:t>
-            </a:r>
-            <a:endParaRPr lang="en-US" b="0" dirty="0">
-              <a:solidFill>
-                <a:srgbClr val="CCCCCC"/>
-              </a:solidFill>
-              <a:effectLst/>
-              <a:latin typeface="Consolas" panose="020B0609020204030204" pitchFamily="49" charset="0"/>
-            </a:endParaRPr>
-          </a:p>
-          <a:p>
-            <a:r>
-              <a:rPr lang="en-US" b="0" dirty="0">
-                <a:solidFill>
-                  <a:srgbClr val="CCCCCC"/>
-                </a:solidFill>
-                <a:effectLst/>
-                <a:latin typeface="Consolas" panose="020B0609020204030204" pitchFamily="49" charset="0"/>
-              </a:rPr>
-              <a:t>{</a:t>
-            </a:r>
-          </a:p>
-          <a:p>
-            <a:r>
-              <a:rPr lang="en-US" b="0" dirty="0">
-                <a:solidFill>
-                  <a:srgbClr val="CCCCCC"/>
-                </a:solidFill>
-                <a:effectLst/>
-                <a:latin typeface="Consolas" panose="020B0609020204030204" pitchFamily="49" charset="0"/>
-              </a:rPr>
-              <a:t>    </a:t>
-            </a:r>
-            <a:r>
-              <a:rPr lang="en-US" b="0" dirty="0">
-                <a:solidFill>
-                  <a:srgbClr val="569CD6"/>
-                </a:solidFill>
-                <a:effectLst/>
-                <a:latin typeface="Consolas" panose="020B0609020204030204" pitchFamily="49" charset="0"/>
-              </a:rPr>
-              <a:t>int</a:t>
-            </a:r>
-            <a:r>
-              <a:rPr lang="en-US" b="0" dirty="0">
-                <a:solidFill>
-                  <a:srgbClr val="CCCCCC"/>
-                </a:solidFill>
-                <a:effectLst/>
-                <a:latin typeface="Consolas" panose="020B0609020204030204" pitchFamily="49" charset="0"/>
-              </a:rPr>
-              <a:t> </a:t>
-            </a:r>
-            <a:r>
-              <a:rPr lang="en-US" b="0" dirty="0">
-                <a:solidFill>
-                  <a:srgbClr val="9CDCFE"/>
-                </a:solidFill>
-                <a:effectLst/>
-                <a:latin typeface="Consolas" panose="020B0609020204030204" pitchFamily="49" charset="0"/>
-              </a:rPr>
-              <a:t>data</a:t>
-            </a:r>
-            <a:r>
-              <a:rPr lang="en-US" b="0" dirty="0">
-                <a:solidFill>
-                  <a:srgbClr val="CCCCCC"/>
-                </a:solidFill>
-                <a:effectLst/>
-                <a:latin typeface="Consolas" panose="020B0609020204030204" pitchFamily="49" charset="0"/>
-              </a:rPr>
-              <a:t>; </a:t>
-            </a:r>
-          </a:p>
-          <a:p>
-            <a:r>
-              <a:rPr lang="en-US" b="0" dirty="0">
-                <a:solidFill>
-                  <a:srgbClr val="CCCCCC"/>
-                </a:solidFill>
-                <a:effectLst/>
-                <a:latin typeface="Consolas" panose="020B0609020204030204" pitchFamily="49" charset="0"/>
-              </a:rPr>
-              <a:t>    </a:t>
-            </a:r>
-            <a:r>
-              <a:rPr lang="en-US" b="0" dirty="0">
-                <a:solidFill>
-                  <a:srgbClr val="569CD6"/>
-                </a:solidFill>
-                <a:effectLst/>
-                <a:latin typeface="Consolas" panose="020B0609020204030204" pitchFamily="49" charset="0"/>
-              </a:rPr>
-              <a:t>struct</a:t>
-            </a:r>
-            <a:r>
-              <a:rPr lang="en-US" b="0" dirty="0">
-                <a:solidFill>
-                  <a:srgbClr val="CCCCCC"/>
-                </a:solidFill>
-                <a:effectLst/>
-                <a:latin typeface="Consolas" panose="020B0609020204030204" pitchFamily="49" charset="0"/>
-              </a:rPr>
-              <a:t> </a:t>
-            </a:r>
-            <a:r>
-              <a:rPr lang="en-US" b="0" dirty="0">
-                <a:solidFill>
-                  <a:srgbClr val="4EC9B0"/>
-                </a:solidFill>
-                <a:effectLst/>
-                <a:latin typeface="Consolas" panose="020B0609020204030204" pitchFamily="49" charset="0"/>
-              </a:rPr>
-              <a:t>node</a:t>
-            </a:r>
-            <a:r>
-              <a:rPr lang="en-US" b="0" dirty="0">
-                <a:solidFill>
-                  <a:srgbClr val="CCCCCC"/>
-                </a:solidFill>
-                <a:effectLst/>
-                <a:latin typeface="Consolas" panose="020B0609020204030204" pitchFamily="49" charset="0"/>
-              </a:rPr>
-              <a:t> </a:t>
-            </a:r>
-            <a:r>
-              <a:rPr lang="en-US" b="0" dirty="0">
-                <a:solidFill>
-                  <a:srgbClr val="D4D4D4"/>
-                </a:solidFill>
-                <a:effectLst/>
-                <a:latin typeface="Consolas" panose="020B0609020204030204" pitchFamily="49" charset="0"/>
-              </a:rPr>
-              <a:t>*</a:t>
-            </a:r>
-            <a:r>
-              <a:rPr lang="en-US" b="0" dirty="0">
-                <a:solidFill>
-                  <a:srgbClr val="9CDCFE"/>
-                </a:solidFill>
-                <a:effectLst/>
-                <a:latin typeface="Consolas" panose="020B0609020204030204" pitchFamily="49" charset="0"/>
-              </a:rPr>
-              <a:t>next</a:t>
-            </a:r>
-            <a:r>
-              <a:rPr lang="en-US" b="0" dirty="0">
-                <a:solidFill>
-                  <a:srgbClr val="CCCCCC"/>
-                </a:solidFill>
-                <a:effectLst/>
-                <a:latin typeface="Consolas" panose="020B0609020204030204" pitchFamily="49" charset="0"/>
-              </a:rPr>
-              <a:t>;</a:t>
-            </a:r>
-          </a:p>
-          <a:p>
-            <a:r>
-              <a:rPr lang="en-US" b="0" dirty="0">
-                <a:solidFill>
-                  <a:srgbClr val="CCCCCC"/>
-                </a:solidFill>
-                <a:effectLst/>
-                <a:latin typeface="Consolas" panose="020B0609020204030204" pitchFamily="49" charset="0"/>
-              </a:rPr>
-              <a:t>};</a:t>
-            </a:r>
-          </a:p>
-          <a:p>
-            <a:r>
-              <a:rPr lang="en-US" b="0" dirty="0">
-                <a:solidFill>
-                  <a:srgbClr val="569CD6"/>
-                </a:solidFill>
-                <a:effectLst/>
-                <a:latin typeface="Consolas" panose="020B0609020204030204" pitchFamily="49" charset="0"/>
-              </a:rPr>
-              <a:t>typedef</a:t>
-            </a:r>
-            <a:r>
-              <a:rPr lang="en-US" b="0" dirty="0">
-                <a:solidFill>
-                  <a:srgbClr val="CCCCCC"/>
-                </a:solidFill>
-                <a:effectLst/>
-                <a:latin typeface="Consolas" panose="020B0609020204030204" pitchFamily="49" charset="0"/>
-              </a:rPr>
-              <a:t> </a:t>
-            </a:r>
-            <a:r>
-              <a:rPr lang="en-US" b="0" dirty="0">
-                <a:solidFill>
-                  <a:srgbClr val="569CD6"/>
-                </a:solidFill>
-                <a:effectLst/>
-                <a:latin typeface="Consolas" panose="020B0609020204030204" pitchFamily="49" charset="0"/>
-              </a:rPr>
-              <a:t>struct</a:t>
-            </a:r>
-            <a:r>
-              <a:rPr lang="en-US" b="0" dirty="0">
-                <a:solidFill>
-                  <a:srgbClr val="CCCCCC"/>
-                </a:solidFill>
-                <a:effectLst/>
-                <a:latin typeface="Consolas" panose="020B0609020204030204" pitchFamily="49" charset="0"/>
-              </a:rPr>
-              <a:t> </a:t>
-            </a:r>
-            <a:r>
-              <a:rPr lang="en-US" b="0" dirty="0">
-                <a:solidFill>
-                  <a:srgbClr val="4EC9B0"/>
-                </a:solidFill>
-                <a:effectLst/>
-                <a:latin typeface="Consolas" panose="020B0609020204030204" pitchFamily="49" charset="0"/>
-              </a:rPr>
-              <a:t>node</a:t>
-            </a:r>
-            <a:r>
-              <a:rPr lang="en-US" b="0" dirty="0">
-                <a:solidFill>
-                  <a:srgbClr val="CCCCCC"/>
-                </a:solidFill>
-                <a:effectLst/>
-                <a:latin typeface="Consolas" panose="020B0609020204030204" pitchFamily="49" charset="0"/>
-              </a:rPr>
-              <a:t> </a:t>
-            </a:r>
-            <a:r>
-              <a:rPr lang="en-US" b="0" dirty="0" err="1">
-                <a:solidFill>
-                  <a:srgbClr val="4EC9B0"/>
-                </a:solidFill>
-                <a:effectLst/>
-                <a:latin typeface="Consolas" panose="020B0609020204030204" pitchFamily="49" charset="0"/>
-              </a:rPr>
-              <a:t>node_t</a:t>
-            </a:r>
-            <a:r>
-              <a:rPr lang="en-US" b="0" dirty="0">
-                <a:solidFill>
-                  <a:srgbClr val="CCCCCC"/>
-                </a:solidFill>
-                <a:effectLst/>
-                <a:latin typeface="Consolas" panose="020B0609020204030204" pitchFamily="49" charset="0"/>
-              </a:rPr>
-              <a:t>;</a:t>
-            </a:r>
-          </a:p>
-          <a:p>
-            <a:br>
-              <a:rPr lang="en-US" b="0" dirty="0">
-                <a:solidFill>
-                  <a:srgbClr val="CCCCCC"/>
-                </a:solidFill>
-                <a:effectLst/>
-                <a:latin typeface="Consolas" panose="020B0609020204030204" pitchFamily="49" charset="0"/>
-              </a:rPr>
-            </a:br>
-            <a:endParaRPr lang="en-US" b="0" dirty="0">
-              <a:solidFill>
-                <a:srgbClr val="CCCCCC"/>
-              </a:solidFill>
-              <a:effectLst/>
-              <a:latin typeface="Consolas" panose="020B0609020204030204" pitchFamily="49" charset="0"/>
-            </a:endParaRPr>
-          </a:p>
-        </p:txBody>
-      </p:sp>
-    </p:spTree>
-    <p:extLst>
-      <p:ext uri="{BB962C8B-B14F-4D97-AF65-F5344CB8AC3E}">
-        <p14:creationId xmlns:p14="http://schemas.microsoft.com/office/powerpoint/2010/main" val="1588482601"/>
-      </p:ext>
-    </p:extLst>
-  </p:cSld>
-  <p:clrMapOvr>
-    <a:masterClrMapping/>
-  </p:clrMapOvr>
-</p:sld>
-</file>
-
-<file path=ppt/slides/slide26.xml><?xml version="1.0" encoding="utf-8"?>
 <p:sld xmlns:a="http://schemas.openxmlformats.org/drawingml/2006/main" xmlns:r="http://schemas.openxmlformats.org/officeDocument/2006/relationships" xmlns:p="http://schemas.openxmlformats.org/presentationml/2006/main">
   <p:cSld>
     <p:spTree>
@@ -17610,7 +17441,7 @@
 </p:sld>
 </file>
 
-<file path=ppt/slides/slide27.xml><?xml version="1.0" encoding="utf-8"?>
+<file path=ppt/slides/slide26.xml><?xml version="1.0" encoding="utf-8"?>
 <p:sld xmlns:a="http://schemas.openxmlformats.org/drawingml/2006/main" xmlns:r="http://schemas.openxmlformats.org/officeDocument/2006/relationships" xmlns:p="http://schemas.openxmlformats.org/presentationml/2006/main">
   <p:cSld>
     <p:spTree>
@@ -17834,7 +17665,7 @@
 </p:sld>
 </file>
 
-<file path=ppt/slides/slide28.xml><?xml version="1.0" encoding="utf-8"?>
+<file path=ppt/slides/slide27.xml><?xml version="1.0" encoding="utf-8"?>
 <p:sld xmlns:a="http://schemas.openxmlformats.org/drawingml/2006/main" xmlns:r="http://schemas.openxmlformats.org/officeDocument/2006/relationships" xmlns:p="http://schemas.openxmlformats.org/presentationml/2006/main">
   <p:cSld>
     <p:spTree>
@@ -18191,7 +18022,7 @@
 </p:sld>
 </file>
 
-<file path=ppt/slides/slide29.xml><?xml version="1.0" encoding="utf-8"?>
+<file path=ppt/slides/slide28.xml><?xml version="1.0" encoding="utf-8"?>
 <p:sld xmlns:a="http://schemas.openxmlformats.org/drawingml/2006/main" xmlns:r="http://schemas.openxmlformats.org/officeDocument/2006/relationships" xmlns:p="http://schemas.openxmlformats.org/presentationml/2006/main">
   <p:cSld>
     <p:spTree>
@@ -18388,294 +18219,7 @@
 </p:sld>
 </file>
 
-<file path=ppt/slides/slide3.xml><?xml version="1.0" encoding="utf-8"?>
-<p:sld xmlns:a="http://schemas.openxmlformats.org/drawingml/2006/main" xmlns:r="http://schemas.openxmlformats.org/officeDocument/2006/relationships" xmlns:p="http://schemas.openxmlformats.org/presentationml/2006/main">
-  <p:cSld>
-    <p:spTree>
-      <p:nvGrpSpPr>
-        <p:cNvPr id="1" name=""/>
-        <p:cNvGrpSpPr/>
-        <p:nvPr/>
-      </p:nvGrpSpPr>
-      <p:grpSpPr>
-        <a:xfrm>
-          <a:off x="0" y="0"/>
-          <a:ext cx="0" cy="0"/>
-          <a:chOff x="0" y="0"/>
-          <a:chExt cx="0" cy="0"/>
-        </a:xfrm>
-      </p:grpSpPr>
-      <p:sp>
-        <p:nvSpPr>
-          <p:cNvPr id="9" name="Заголовок 2">
-            <a:extLst>
-              <a:ext uri="{FF2B5EF4-FFF2-40B4-BE49-F238E27FC236}">
-                <a16:creationId xmlns:a16="http://schemas.microsoft.com/office/drawing/2014/main" id="{CEF7D3C9-F027-4DFF-AC25-52606D3BE3A7}"/>
-              </a:ext>
-            </a:extLst>
-          </p:cNvPr>
-          <p:cNvSpPr txBox="1">
-            <a:spLocks/>
-          </p:cNvSpPr>
-          <p:nvPr/>
-        </p:nvSpPr>
-        <p:spPr>
-          <a:xfrm>
-            <a:off x="1133141" y="289948"/>
-            <a:ext cx="9925717" cy="927688"/>
-          </a:xfrm>
-          <a:prstGeom prst="rect">
-            <a:avLst/>
-          </a:prstGeom>
-        </p:spPr>
-        <p:txBody>
-          <a:bodyPr vert="horz" lIns="91440" tIns="45720" rIns="91440" bIns="45720" rtlCol="0" anchor="b">
-            <a:normAutofit/>
-          </a:bodyPr>
-          <a:lstStyle>
-            <a:lvl1pPr algn="ctr" defTabSz="914400" rtl="0" eaLnBrk="1" latinLnBrk="0" hangingPunct="1">
-              <a:lnSpc>
-                <a:spcPct val="90000"/>
-              </a:lnSpc>
-              <a:spcBef>
-                <a:spcPct val="0"/>
-              </a:spcBef>
-              <a:buNone/>
-              <a:defRPr sz="6000" kern="1200">
-                <a:solidFill>
-                  <a:schemeClr val="tx1"/>
-                </a:solidFill>
-                <a:latin typeface="+mj-lt"/>
-                <a:ea typeface="+mj-ea"/>
-                <a:cs typeface="+mj-cs"/>
-              </a:defRPr>
-            </a:lvl1pPr>
-          </a:lstStyle>
-          <a:p>
-            <a:r>
-              <a:rPr lang="ru-RU" dirty="0">
-                <a:latin typeface="Times New Roman" panose="02020603050405020304" pitchFamily="18" charset="0"/>
-                <a:cs typeface="Times New Roman" panose="02020603050405020304" pitchFamily="18" charset="0"/>
-              </a:rPr>
-              <a:t>Типы</a:t>
-            </a:r>
-            <a:r>
-              <a:rPr lang="ru-RU" dirty="0"/>
-              <a:t> алгоритмов</a:t>
-            </a:r>
-          </a:p>
-        </p:txBody>
-      </p:sp>
-      <p:sp>
-        <p:nvSpPr>
-          <p:cNvPr id="6" name="TextBox 5">
-            <a:extLst>
-              <a:ext uri="{FF2B5EF4-FFF2-40B4-BE49-F238E27FC236}">
-                <a16:creationId xmlns:a16="http://schemas.microsoft.com/office/drawing/2014/main" id="{1F202808-04F9-4746-AC3F-021AB2827F52}"/>
-              </a:ext>
-            </a:extLst>
-          </p:cNvPr>
-          <p:cNvSpPr txBox="1"/>
-          <p:nvPr/>
-        </p:nvSpPr>
-        <p:spPr>
-          <a:xfrm>
-            <a:off x="719957" y="1679453"/>
-            <a:ext cx="10752083" cy="4154984"/>
-          </a:xfrm>
-          <a:prstGeom prst="rect">
-            <a:avLst/>
-          </a:prstGeom>
-          <a:noFill/>
-        </p:spPr>
-        <p:txBody>
-          <a:bodyPr wrap="square">
-            <a:spAutoFit/>
-          </a:bodyPr>
-          <a:lstStyle/>
-          <a:p>
-            <a:pPr marL="285750" indent="-285750">
-              <a:buFont typeface="Arial" panose="020B0604020202020204" pitchFamily="34" charset="0"/>
-              <a:buChar char="•"/>
-            </a:pPr>
-            <a:r>
-              <a:rPr lang="ru-RU" sz="2400" dirty="0">
-                <a:latin typeface="Times New Roman" panose="02020603050405020304" pitchFamily="18" charset="0"/>
-                <a:cs typeface="Times New Roman" panose="02020603050405020304" pitchFamily="18" charset="0"/>
-              </a:rPr>
-              <a:t>Алгоритмы сортировки - алгоритмы для упорядочивания каких-либо данных в определенном порядке. В интернет-магазине включаем фильтр по количеству отзывов. Пузырьковая сортировка, сортировка вставками, быстрая сортировка, сортировка подсчетом и много-много других..</a:t>
-            </a:r>
-            <a:br>
-              <a:rPr lang="en-US" sz="2400" dirty="0">
-                <a:latin typeface="Times New Roman" panose="02020603050405020304" pitchFamily="18" charset="0"/>
-                <a:cs typeface="Times New Roman" panose="02020603050405020304" pitchFamily="18" charset="0"/>
-              </a:rPr>
-            </a:br>
-            <a:endParaRPr lang="ru-RU" sz="2400" dirty="0">
-              <a:latin typeface="Times New Roman" panose="02020603050405020304" pitchFamily="18" charset="0"/>
-              <a:cs typeface="Times New Roman" panose="02020603050405020304" pitchFamily="18" charset="0"/>
-            </a:endParaRPr>
-          </a:p>
-          <a:p>
-            <a:pPr marL="285750" indent="-285750">
-              <a:buFont typeface="Arial" panose="020B0604020202020204" pitchFamily="34" charset="0"/>
-              <a:buChar char="•"/>
-            </a:pPr>
-            <a:r>
-              <a:rPr lang="ru-RU" sz="2400" dirty="0">
-                <a:latin typeface="Times New Roman" panose="02020603050405020304" pitchFamily="18" charset="0"/>
-                <a:cs typeface="Times New Roman" panose="02020603050405020304" pitchFamily="18" charset="0"/>
-              </a:rPr>
-              <a:t>Алгоритмы поиска - алгоритмы поиска значения в наборе данных. Линейный поиск, бинарный и т.д.</a:t>
-            </a:r>
-            <a:br>
-              <a:rPr lang="en-US" sz="2400" dirty="0">
-                <a:latin typeface="Times New Roman" panose="02020603050405020304" pitchFamily="18" charset="0"/>
-                <a:cs typeface="Times New Roman" panose="02020603050405020304" pitchFamily="18" charset="0"/>
-              </a:rPr>
-            </a:br>
-            <a:endParaRPr lang="ru-RU" sz="2400" dirty="0">
-              <a:latin typeface="Times New Roman" panose="02020603050405020304" pitchFamily="18" charset="0"/>
-              <a:cs typeface="Times New Roman" panose="02020603050405020304" pitchFamily="18" charset="0"/>
-            </a:endParaRPr>
-          </a:p>
-          <a:p>
-            <a:pPr marL="285750" indent="-285750">
-              <a:buFont typeface="Arial" panose="020B0604020202020204" pitchFamily="34" charset="0"/>
-              <a:buChar char="•"/>
-            </a:pPr>
-            <a:r>
-              <a:rPr lang="ru-RU" sz="2400" dirty="0">
-                <a:latin typeface="Times New Roman" panose="02020603050405020304" pitchFamily="18" charset="0"/>
-                <a:cs typeface="Times New Roman" panose="02020603050405020304" pitchFamily="18" charset="0"/>
-              </a:rPr>
-              <a:t>Алгоритмы с графами - поиск кратчайших путей. Алгоритм </a:t>
-            </a:r>
-            <a:r>
-              <a:rPr lang="ru-RU" sz="2400" dirty="0" err="1">
-                <a:latin typeface="Times New Roman" panose="02020603050405020304" pitchFamily="18" charset="0"/>
-                <a:cs typeface="Times New Roman" panose="02020603050405020304" pitchFamily="18" charset="0"/>
-              </a:rPr>
-              <a:t>Дейкстра</a:t>
-            </a:r>
-            <a:r>
-              <a:rPr lang="ru-RU" sz="2400" dirty="0">
-                <a:latin typeface="Times New Roman" panose="02020603050405020304" pitchFamily="18" charset="0"/>
-                <a:cs typeface="Times New Roman" panose="02020603050405020304" pitchFamily="18" charset="0"/>
-              </a:rPr>
-              <a:t>, BFS, DFS и т.д. Пример в 2gis ищем как пройти от какого-нибудь отеля до ТЦ. Социальные сети работают на алгоритмах с графами</a:t>
-            </a:r>
-          </a:p>
-        </p:txBody>
-      </p:sp>
-      <p:pic>
-        <p:nvPicPr>
-          <p:cNvPr id="1028" name="Picture 4" descr="Структура данных – Бесплатные иконки: коммуникации">
-            <a:extLst>
-              <a:ext uri="{FF2B5EF4-FFF2-40B4-BE49-F238E27FC236}">
-                <a16:creationId xmlns:a16="http://schemas.microsoft.com/office/drawing/2014/main" id="{C0DB302C-B29E-4579-AF1F-E0FD05997701}"/>
-              </a:ext>
-            </a:extLst>
-          </p:cNvPr>
-          <p:cNvPicPr>
-            <a:picLocks noChangeAspect="1" noChangeArrowheads="1"/>
-          </p:cNvPicPr>
-          <p:nvPr/>
-        </p:nvPicPr>
-        <p:blipFill>
-          <a:blip r:embed="rId3" cstate="print">
-            <a:extLst>
-              <a:ext uri="{28A0092B-C50C-407E-A947-70E740481C1C}">
-                <a14:useLocalDpi xmlns:a14="http://schemas.microsoft.com/office/drawing/2010/main" val="0"/>
-              </a:ext>
-            </a:extLst>
-          </a:blip>
-          <a:srcRect/>
-          <a:stretch>
-            <a:fillRect/>
-          </a:stretch>
-        </p:blipFill>
-        <p:spPr bwMode="auto">
-          <a:xfrm>
-            <a:off x="10603523" y="5339738"/>
-            <a:ext cx="1397977" cy="1397977"/>
-          </a:xfrm>
-          <a:prstGeom prst="rect">
-            <a:avLst/>
-          </a:prstGeom>
-          <a:noFill/>
-          <a:extLst>
-            <a:ext uri="{909E8E84-426E-40DD-AFC4-6F175D3DCCD1}">
-              <a14:hiddenFill xmlns:a14="http://schemas.microsoft.com/office/drawing/2010/main">
-                <a:solidFill>
-                  <a:srgbClr val="FFFFFF"/>
-                </a:solidFill>
-              </a14:hiddenFill>
-            </a:ext>
-          </a:extLst>
-        </p:spPr>
-      </p:pic>
-      <p:pic>
-        <p:nvPicPr>
-          <p:cNvPr id="1030" name="Picture 6" descr="Структура данных – Бесплатные иконки: коммуникации">
-            <a:extLst>
-              <a:ext uri="{FF2B5EF4-FFF2-40B4-BE49-F238E27FC236}">
-                <a16:creationId xmlns:a16="http://schemas.microsoft.com/office/drawing/2014/main" id="{FB9D7AD7-B1C6-4853-AC5E-5D1D6F4D5A3A}"/>
-              </a:ext>
-            </a:extLst>
-          </p:cNvPr>
-          <p:cNvPicPr>
-            <a:picLocks noChangeAspect="1" noChangeArrowheads="1"/>
-          </p:cNvPicPr>
-          <p:nvPr/>
-        </p:nvPicPr>
-        <p:blipFill>
-          <a:blip r:embed="rId4" cstate="print">
-            <a:extLst>
-              <a:ext uri="{28A0092B-C50C-407E-A947-70E740481C1C}">
-                <a14:useLocalDpi xmlns:a14="http://schemas.microsoft.com/office/drawing/2010/main" val="0"/>
-              </a:ext>
-            </a:extLst>
-          </a:blip>
-          <a:srcRect/>
-          <a:stretch>
-            <a:fillRect/>
-          </a:stretch>
-        </p:blipFill>
-        <p:spPr bwMode="auto">
-          <a:xfrm>
-            <a:off x="57672" y="5662246"/>
-            <a:ext cx="1075469" cy="1075469"/>
-          </a:xfrm>
-          <a:prstGeom prst="rect">
-            <a:avLst/>
-          </a:prstGeom>
-          <a:noFill/>
-          <a:extLst>
-            <a:ext uri="{909E8E84-426E-40DD-AFC4-6F175D3DCCD1}">
-              <a14:hiddenFill xmlns:a14="http://schemas.microsoft.com/office/drawing/2010/main">
-                <a:solidFill>
-                  <a:srgbClr val="FFFFFF"/>
-                </a:solidFill>
-              </a14:hiddenFill>
-            </a:ext>
-          </a:extLst>
-        </p:spPr>
-      </p:pic>
-    </p:spTree>
-    <p:extLst>
-      <p:ext uri="{BB962C8B-B14F-4D97-AF65-F5344CB8AC3E}">
-        <p14:creationId xmlns:p14="http://schemas.microsoft.com/office/powerpoint/2010/main" val="3851613664"/>
-      </p:ext>
-    </p:extLst>
-  </p:cSld>
-  <p:clrMapOvr>
-    <a:masterClrMapping/>
-  </p:clrMapOvr>
-</p:sld>
-</file>
-
-<file path=ppt/slides/slide30.xml><?xml version="1.0" encoding="utf-8"?>
+<file path=ppt/slides/slide29.xml><?xml version="1.0" encoding="utf-8"?>
 <p:sld xmlns:a="http://schemas.openxmlformats.org/drawingml/2006/main" xmlns:r="http://schemas.openxmlformats.org/officeDocument/2006/relationships" xmlns:p="http://schemas.openxmlformats.org/presentationml/2006/main">
   <p:cSld>
     <p:spTree>
@@ -19066,7 +18610,294 @@
 </p:sld>
 </file>
 
-<file path=ppt/slides/slide31.xml><?xml version="1.0" encoding="utf-8"?>
+<file path=ppt/slides/slide3.xml><?xml version="1.0" encoding="utf-8"?>
+<p:sld xmlns:a="http://schemas.openxmlformats.org/drawingml/2006/main" xmlns:r="http://schemas.openxmlformats.org/officeDocument/2006/relationships" xmlns:p="http://schemas.openxmlformats.org/presentationml/2006/main">
+  <p:cSld>
+    <p:spTree>
+      <p:nvGrpSpPr>
+        <p:cNvPr id="1" name=""/>
+        <p:cNvGrpSpPr/>
+        <p:nvPr/>
+      </p:nvGrpSpPr>
+      <p:grpSpPr>
+        <a:xfrm>
+          <a:off x="0" y="0"/>
+          <a:ext cx="0" cy="0"/>
+          <a:chOff x="0" y="0"/>
+          <a:chExt cx="0" cy="0"/>
+        </a:xfrm>
+      </p:grpSpPr>
+      <p:sp>
+        <p:nvSpPr>
+          <p:cNvPr id="9" name="Заголовок 2">
+            <a:extLst>
+              <a:ext uri="{FF2B5EF4-FFF2-40B4-BE49-F238E27FC236}">
+                <a16:creationId xmlns:a16="http://schemas.microsoft.com/office/drawing/2014/main" id="{CEF7D3C9-F027-4DFF-AC25-52606D3BE3A7}"/>
+              </a:ext>
+            </a:extLst>
+          </p:cNvPr>
+          <p:cNvSpPr txBox="1">
+            <a:spLocks/>
+          </p:cNvSpPr>
+          <p:nvPr/>
+        </p:nvSpPr>
+        <p:spPr>
+          <a:xfrm>
+            <a:off x="1133141" y="289948"/>
+            <a:ext cx="9925717" cy="927688"/>
+          </a:xfrm>
+          <a:prstGeom prst="rect">
+            <a:avLst/>
+          </a:prstGeom>
+        </p:spPr>
+        <p:txBody>
+          <a:bodyPr vert="horz" lIns="91440" tIns="45720" rIns="91440" bIns="45720" rtlCol="0" anchor="b">
+            <a:normAutofit/>
+          </a:bodyPr>
+          <a:lstStyle>
+            <a:lvl1pPr algn="ctr" defTabSz="914400" rtl="0" eaLnBrk="1" latinLnBrk="0" hangingPunct="1">
+              <a:lnSpc>
+                <a:spcPct val="90000"/>
+              </a:lnSpc>
+              <a:spcBef>
+                <a:spcPct val="0"/>
+              </a:spcBef>
+              <a:buNone/>
+              <a:defRPr sz="6000" kern="1200">
+                <a:solidFill>
+                  <a:schemeClr val="tx1"/>
+                </a:solidFill>
+                <a:latin typeface="+mj-lt"/>
+                <a:ea typeface="+mj-ea"/>
+                <a:cs typeface="+mj-cs"/>
+              </a:defRPr>
+            </a:lvl1pPr>
+          </a:lstStyle>
+          <a:p>
+            <a:r>
+              <a:rPr lang="ru-RU" dirty="0">
+                <a:latin typeface="Times New Roman" panose="02020603050405020304" pitchFamily="18" charset="0"/>
+                <a:cs typeface="Times New Roman" panose="02020603050405020304" pitchFamily="18" charset="0"/>
+              </a:rPr>
+              <a:t>Типы</a:t>
+            </a:r>
+            <a:r>
+              <a:rPr lang="ru-RU" dirty="0"/>
+              <a:t> алгоритмов</a:t>
+            </a:r>
+          </a:p>
+        </p:txBody>
+      </p:sp>
+      <p:sp>
+        <p:nvSpPr>
+          <p:cNvPr id="6" name="TextBox 5">
+            <a:extLst>
+              <a:ext uri="{FF2B5EF4-FFF2-40B4-BE49-F238E27FC236}">
+                <a16:creationId xmlns:a16="http://schemas.microsoft.com/office/drawing/2014/main" id="{1F202808-04F9-4746-AC3F-021AB2827F52}"/>
+              </a:ext>
+            </a:extLst>
+          </p:cNvPr>
+          <p:cNvSpPr txBox="1"/>
+          <p:nvPr/>
+        </p:nvSpPr>
+        <p:spPr>
+          <a:xfrm>
+            <a:off x="719957" y="1679453"/>
+            <a:ext cx="10752083" cy="4154984"/>
+          </a:xfrm>
+          <a:prstGeom prst="rect">
+            <a:avLst/>
+          </a:prstGeom>
+          <a:noFill/>
+        </p:spPr>
+        <p:txBody>
+          <a:bodyPr wrap="square">
+            <a:spAutoFit/>
+          </a:bodyPr>
+          <a:lstStyle/>
+          <a:p>
+            <a:pPr marL="285750" indent="-285750">
+              <a:buFont typeface="Arial" panose="020B0604020202020204" pitchFamily="34" charset="0"/>
+              <a:buChar char="•"/>
+            </a:pPr>
+            <a:r>
+              <a:rPr lang="ru-RU" sz="2400" dirty="0">
+                <a:latin typeface="Times New Roman" panose="02020603050405020304" pitchFamily="18" charset="0"/>
+                <a:cs typeface="Times New Roman" panose="02020603050405020304" pitchFamily="18" charset="0"/>
+              </a:rPr>
+              <a:t>Алгоритмы сортировки - алгоритмы для упорядочивания каких-либо данных в определенном порядке. В интернет-магазине включаем фильтр по количеству отзывов. Пузырьковая сортировка, сортировка вставками, быстрая сортировка, сортировка подсчетом и много-много других..</a:t>
+            </a:r>
+            <a:br>
+              <a:rPr lang="en-US" sz="2400" dirty="0">
+                <a:latin typeface="Times New Roman" panose="02020603050405020304" pitchFamily="18" charset="0"/>
+                <a:cs typeface="Times New Roman" panose="02020603050405020304" pitchFamily="18" charset="0"/>
+              </a:rPr>
+            </a:br>
+            <a:endParaRPr lang="ru-RU" sz="2400" dirty="0">
+              <a:latin typeface="Times New Roman" panose="02020603050405020304" pitchFamily="18" charset="0"/>
+              <a:cs typeface="Times New Roman" panose="02020603050405020304" pitchFamily="18" charset="0"/>
+            </a:endParaRPr>
+          </a:p>
+          <a:p>
+            <a:pPr marL="285750" indent="-285750">
+              <a:buFont typeface="Arial" panose="020B0604020202020204" pitchFamily="34" charset="0"/>
+              <a:buChar char="•"/>
+            </a:pPr>
+            <a:r>
+              <a:rPr lang="ru-RU" sz="2400" dirty="0">
+                <a:latin typeface="Times New Roman" panose="02020603050405020304" pitchFamily="18" charset="0"/>
+                <a:cs typeface="Times New Roman" panose="02020603050405020304" pitchFamily="18" charset="0"/>
+              </a:rPr>
+              <a:t>Алгоритмы поиска - алгоритмы поиска значения в наборе данных. Линейный поиск, бинарный и т.д.</a:t>
+            </a:r>
+            <a:br>
+              <a:rPr lang="en-US" sz="2400" dirty="0">
+                <a:latin typeface="Times New Roman" panose="02020603050405020304" pitchFamily="18" charset="0"/>
+                <a:cs typeface="Times New Roman" panose="02020603050405020304" pitchFamily="18" charset="0"/>
+              </a:rPr>
+            </a:br>
+            <a:endParaRPr lang="ru-RU" sz="2400" dirty="0">
+              <a:latin typeface="Times New Roman" panose="02020603050405020304" pitchFamily="18" charset="0"/>
+              <a:cs typeface="Times New Roman" panose="02020603050405020304" pitchFamily="18" charset="0"/>
+            </a:endParaRPr>
+          </a:p>
+          <a:p>
+            <a:pPr marL="285750" indent="-285750">
+              <a:buFont typeface="Arial" panose="020B0604020202020204" pitchFamily="34" charset="0"/>
+              <a:buChar char="•"/>
+            </a:pPr>
+            <a:r>
+              <a:rPr lang="ru-RU" sz="2400" dirty="0">
+                <a:latin typeface="Times New Roman" panose="02020603050405020304" pitchFamily="18" charset="0"/>
+                <a:cs typeface="Times New Roman" panose="02020603050405020304" pitchFamily="18" charset="0"/>
+              </a:rPr>
+              <a:t>Алгоритмы с графами - поиск кратчайших путей. Алгоритм </a:t>
+            </a:r>
+            <a:r>
+              <a:rPr lang="ru-RU" sz="2400" dirty="0" err="1">
+                <a:latin typeface="Times New Roman" panose="02020603050405020304" pitchFamily="18" charset="0"/>
+                <a:cs typeface="Times New Roman" panose="02020603050405020304" pitchFamily="18" charset="0"/>
+              </a:rPr>
+              <a:t>Дейкстра</a:t>
+            </a:r>
+            <a:r>
+              <a:rPr lang="ru-RU" sz="2400" dirty="0">
+                <a:latin typeface="Times New Roman" panose="02020603050405020304" pitchFamily="18" charset="0"/>
+                <a:cs typeface="Times New Roman" panose="02020603050405020304" pitchFamily="18" charset="0"/>
+              </a:rPr>
+              <a:t>, BFS, DFS и т.д. Пример в 2gis ищем как пройти от какого-нибудь отеля до ТЦ. Социальные сети работают на алгоритмах с графами</a:t>
+            </a:r>
+          </a:p>
+        </p:txBody>
+      </p:sp>
+      <p:pic>
+        <p:nvPicPr>
+          <p:cNvPr id="1028" name="Picture 4" descr="Структура данных – Бесплатные иконки: коммуникации">
+            <a:extLst>
+              <a:ext uri="{FF2B5EF4-FFF2-40B4-BE49-F238E27FC236}">
+                <a16:creationId xmlns:a16="http://schemas.microsoft.com/office/drawing/2014/main" id="{C0DB302C-B29E-4579-AF1F-E0FD05997701}"/>
+              </a:ext>
+            </a:extLst>
+          </p:cNvPr>
+          <p:cNvPicPr>
+            <a:picLocks noChangeAspect="1" noChangeArrowheads="1"/>
+          </p:cNvPicPr>
+          <p:nvPr/>
+        </p:nvPicPr>
+        <p:blipFill>
+          <a:blip r:embed="rId3" cstate="print">
+            <a:extLst>
+              <a:ext uri="{28A0092B-C50C-407E-A947-70E740481C1C}">
+                <a14:useLocalDpi xmlns:a14="http://schemas.microsoft.com/office/drawing/2010/main" val="0"/>
+              </a:ext>
+            </a:extLst>
+          </a:blip>
+          <a:srcRect/>
+          <a:stretch>
+            <a:fillRect/>
+          </a:stretch>
+        </p:blipFill>
+        <p:spPr bwMode="auto">
+          <a:xfrm>
+            <a:off x="10603523" y="5339738"/>
+            <a:ext cx="1397977" cy="1397977"/>
+          </a:xfrm>
+          <a:prstGeom prst="rect">
+            <a:avLst/>
+          </a:prstGeom>
+          <a:noFill/>
+          <a:extLst>
+            <a:ext uri="{909E8E84-426E-40DD-AFC4-6F175D3DCCD1}">
+              <a14:hiddenFill xmlns:a14="http://schemas.microsoft.com/office/drawing/2010/main">
+                <a:solidFill>
+                  <a:srgbClr val="FFFFFF"/>
+                </a:solidFill>
+              </a14:hiddenFill>
+            </a:ext>
+          </a:extLst>
+        </p:spPr>
+      </p:pic>
+      <p:pic>
+        <p:nvPicPr>
+          <p:cNvPr id="1030" name="Picture 6" descr="Структура данных – Бесплатные иконки: коммуникации">
+            <a:extLst>
+              <a:ext uri="{FF2B5EF4-FFF2-40B4-BE49-F238E27FC236}">
+                <a16:creationId xmlns:a16="http://schemas.microsoft.com/office/drawing/2014/main" id="{FB9D7AD7-B1C6-4853-AC5E-5D1D6F4D5A3A}"/>
+              </a:ext>
+            </a:extLst>
+          </p:cNvPr>
+          <p:cNvPicPr>
+            <a:picLocks noChangeAspect="1" noChangeArrowheads="1"/>
+          </p:cNvPicPr>
+          <p:nvPr/>
+        </p:nvPicPr>
+        <p:blipFill>
+          <a:blip r:embed="rId4" cstate="print">
+            <a:extLst>
+              <a:ext uri="{28A0092B-C50C-407E-A947-70E740481C1C}">
+                <a14:useLocalDpi xmlns:a14="http://schemas.microsoft.com/office/drawing/2010/main" val="0"/>
+              </a:ext>
+            </a:extLst>
+          </a:blip>
+          <a:srcRect/>
+          <a:stretch>
+            <a:fillRect/>
+          </a:stretch>
+        </p:blipFill>
+        <p:spPr bwMode="auto">
+          <a:xfrm>
+            <a:off x="57672" y="5662246"/>
+            <a:ext cx="1075469" cy="1075469"/>
+          </a:xfrm>
+          <a:prstGeom prst="rect">
+            <a:avLst/>
+          </a:prstGeom>
+          <a:noFill/>
+          <a:extLst>
+            <a:ext uri="{909E8E84-426E-40DD-AFC4-6F175D3DCCD1}">
+              <a14:hiddenFill xmlns:a14="http://schemas.microsoft.com/office/drawing/2010/main">
+                <a:solidFill>
+                  <a:srgbClr val="FFFFFF"/>
+                </a:solidFill>
+              </a14:hiddenFill>
+            </a:ext>
+          </a:extLst>
+        </p:spPr>
+      </p:pic>
+    </p:spTree>
+    <p:extLst>
+      <p:ext uri="{BB962C8B-B14F-4D97-AF65-F5344CB8AC3E}">
+        <p14:creationId xmlns:p14="http://schemas.microsoft.com/office/powerpoint/2010/main" val="3851613664"/>
+      </p:ext>
+    </p:extLst>
+  </p:cSld>
+  <p:clrMapOvr>
+    <a:masterClrMapping/>
+  </p:clrMapOvr>
+</p:sld>
+</file>
+
+<file path=ppt/slides/slide30.xml><?xml version="1.0" encoding="utf-8"?>
 <p:sld xmlns:a="http://schemas.openxmlformats.org/drawingml/2006/main" xmlns:r="http://schemas.openxmlformats.org/officeDocument/2006/relationships" xmlns:p="http://schemas.openxmlformats.org/presentationml/2006/main">
   <p:cSld>
     <p:spTree>
@@ -19360,7 +19191,7 @@
 </p:sld>
 </file>
 
-<file path=ppt/slides/slide32.xml><?xml version="1.0" encoding="utf-8"?>
+<file path=ppt/slides/slide31.xml><?xml version="1.0" encoding="utf-8"?>
 <p:sld xmlns:a="http://schemas.openxmlformats.org/drawingml/2006/main" xmlns:r="http://schemas.openxmlformats.org/officeDocument/2006/relationships" xmlns:p="http://schemas.openxmlformats.org/presentationml/2006/main">
   <p:cSld>
     <p:spTree>
@@ -19712,7 +19543,7 @@
 </p:sld>
 </file>
 
-<file path=ppt/slides/slide33.xml><?xml version="1.0" encoding="utf-8"?>
+<file path=ppt/slides/slide32.xml><?xml version="1.0" encoding="utf-8"?>
 <p:sld xmlns:a="http://schemas.openxmlformats.org/drawingml/2006/main" xmlns:r="http://schemas.openxmlformats.org/officeDocument/2006/relationships" xmlns:p="http://schemas.openxmlformats.org/presentationml/2006/main">
   <p:cSld>
     <p:spTree>
@@ -20167,7 +19998,7 @@
 </p:sld>
 </file>
 
-<file path=ppt/slides/slide34.xml><?xml version="1.0" encoding="utf-8"?>
+<file path=ppt/slides/slide33.xml><?xml version="1.0" encoding="utf-8"?>
 <p:sld xmlns:a="http://schemas.openxmlformats.org/drawingml/2006/main" xmlns:r="http://schemas.openxmlformats.org/officeDocument/2006/relationships" xmlns:p="http://schemas.openxmlformats.org/presentationml/2006/main">
   <p:cSld>
     <p:spTree>
@@ -20403,7 +20234,7 @@
 </p:sld>
 </file>
 
-<file path=ppt/slides/slide35.xml><?xml version="1.0" encoding="utf-8"?>
+<file path=ppt/slides/slide34.xml><?xml version="1.0" encoding="utf-8"?>
 <p:sld xmlns:a="http://schemas.openxmlformats.org/drawingml/2006/main" xmlns:r="http://schemas.openxmlformats.org/officeDocument/2006/relationships" xmlns:p="http://schemas.openxmlformats.org/presentationml/2006/main">
   <p:cSld>
     <p:spTree>
@@ -20672,7 +20503,7 @@
 </p:sld>
 </file>
 
-<file path=ppt/slides/slide36.xml><?xml version="1.0" encoding="utf-8"?>
+<file path=ppt/slides/slide35.xml><?xml version="1.0" encoding="utf-8"?>
 <p:sld xmlns:a="http://schemas.openxmlformats.org/drawingml/2006/main" xmlns:r="http://schemas.openxmlformats.org/officeDocument/2006/relationships" xmlns:p="http://schemas.openxmlformats.org/presentationml/2006/main">
   <p:cSld>
     <p:spTree>
@@ -20900,7 +20731,7 @@
 </p:sld>
 </file>
 
-<file path=ppt/slides/slide37.xml><?xml version="1.0" encoding="utf-8"?>
+<file path=ppt/slides/slide36.xml><?xml version="1.0" encoding="utf-8"?>
 <p:sld xmlns:a="http://schemas.openxmlformats.org/drawingml/2006/main" xmlns:r="http://schemas.openxmlformats.org/officeDocument/2006/relationships" xmlns:p="http://schemas.openxmlformats.org/presentationml/2006/main">
   <p:cSld>
     <p:spTree>
@@ -21140,7 +20971,7 @@
 </p:sld>
 </file>
 
-<file path=ppt/slides/slide38.xml><?xml version="1.0" encoding="utf-8"?>
+<file path=ppt/slides/slide37.xml><?xml version="1.0" encoding="utf-8"?>
 <p:sld xmlns:a="http://schemas.openxmlformats.org/drawingml/2006/main" xmlns:r="http://schemas.openxmlformats.org/officeDocument/2006/relationships" xmlns:p="http://schemas.openxmlformats.org/presentationml/2006/main">
   <p:cSld>
     <p:spTree>
@@ -21449,7 +21280,7 @@
 </p:sld>
 </file>
 
-<file path=ppt/slides/slide39.xml><?xml version="1.0" encoding="utf-8"?>
+<file path=ppt/slides/slide38.xml><?xml version="1.0" encoding="utf-8"?>
 <p:sld xmlns:a="http://schemas.openxmlformats.org/drawingml/2006/main" xmlns:r="http://schemas.openxmlformats.org/officeDocument/2006/relationships" xmlns:p="http://schemas.openxmlformats.org/presentationml/2006/main">
   <p:cSld>
     <p:spTree>
@@ -21658,6 +21489,379 @@
     <p:extLst>
       <p:ext uri="{BB962C8B-B14F-4D97-AF65-F5344CB8AC3E}">
         <p14:creationId xmlns:p14="http://schemas.microsoft.com/office/powerpoint/2010/main" val="4200678302"/>
+      </p:ext>
+    </p:extLst>
+  </p:cSld>
+  <p:clrMapOvr>
+    <a:masterClrMapping/>
+  </p:clrMapOvr>
+</p:sld>
+</file>
+
+<file path=ppt/slides/slide39.xml><?xml version="1.0" encoding="utf-8"?>
+<p:sld xmlns:a="http://schemas.openxmlformats.org/drawingml/2006/main" xmlns:r="http://schemas.openxmlformats.org/officeDocument/2006/relationships" xmlns:p="http://schemas.openxmlformats.org/presentationml/2006/main">
+  <p:cSld>
+    <p:spTree>
+      <p:nvGrpSpPr>
+        <p:cNvPr id="1" name=""/>
+        <p:cNvGrpSpPr/>
+        <p:nvPr/>
+      </p:nvGrpSpPr>
+      <p:grpSpPr>
+        <a:xfrm>
+          <a:off x="0" y="0"/>
+          <a:ext cx="0" cy="0"/>
+          <a:chOff x="0" y="0"/>
+          <a:chExt cx="0" cy="0"/>
+        </a:xfrm>
+      </p:grpSpPr>
+      <p:sp>
+        <p:nvSpPr>
+          <p:cNvPr id="2" name="Заголовок 2">
+            <a:extLst>
+              <a:ext uri="{FF2B5EF4-FFF2-40B4-BE49-F238E27FC236}">
+                <a16:creationId xmlns:a16="http://schemas.microsoft.com/office/drawing/2014/main" id="{CD20947F-7E4C-46F6-A130-46C8196EE471}"/>
+              </a:ext>
+            </a:extLst>
+          </p:cNvPr>
+          <p:cNvSpPr txBox="1">
+            <a:spLocks/>
+          </p:cNvSpPr>
+          <p:nvPr/>
+        </p:nvSpPr>
+        <p:spPr>
+          <a:xfrm>
+            <a:off x="1133141" y="289948"/>
+            <a:ext cx="9925717" cy="927688"/>
+          </a:xfrm>
+          <a:prstGeom prst="rect">
+            <a:avLst/>
+          </a:prstGeom>
+        </p:spPr>
+        <p:txBody>
+          <a:bodyPr vert="horz" lIns="91440" tIns="45720" rIns="91440" bIns="45720" rtlCol="0" anchor="b">
+            <a:normAutofit/>
+          </a:bodyPr>
+          <a:lstStyle>
+            <a:lvl1pPr algn="ctr" defTabSz="914400" rtl="0" eaLnBrk="1" latinLnBrk="0" hangingPunct="1">
+              <a:lnSpc>
+                <a:spcPct val="90000"/>
+              </a:lnSpc>
+              <a:spcBef>
+                <a:spcPct val="0"/>
+              </a:spcBef>
+              <a:buNone/>
+              <a:defRPr sz="6000" kern="1200">
+                <a:solidFill>
+                  <a:schemeClr val="tx1"/>
+                </a:solidFill>
+                <a:latin typeface="+mj-lt"/>
+                <a:ea typeface="+mj-ea"/>
+                <a:cs typeface="+mj-cs"/>
+              </a:defRPr>
+            </a:lvl1pPr>
+          </a:lstStyle>
+          <a:p>
+            <a:r>
+              <a:rPr lang="ru-RU" dirty="0">
+                <a:latin typeface="Times New Roman" panose="02020603050405020304" pitchFamily="18" charset="0"/>
+                <a:cs typeface="Times New Roman" panose="02020603050405020304" pitchFamily="18" charset="0"/>
+              </a:rPr>
+              <a:t>Стек</a:t>
+            </a:r>
+            <a:r>
+              <a:rPr lang="ru-RU" dirty="0"/>
+              <a:t> и Очередь</a:t>
+            </a:r>
+          </a:p>
+        </p:txBody>
+      </p:sp>
+      <p:sp>
+        <p:nvSpPr>
+          <p:cNvPr id="6" name="TextBox 5">
+            <a:extLst>
+              <a:ext uri="{FF2B5EF4-FFF2-40B4-BE49-F238E27FC236}">
+                <a16:creationId xmlns:a16="http://schemas.microsoft.com/office/drawing/2014/main" id="{A8A59264-C7FC-466E-AE84-EEE8D99AC42D}"/>
+              </a:ext>
+            </a:extLst>
+          </p:cNvPr>
+          <p:cNvSpPr txBox="1"/>
+          <p:nvPr/>
+        </p:nvSpPr>
+        <p:spPr>
+          <a:xfrm>
+            <a:off x="826112" y="1179274"/>
+            <a:ext cx="10632265" cy="2862322"/>
+          </a:xfrm>
+          <a:prstGeom prst="rect">
+            <a:avLst/>
+          </a:prstGeom>
+          <a:noFill/>
+        </p:spPr>
+        <p:txBody>
+          <a:bodyPr wrap="square">
+            <a:spAutoFit/>
+          </a:bodyPr>
+          <a:lstStyle/>
+          <a:p>
+            <a:r>
+              <a:rPr lang="ru-RU" dirty="0">
+                <a:latin typeface="Times New Roman" panose="02020603050405020304" pitchFamily="18" charset="0"/>
+                <a:cs typeface="Times New Roman" panose="02020603050405020304" pitchFamily="18" charset="0"/>
+              </a:rPr>
+              <a:t>Стек (англ. </a:t>
+            </a:r>
+            <a:r>
+              <a:rPr lang="ru-RU" dirty="0" err="1">
+                <a:latin typeface="Times New Roman" panose="02020603050405020304" pitchFamily="18" charset="0"/>
+                <a:cs typeface="Times New Roman" panose="02020603050405020304" pitchFamily="18" charset="0"/>
+              </a:rPr>
+              <a:t>stack</a:t>
+            </a:r>
+            <a:r>
+              <a:rPr lang="ru-RU" dirty="0">
+                <a:latin typeface="Times New Roman" panose="02020603050405020304" pitchFamily="18" charset="0"/>
+                <a:cs typeface="Times New Roman" panose="02020603050405020304" pitchFamily="18" charset="0"/>
+              </a:rPr>
+              <a:t> - стопка) - еще одна из простейших структур данных. Для описания стека часто используется аббревиатура LIFO (</a:t>
+            </a:r>
+            <a:r>
+              <a:rPr lang="ru-RU" dirty="0" err="1">
+                <a:latin typeface="Times New Roman" panose="02020603050405020304" pitchFamily="18" charset="0"/>
+                <a:cs typeface="Times New Roman" panose="02020603050405020304" pitchFamily="18" charset="0"/>
+              </a:rPr>
+              <a:t>Last</a:t>
+            </a:r>
+            <a:r>
+              <a:rPr lang="ru-RU" dirty="0">
+                <a:latin typeface="Times New Roman" panose="02020603050405020304" pitchFamily="18" charset="0"/>
+                <a:cs typeface="Times New Roman" panose="02020603050405020304" pitchFamily="18" charset="0"/>
+              </a:rPr>
+              <a:t> In, First Out), подчёркивающая, что элемент, попавший в стек последним, первым будет из него извлечён. Классический стек поддерживает всего лишь три операции:</a:t>
+            </a:r>
+          </a:p>
+          <a:p>
+            <a:pPr marL="285750" indent="-285750">
+              <a:buFont typeface="Arial" panose="020B0604020202020204" pitchFamily="34" charset="0"/>
+              <a:buChar char="•"/>
+            </a:pPr>
+            <a:r>
+              <a:rPr lang="ru-RU" dirty="0">
+                <a:latin typeface="Times New Roman" panose="02020603050405020304" pitchFamily="18" charset="0"/>
+                <a:cs typeface="Times New Roman" panose="02020603050405020304" pitchFamily="18" charset="0"/>
+              </a:rPr>
+              <a:t>Добавить элемент в стек </a:t>
+            </a:r>
+            <a:r>
+              <a:rPr lang="ru-RU" dirty="0" err="1">
+                <a:latin typeface="Times New Roman" panose="02020603050405020304" pitchFamily="18" charset="0"/>
+                <a:cs typeface="Times New Roman" panose="02020603050405020304" pitchFamily="18" charset="0"/>
+              </a:rPr>
+              <a:t>push</a:t>
+            </a:r>
+            <a:r>
+              <a:rPr lang="ru-RU" dirty="0">
+                <a:latin typeface="Times New Roman" panose="02020603050405020304" pitchFamily="18" charset="0"/>
+                <a:cs typeface="Times New Roman" panose="02020603050405020304" pitchFamily="18" charset="0"/>
+              </a:rPr>
+              <a:t>() (Сложность: O(1))</a:t>
+            </a:r>
+          </a:p>
+          <a:p>
+            <a:pPr marL="285750" indent="-285750">
+              <a:buFont typeface="Arial" panose="020B0604020202020204" pitchFamily="34" charset="0"/>
+              <a:buChar char="•"/>
+            </a:pPr>
+            <a:r>
+              <a:rPr lang="ru-RU" dirty="0">
+                <a:latin typeface="Times New Roman" panose="02020603050405020304" pitchFamily="18" charset="0"/>
+                <a:cs typeface="Times New Roman" panose="02020603050405020304" pitchFamily="18" charset="0"/>
+              </a:rPr>
+              <a:t>Извлечь элемент из стека </a:t>
+            </a:r>
+            <a:r>
+              <a:rPr lang="ru-RU" dirty="0" err="1">
+                <a:latin typeface="Times New Roman" panose="02020603050405020304" pitchFamily="18" charset="0"/>
+                <a:cs typeface="Times New Roman" panose="02020603050405020304" pitchFamily="18" charset="0"/>
+              </a:rPr>
+              <a:t>pop</a:t>
+            </a:r>
+            <a:r>
+              <a:rPr lang="ru-RU" dirty="0">
+                <a:latin typeface="Times New Roman" panose="02020603050405020304" pitchFamily="18" charset="0"/>
+                <a:cs typeface="Times New Roman" panose="02020603050405020304" pitchFamily="18" charset="0"/>
+              </a:rPr>
+              <a:t>() (Сложность: O(1))</a:t>
+            </a:r>
+          </a:p>
+          <a:p>
+            <a:pPr marL="285750" indent="-285750">
+              <a:buFont typeface="Arial" panose="020B0604020202020204" pitchFamily="34" charset="0"/>
+              <a:buChar char="•"/>
+            </a:pPr>
+            <a:r>
+              <a:rPr lang="ru-RU" dirty="0">
+                <a:latin typeface="Times New Roman" panose="02020603050405020304" pitchFamily="18" charset="0"/>
+                <a:cs typeface="Times New Roman" panose="02020603050405020304" pitchFamily="18" charset="0"/>
+              </a:rPr>
+              <a:t>Проверить, пуст ли стек </a:t>
+            </a:r>
+            <a:r>
+              <a:rPr lang="ru-RU" dirty="0" err="1">
+                <a:latin typeface="Times New Roman" panose="02020603050405020304" pitchFamily="18" charset="0"/>
+                <a:cs typeface="Times New Roman" panose="02020603050405020304" pitchFamily="18" charset="0"/>
+              </a:rPr>
+              <a:t>isEmpty</a:t>
+            </a:r>
+            <a:r>
+              <a:rPr lang="ru-RU" dirty="0">
+                <a:latin typeface="Times New Roman" panose="02020603050405020304" pitchFamily="18" charset="0"/>
+                <a:cs typeface="Times New Roman" panose="02020603050405020304" pitchFamily="18" charset="0"/>
+              </a:rPr>
+              <a:t>() (Сложность: O(1))</a:t>
+            </a:r>
+          </a:p>
+          <a:p>
+            <a:endParaRPr lang="ru-RU" dirty="0">
+              <a:latin typeface="Times New Roman" panose="02020603050405020304" pitchFamily="18" charset="0"/>
+              <a:cs typeface="Times New Roman" panose="02020603050405020304" pitchFamily="18" charset="0"/>
+            </a:endParaRPr>
+          </a:p>
+          <a:p>
+            <a:r>
+              <a:rPr lang="ru-RU" dirty="0">
+                <a:latin typeface="Times New Roman" panose="02020603050405020304" pitchFamily="18" charset="0"/>
+                <a:cs typeface="Times New Roman" panose="02020603050405020304" pitchFamily="18" charset="0"/>
+              </a:rPr>
+              <a:t>Очередь (англ. </a:t>
+            </a:r>
+            <a:r>
+              <a:rPr lang="ru-RU" dirty="0" err="1">
+                <a:latin typeface="Times New Roman" panose="02020603050405020304" pitchFamily="18" charset="0"/>
+                <a:cs typeface="Times New Roman" panose="02020603050405020304" pitchFamily="18" charset="0"/>
+              </a:rPr>
+              <a:t>queue</a:t>
+            </a:r>
+            <a:r>
+              <a:rPr lang="ru-RU" dirty="0">
+                <a:latin typeface="Times New Roman" panose="02020603050405020304" pitchFamily="18" charset="0"/>
+                <a:cs typeface="Times New Roman" panose="02020603050405020304" pitchFamily="18" charset="0"/>
+              </a:rPr>
+              <a:t>) поддерживает тот же набор операций, что и стек, но имеет противоположную семантику. Для описания очереди используется аббревиатура FIFO (First In, First Out), так как первым из очереди извлекается элемент, раньше всех в неё добавленный.</a:t>
+            </a:r>
+          </a:p>
+        </p:txBody>
+      </p:sp>
+      <p:pic>
+        <p:nvPicPr>
+          <p:cNvPr id="7" name="Picture 6" descr="alt text">
+            <a:extLst>
+              <a:ext uri="{FF2B5EF4-FFF2-40B4-BE49-F238E27FC236}">
+                <a16:creationId xmlns:a16="http://schemas.microsoft.com/office/drawing/2014/main" id="{4D316B40-0842-4891-BE20-2AAE0E8FF8C5}"/>
+              </a:ext>
+            </a:extLst>
+          </p:cNvPr>
+          <p:cNvPicPr>
+            <a:picLocks noChangeAspect="1" noChangeArrowheads="1"/>
+          </p:cNvPicPr>
+          <p:nvPr/>
+        </p:nvPicPr>
+        <p:blipFill>
+          <a:blip r:embed="rId3">
+            <a:extLst>
+              <a:ext uri="{28A0092B-C50C-407E-A947-70E740481C1C}">
+                <a14:useLocalDpi xmlns:a14="http://schemas.microsoft.com/office/drawing/2010/main" val="0"/>
+              </a:ext>
+            </a:extLst>
+          </a:blip>
+          <a:srcRect/>
+          <a:stretch>
+            <a:fillRect/>
+          </a:stretch>
+        </p:blipFill>
+        <p:spPr bwMode="auto">
+          <a:xfrm>
+            <a:off x="4133851" y="4417463"/>
+            <a:ext cx="4456235" cy="1942680"/>
+          </a:xfrm>
+          <a:prstGeom prst="rect">
+            <a:avLst/>
+          </a:prstGeom>
+          <a:noFill/>
+          <a:extLst>
+            <a:ext uri="{909E8E84-426E-40DD-AFC4-6F175D3DCCD1}">
+              <a14:hiddenFill xmlns:a14="http://schemas.microsoft.com/office/drawing/2010/main">
+                <a:solidFill>
+                  <a:srgbClr val="FFFFFF"/>
+                </a:solidFill>
+              </a14:hiddenFill>
+            </a:ext>
+          </a:extLst>
+        </p:spPr>
+      </p:pic>
+      <p:pic>
+        <p:nvPicPr>
+          <p:cNvPr id="8" name="Рисунок 7">
+            <a:extLst>
+              <a:ext uri="{FF2B5EF4-FFF2-40B4-BE49-F238E27FC236}">
+                <a16:creationId xmlns:a16="http://schemas.microsoft.com/office/drawing/2014/main" id="{91D3DF42-842F-4767-B5B0-C452497A2370}"/>
+              </a:ext>
+            </a:extLst>
+          </p:cNvPr>
+          <p:cNvPicPr>
+            <a:picLocks noChangeAspect="1"/>
+          </p:cNvPicPr>
+          <p:nvPr/>
+        </p:nvPicPr>
+        <p:blipFill rotWithShape="1">
+          <a:blip r:embed="rId4"/>
+          <a:srcRect l="25420"/>
+          <a:stretch/>
+        </p:blipFill>
+        <p:spPr>
+          <a:xfrm>
+            <a:off x="809291" y="4415891"/>
+            <a:ext cx="3324560" cy="1942680"/>
+          </a:xfrm>
+          <a:prstGeom prst="rect">
+            <a:avLst/>
+          </a:prstGeom>
+        </p:spPr>
+      </p:pic>
+      <p:pic>
+        <p:nvPicPr>
+          <p:cNvPr id="9" name="Рисунок 8">
+            <a:extLst>
+              <a:ext uri="{FF2B5EF4-FFF2-40B4-BE49-F238E27FC236}">
+                <a16:creationId xmlns:a16="http://schemas.microsoft.com/office/drawing/2014/main" id="{EFE56A1B-697B-4954-8EB0-5E380716F2A0}"/>
+              </a:ext>
+            </a:extLst>
+          </p:cNvPr>
+          <p:cNvPicPr>
+            <a:picLocks noChangeAspect="1"/>
+          </p:cNvPicPr>
+          <p:nvPr/>
+        </p:nvPicPr>
+        <p:blipFill>
+          <a:blip r:embed="rId5"/>
+          <a:stretch>
+            <a:fillRect/>
+          </a:stretch>
+        </p:blipFill>
+        <p:spPr>
+          <a:xfrm>
+            <a:off x="8590086" y="4417463"/>
+            <a:ext cx="2989565" cy="1999331"/>
+          </a:xfrm>
+          <a:prstGeom prst="rect">
+            <a:avLst/>
+          </a:prstGeom>
+        </p:spPr>
+      </p:pic>
+    </p:spTree>
+    <p:extLst>
+      <p:ext uri="{BB962C8B-B14F-4D97-AF65-F5344CB8AC3E}">
+        <p14:creationId xmlns:p14="http://schemas.microsoft.com/office/powerpoint/2010/main" val="3016646123"/>
       </p:ext>
     </p:extLst>
   </p:cSld>
@@ -21806,7 +22010,7 @@
           <p:cNvPr id="2" name="Заголовок 2">
             <a:extLst>
               <a:ext uri="{FF2B5EF4-FFF2-40B4-BE49-F238E27FC236}">
-                <a16:creationId xmlns:a16="http://schemas.microsoft.com/office/drawing/2014/main" id="{CD20947F-7E4C-46F6-A130-46C8196EE471}"/>
+                <a16:creationId xmlns:a16="http://schemas.microsoft.com/office/drawing/2014/main" id="{3E938672-0952-4303-90D6-285843A50533}"/>
               </a:ext>
             </a:extLst>
           </p:cNvPr>
@@ -21853,21 +22057,17 @@
                 <a:latin typeface="Times New Roman" panose="02020603050405020304" pitchFamily="18" charset="0"/>
                 <a:cs typeface="Times New Roman" panose="02020603050405020304" pitchFamily="18" charset="0"/>
               </a:rPr>
-              <a:t>Стек</a:t>
-            </a:r>
-            <a:r>
-              <a:rPr lang="ru-RU" dirty="0"/>
-              <a:t> и Очередь</a:t>
+              <a:t>Двусвязный список</a:t>
             </a:r>
           </a:p>
         </p:txBody>
       </p:sp>
       <p:sp>
         <p:nvSpPr>
-          <p:cNvPr id="6" name="TextBox 5">
+          <p:cNvPr id="4" name="TextBox 3">
             <a:extLst>
               <a:ext uri="{FF2B5EF4-FFF2-40B4-BE49-F238E27FC236}">
-                <a16:creationId xmlns:a16="http://schemas.microsoft.com/office/drawing/2014/main" id="{A8A59264-C7FC-466E-AE84-EEE8D99AC42D}"/>
+                <a16:creationId xmlns:a16="http://schemas.microsoft.com/office/drawing/2014/main" id="{D7B63C32-1B2B-4CCF-8036-83917C272CD2}"/>
               </a:ext>
             </a:extLst>
           </p:cNvPr>
@@ -21876,8 +22076,8 @@
         </p:nvSpPr>
         <p:spPr>
           <a:xfrm>
-            <a:off x="826112" y="1179274"/>
-            <a:ext cx="10632265" cy="2862322"/>
+            <a:off x="1133141" y="1781350"/>
+            <a:ext cx="2744678" cy="1477328"/>
           </a:xfrm>
           <a:prstGeom prst="rect">
             <a:avLst/>
@@ -21891,597 +22091,164 @@
           <a:lstStyle/>
           <a:p>
             <a:r>
-              <a:rPr lang="ru-RU" dirty="0">
-                <a:latin typeface="Times New Roman" panose="02020603050405020304" pitchFamily="18" charset="0"/>
-                <a:cs typeface="Times New Roman" panose="02020603050405020304" pitchFamily="18" charset="0"/>
-              </a:rPr>
-              <a:t>Стек (англ. </a:t>
-            </a:r>
-            <a:r>
-              <a:rPr lang="ru-RU" dirty="0" err="1">
-                <a:latin typeface="Times New Roman" panose="02020603050405020304" pitchFamily="18" charset="0"/>
-                <a:cs typeface="Times New Roman" panose="02020603050405020304" pitchFamily="18" charset="0"/>
-              </a:rPr>
-              <a:t>stack</a:t>
-            </a:r>
-            <a:r>
-              <a:rPr lang="ru-RU" dirty="0">
-                <a:latin typeface="Times New Roman" panose="02020603050405020304" pitchFamily="18" charset="0"/>
-                <a:cs typeface="Times New Roman" panose="02020603050405020304" pitchFamily="18" charset="0"/>
-              </a:rPr>
-              <a:t> - стопка) - еще одна из простейших структур данных. Для описания стека часто используется аббревиатура LIFO (</a:t>
-            </a:r>
-            <a:r>
-              <a:rPr lang="ru-RU" dirty="0" err="1">
-                <a:latin typeface="Times New Roman" panose="02020603050405020304" pitchFamily="18" charset="0"/>
-                <a:cs typeface="Times New Roman" panose="02020603050405020304" pitchFamily="18" charset="0"/>
-              </a:rPr>
-              <a:t>Last</a:t>
-            </a:r>
-            <a:r>
-              <a:rPr lang="ru-RU" dirty="0">
-                <a:latin typeface="Times New Roman" panose="02020603050405020304" pitchFamily="18" charset="0"/>
-                <a:cs typeface="Times New Roman" panose="02020603050405020304" pitchFamily="18" charset="0"/>
-              </a:rPr>
-              <a:t> In, First Out), подчёркивающая, что элемент, попавший в стек последним, первым будет из него извлечён. Классический стек поддерживает всего лишь три операции:</a:t>
-            </a:r>
-          </a:p>
-          <a:p>
-            <a:pPr marL="285750" indent="-285750">
-              <a:buFont typeface="Arial" panose="020B0604020202020204" pitchFamily="34" charset="0"/>
-              <a:buChar char="•"/>
-            </a:pPr>
-            <a:r>
-              <a:rPr lang="ru-RU" dirty="0">
-                <a:latin typeface="Times New Roman" panose="02020603050405020304" pitchFamily="18" charset="0"/>
-                <a:cs typeface="Times New Roman" panose="02020603050405020304" pitchFamily="18" charset="0"/>
-              </a:rPr>
-              <a:t>Добавить элемент в стек </a:t>
-            </a:r>
-            <a:r>
-              <a:rPr lang="ru-RU" dirty="0" err="1">
-                <a:latin typeface="Times New Roman" panose="02020603050405020304" pitchFamily="18" charset="0"/>
-                <a:cs typeface="Times New Roman" panose="02020603050405020304" pitchFamily="18" charset="0"/>
-              </a:rPr>
-              <a:t>push</a:t>
-            </a:r>
-            <a:r>
-              <a:rPr lang="ru-RU" dirty="0">
-                <a:latin typeface="Times New Roman" panose="02020603050405020304" pitchFamily="18" charset="0"/>
-                <a:cs typeface="Times New Roman" panose="02020603050405020304" pitchFamily="18" charset="0"/>
-              </a:rPr>
-              <a:t>() (Сложность: O(1))</a:t>
-            </a:r>
-          </a:p>
-          <a:p>
-            <a:pPr marL="285750" indent="-285750">
-              <a:buFont typeface="Arial" panose="020B0604020202020204" pitchFamily="34" charset="0"/>
-              <a:buChar char="•"/>
-            </a:pPr>
-            <a:r>
-              <a:rPr lang="ru-RU" dirty="0">
-                <a:latin typeface="Times New Roman" panose="02020603050405020304" pitchFamily="18" charset="0"/>
-                <a:cs typeface="Times New Roman" panose="02020603050405020304" pitchFamily="18" charset="0"/>
-              </a:rPr>
-              <a:t>Извлечь элемент из стека </a:t>
-            </a:r>
-            <a:r>
-              <a:rPr lang="ru-RU" dirty="0" err="1">
-                <a:latin typeface="Times New Roman" panose="02020603050405020304" pitchFamily="18" charset="0"/>
-                <a:cs typeface="Times New Roman" panose="02020603050405020304" pitchFamily="18" charset="0"/>
-              </a:rPr>
-              <a:t>pop</a:t>
-            </a:r>
-            <a:r>
-              <a:rPr lang="ru-RU" dirty="0">
-                <a:latin typeface="Times New Roman" panose="02020603050405020304" pitchFamily="18" charset="0"/>
-                <a:cs typeface="Times New Roman" panose="02020603050405020304" pitchFamily="18" charset="0"/>
-              </a:rPr>
-              <a:t>() (Сложность: O(1))</a:t>
-            </a:r>
-          </a:p>
-          <a:p>
-            <a:pPr marL="285750" indent="-285750">
-              <a:buFont typeface="Arial" panose="020B0604020202020204" pitchFamily="34" charset="0"/>
-              <a:buChar char="•"/>
-            </a:pPr>
-            <a:r>
-              <a:rPr lang="ru-RU" dirty="0">
-                <a:latin typeface="Times New Roman" panose="02020603050405020304" pitchFamily="18" charset="0"/>
-                <a:cs typeface="Times New Roman" panose="02020603050405020304" pitchFamily="18" charset="0"/>
-              </a:rPr>
-              <a:t>Проверить, пуст ли стек </a:t>
-            </a:r>
-            <a:r>
-              <a:rPr lang="ru-RU" dirty="0" err="1">
-                <a:latin typeface="Times New Roman" panose="02020603050405020304" pitchFamily="18" charset="0"/>
-                <a:cs typeface="Times New Roman" panose="02020603050405020304" pitchFamily="18" charset="0"/>
-              </a:rPr>
-              <a:t>isEmpty</a:t>
-            </a:r>
-            <a:r>
-              <a:rPr lang="ru-RU" dirty="0">
-                <a:latin typeface="Times New Roman" panose="02020603050405020304" pitchFamily="18" charset="0"/>
-                <a:cs typeface="Times New Roman" panose="02020603050405020304" pitchFamily="18" charset="0"/>
-              </a:rPr>
-              <a:t>() (Сложность: O(1))</a:t>
-            </a:r>
-          </a:p>
-          <a:p>
-            <a:endParaRPr lang="ru-RU" dirty="0">
-              <a:latin typeface="Times New Roman" panose="02020603050405020304" pitchFamily="18" charset="0"/>
-              <a:cs typeface="Times New Roman" panose="02020603050405020304" pitchFamily="18" charset="0"/>
-            </a:endParaRPr>
-          </a:p>
-          <a:p>
-            <a:r>
-              <a:rPr lang="ru-RU" dirty="0">
-                <a:latin typeface="Times New Roman" panose="02020603050405020304" pitchFamily="18" charset="0"/>
-                <a:cs typeface="Times New Roman" panose="02020603050405020304" pitchFamily="18" charset="0"/>
-              </a:rPr>
-              <a:t>Очередь (англ. </a:t>
-            </a:r>
-            <a:r>
-              <a:rPr lang="ru-RU" dirty="0" err="1">
-                <a:latin typeface="Times New Roman" panose="02020603050405020304" pitchFamily="18" charset="0"/>
-                <a:cs typeface="Times New Roman" panose="02020603050405020304" pitchFamily="18" charset="0"/>
-              </a:rPr>
-              <a:t>queue</a:t>
-            </a:r>
-            <a:r>
-              <a:rPr lang="ru-RU" dirty="0">
-                <a:latin typeface="Times New Roman" panose="02020603050405020304" pitchFamily="18" charset="0"/>
-                <a:cs typeface="Times New Roman" panose="02020603050405020304" pitchFamily="18" charset="0"/>
-              </a:rPr>
-              <a:t>) поддерживает тот же набор операций, что и стек, но имеет противоположную семантику. Для описания очереди используется аббревиатура FIFO (First In, First Out), так как первым из очереди извлекается элемент, раньше всех в неё добавленный.</a:t>
-            </a:r>
-          </a:p>
-        </p:txBody>
-      </p:sp>
-      <p:pic>
-        <p:nvPicPr>
-          <p:cNvPr id="18438" name="Picture 6" descr="alt text">
-            <a:extLst>
-              <a:ext uri="{FF2B5EF4-FFF2-40B4-BE49-F238E27FC236}">
-                <a16:creationId xmlns:a16="http://schemas.microsoft.com/office/drawing/2014/main" id="{12FDBC4E-8B51-4CA6-A11B-E330AF333179}"/>
-              </a:ext>
-            </a:extLst>
-          </p:cNvPr>
-          <p:cNvPicPr>
-            <a:picLocks noChangeAspect="1" noChangeArrowheads="1"/>
-          </p:cNvPicPr>
-          <p:nvPr/>
-        </p:nvPicPr>
-        <p:blipFill>
-          <a:blip r:embed="rId3">
-            <a:extLst>
-              <a:ext uri="{28A0092B-C50C-407E-A947-70E740481C1C}">
-                <a14:useLocalDpi xmlns:a14="http://schemas.microsoft.com/office/drawing/2010/main" val="0"/>
-              </a:ext>
-            </a:extLst>
-          </a:blip>
-          <a:srcRect/>
-          <a:stretch>
-            <a:fillRect/>
-          </a:stretch>
-        </p:blipFill>
-        <p:spPr bwMode="auto">
-          <a:xfrm>
-            <a:off x="954670" y="4360343"/>
-            <a:ext cx="4981575" cy="2171700"/>
-          </a:xfrm>
-          <a:prstGeom prst="rect">
-            <a:avLst/>
-          </a:prstGeom>
-          <a:noFill/>
-          <a:extLst>
-            <a:ext uri="{909E8E84-426E-40DD-AFC4-6F175D3DCCD1}">
-              <a14:hiddenFill xmlns:a14="http://schemas.microsoft.com/office/drawing/2010/main">
-                <a:solidFill>
-                  <a:srgbClr val="FFFFFF"/>
-                </a:solidFill>
-              </a14:hiddenFill>
-            </a:ext>
-          </a:extLst>
-        </p:spPr>
-      </p:pic>
-      <p:pic>
-        <p:nvPicPr>
-          <p:cNvPr id="18440" name="Picture 8" descr="Stack vs Queue">
-            <a:extLst>
-              <a:ext uri="{FF2B5EF4-FFF2-40B4-BE49-F238E27FC236}">
-                <a16:creationId xmlns:a16="http://schemas.microsoft.com/office/drawing/2014/main" id="{849D4061-7D45-45BE-920B-8A8C846798A8}"/>
-              </a:ext>
-            </a:extLst>
-          </p:cNvPr>
-          <p:cNvPicPr>
-            <a:picLocks noChangeAspect="1" noChangeArrowheads="1"/>
-          </p:cNvPicPr>
-          <p:nvPr/>
-        </p:nvPicPr>
-        <p:blipFill rotWithShape="1">
-          <a:blip r:embed="rId4">
-            <a:extLst>
-              <a:ext uri="{28A0092B-C50C-407E-A947-70E740481C1C}">
-                <a14:useLocalDpi xmlns:a14="http://schemas.microsoft.com/office/drawing/2010/main" val="0"/>
-              </a:ext>
-            </a:extLst>
-          </a:blip>
-          <a:srcRect l="50657" t="25488" b="26309"/>
-          <a:stretch/>
-        </p:blipFill>
-        <p:spPr bwMode="auto">
-          <a:xfrm>
-            <a:off x="6930521" y="4360343"/>
-            <a:ext cx="3947948" cy="2171700"/>
-          </a:xfrm>
-          <a:prstGeom prst="rect">
-            <a:avLst/>
-          </a:prstGeom>
-          <a:noFill/>
-          <a:extLst>
-            <a:ext uri="{909E8E84-426E-40DD-AFC4-6F175D3DCCD1}">
-              <a14:hiddenFill xmlns:a14="http://schemas.microsoft.com/office/drawing/2010/main">
-                <a:solidFill>
-                  <a:srgbClr val="FFFFFF"/>
-                </a:solidFill>
-              </a14:hiddenFill>
-            </a:ext>
-          </a:extLst>
-        </p:spPr>
-      </p:pic>
-    </p:spTree>
-    <p:extLst>
-      <p:ext uri="{BB962C8B-B14F-4D97-AF65-F5344CB8AC3E}">
-        <p14:creationId xmlns:p14="http://schemas.microsoft.com/office/powerpoint/2010/main" val="3016646123"/>
-      </p:ext>
-    </p:extLst>
-  </p:cSld>
-  <p:clrMapOvr>
-    <a:masterClrMapping/>
-  </p:clrMapOvr>
-</p:sld>
-</file>
-
-<file path=ppt/slides/slide41.xml><?xml version="1.0" encoding="utf-8"?>
-<p:sld xmlns:a="http://schemas.openxmlformats.org/drawingml/2006/main" xmlns:r="http://schemas.openxmlformats.org/officeDocument/2006/relationships" xmlns:p="http://schemas.openxmlformats.org/presentationml/2006/main">
-  <p:cSld>
-    <p:spTree>
-      <p:nvGrpSpPr>
-        <p:cNvPr id="1" name=""/>
-        <p:cNvGrpSpPr/>
-        <p:nvPr/>
-      </p:nvGrpSpPr>
-      <p:grpSpPr>
-        <a:xfrm>
-          <a:off x="0" y="0"/>
-          <a:ext cx="0" cy="0"/>
-          <a:chOff x="0" y="0"/>
-          <a:chExt cx="0" cy="0"/>
-        </a:xfrm>
-      </p:grpSpPr>
-      <p:sp>
-        <p:nvSpPr>
-          <p:cNvPr id="2" name="Заголовок 2">
-            <a:extLst>
-              <a:ext uri="{FF2B5EF4-FFF2-40B4-BE49-F238E27FC236}">
-                <a16:creationId xmlns:a16="http://schemas.microsoft.com/office/drawing/2014/main" id="{3E938672-0952-4303-90D6-285843A50533}"/>
-              </a:ext>
-            </a:extLst>
-          </p:cNvPr>
-          <p:cNvSpPr txBox="1">
-            <a:spLocks/>
-          </p:cNvSpPr>
-          <p:nvPr/>
-        </p:nvSpPr>
-        <p:spPr>
-          <a:xfrm>
-            <a:off x="1133141" y="289948"/>
-            <a:ext cx="9925717" cy="927688"/>
-          </a:xfrm>
-          <a:prstGeom prst="rect">
-            <a:avLst/>
-          </a:prstGeom>
-        </p:spPr>
-        <p:txBody>
-          <a:bodyPr vert="horz" lIns="91440" tIns="45720" rIns="91440" bIns="45720" rtlCol="0" anchor="b">
-            <a:normAutofit/>
-          </a:bodyPr>
-          <a:lstStyle>
-            <a:lvl1pPr algn="ctr" defTabSz="914400" rtl="0" eaLnBrk="1" latinLnBrk="0" hangingPunct="1">
-              <a:lnSpc>
-                <a:spcPct val="90000"/>
-              </a:lnSpc>
-              <a:spcBef>
-                <a:spcPct val="0"/>
-              </a:spcBef>
-              <a:buNone/>
-              <a:defRPr sz="6000" kern="1200">
-                <a:solidFill>
-                  <a:schemeClr val="tx1"/>
-                </a:solidFill>
-                <a:latin typeface="+mj-lt"/>
-                <a:ea typeface="+mj-ea"/>
-                <a:cs typeface="+mj-cs"/>
-              </a:defRPr>
-            </a:lvl1pPr>
-          </a:lstStyle>
-          <a:p>
-            <a:r>
-              <a:rPr lang="ru-RU" dirty="0">
-                <a:latin typeface="Times New Roman" panose="02020603050405020304" pitchFamily="18" charset="0"/>
-                <a:cs typeface="Times New Roman" panose="02020603050405020304" pitchFamily="18" charset="0"/>
-              </a:rPr>
-              <a:t>Примеры из реальной жизни</a:t>
-            </a:r>
-          </a:p>
-        </p:txBody>
-      </p:sp>
-      <p:sp>
-        <p:nvSpPr>
-          <p:cNvPr id="6" name="TextBox 5">
-            <a:extLst>
-              <a:ext uri="{FF2B5EF4-FFF2-40B4-BE49-F238E27FC236}">
-                <a16:creationId xmlns:a16="http://schemas.microsoft.com/office/drawing/2014/main" id="{0D02F73B-FD2C-4BBB-8D2D-7E89F6A14DAF}"/>
-              </a:ext>
-            </a:extLst>
-          </p:cNvPr>
-          <p:cNvSpPr txBox="1"/>
-          <p:nvPr/>
-        </p:nvSpPr>
-        <p:spPr>
-          <a:xfrm>
-            <a:off x="880766" y="1334751"/>
-            <a:ext cx="10430466" cy="3693319"/>
-          </a:xfrm>
-          <a:prstGeom prst="rect">
-            <a:avLst/>
-          </a:prstGeom>
-          <a:noFill/>
-        </p:spPr>
-        <p:txBody>
-          <a:bodyPr wrap="square">
-            <a:spAutoFit/>
-          </a:bodyPr>
-          <a:lstStyle/>
-          <a:p>
-            <a:pPr marL="285750" indent="-285750">
-              <a:buFont typeface="Arial" panose="020B0604020202020204" pitchFamily="34" charset="0"/>
-              <a:buChar char="•"/>
-            </a:pPr>
-            <a:r>
-              <a:rPr lang="ru-RU" dirty="0">
-                <a:latin typeface="Times New Roman" panose="02020603050405020304" pitchFamily="18" charset="0"/>
-                <a:cs typeface="Times New Roman" panose="02020603050405020304" pitchFamily="18" charset="0"/>
-              </a:rPr>
-              <a:t>Стеки используются для кнопок отмены в различных программах. Самые последние изменения помещаются в стек. Даже кнопка «Назад» в браузере работает с помощью стека, в который помещаются все недавно посещенные веб-страницы</a:t>
-            </a:r>
-          </a:p>
-          <a:p>
-            <a:pPr marL="285750" indent="-285750">
-              <a:buFont typeface="Arial" panose="020B0604020202020204" pitchFamily="34" charset="0"/>
-              <a:buChar char="•"/>
-            </a:pPr>
-            <a:endParaRPr lang="en-US" dirty="0">
-              <a:latin typeface="Times New Roman" panose="02020603050405020304" pitchFamily="18" charset="0"/>
-              <a:cs typeface="Times New Roman" panose="02020603050405020304" pitchFamily="18" charset="0"/>
-            </a:endParaRPr>
-          </a:p>
-          <a:p>
-            <a:pPr marL="285750" indent="-285750">
-              <a:buFont typeface="Arial" panose="020B0604020202020204" pitchFamily="34" charset="0"/>
-              <a:buChar char="•"/>
-            </a:pPr>
-            <a:r>
-              <a:rPr lang="ru-RU" dirty="0">
-                <a:latin typeface="Times New Roman" panose="02020603050405020304" pitchFamily="18" charset="0"/>
-                <a:cs typeface="Times New Roman" panose="02020603050405020304" pitchFamily="18" charset="0"/>
-              </a:rPr>
-              <a:t>Очереди: Представим, что у вас есть веб-сайт, который предоставляет файлы тысячам пользователей. Вы не можете обслуживать все запросы</a:t>
-            </a:r>
-            <a:r>
-              <a:rPr lang="en-US" dirty="0">
-                <a:latin typeface="Times New Roman" panose="02020603050405020304" pitchFamily="18" charset="0"/>
-                <a:cs typeface="Times New Roman" panose="02020603050405020304" pitchFamily="18" charset="0"/>
+              <a:rPr lang="ru-RU" b="0" dirty="0" err="1">
+                <a:solidFill>
+                  <a:srgbClr val="4EC9B0"/>
+                </a:solidFill>
+                <a:effectLst/>
+                <a:latin typeface="Consolas" panose="020B0609020204030204" pitchFamily="49" charset="0"/>
+              </a:rPr>
+              <a:t>node_t</a:t>
+            </a:r>
+            <a:r>
+              <a:rPr lang="ru-RU" b="0" dirty="0">
+                <a:solidFill>
+                  <a:srgbClr val="CCCCCC"/>
+                </a:solidFill>
+                <a:effectLst/>
+                <a:latin typeface="Consolas" panose="020B0609020204030204" pitchFamily="49" charset="0"/>
+              </a:rPr>
+              <a:t> {</a:t>
+            </a:r>
+          </a:p>
+          <a:p>
+            <a:r>
+              <a:rPr lang="ru-RU" b="0" dirty="0">
+                <a:solidFill>
+                  <a:srgbClr val="CCCCCC"/>
+                </a:solidFill>
+                <a:effectLst/>
+                <a:latin typeface="Consolas" panose="020B0609020204030204" pitchFamily="49" charset="0"/>
+              </a:rPr>
+              <a:t>    </a:t>
+            </a:r>
+            <a:r>
+              <a:rPr lang="ru-RU" b="0" dirty="0" err="1">
+                <a:solidFill>
+                  <a:srgbClr val="4EC9B0"/>
+                </a:solidFill>
+                <a:effectLst/>
+                <a:latin typeface="Consolas" panose="020B0609020204030204" pitchFamily="49" charset="0"/>
+              </a:rPr>
+              <a:t>node_t</a:t>
+            </a:r>
+            <a:r>
+              <a:rPr lang="ru-RU" b="0" dirty="0">
+                <a:solidFill>
+                  <a:srgbClr val="CCCCCC"/>
+                </a:solidFill>
+                <a:effectLst/>
+                <a:latin typeface="Consolas" panose="020B0609020204030204" pitchFamily="49" charset="0"/>
               </a:rPr>
               <a:t> </a:t>
             </a:r>
             <a:r>
-              <a:rPr lang="ru-RU" dirty="0">
-                <a:latin typeface="Times New Roman" panose="02020603050405020304" pitchFamily="18" charset="0"/>
-                <a:cs typeface="Times New Roman" panose="02020603050405020304" pitchFamily="18" charset="0"/>
-              </a:rPr>
-              <a:t>одновременно, вы можете обрабатывать только, например, 100 за раз. Справедливой политикой будет подача в порядке очереди: обслуживайте 100 человек за раз в порядке их поступления. </a:t>
-            </a:r>
-          </a:p>
-          <a:p>
-            <a:pPr marL="285750" indent="-285750">
-              <a:buFont typeface="Arial" panose="020B0604020202020204" pitchFamily="34" charset="0"/>
-              <a:buChar char="•"/>
-            </a:pPr>
-            <a:endParaRPr lang="ru-RU" dirty="0">
-              <a:latin typeface="Times New Roman" panose="02020603050405020304" pitchFamily="18" charset="0"/>
-              <a:cs typeface="Times New Roman" panose="02020603050405020304" pitchFamily="18" charset="0"/>
-            </a:endParaRPr>
-          </a:p>
-          <a:p>
-            <a:pPr marL="285750" indent="-285750">
-              <a:buFont typeface="Arial" panose="020B0604020202020204" pitchFamily="34" charset="0"/>
-              <a:buChar char="•"/>
-            </a:pPr>
-            <a:r>
-              <a:rPr lang="ru-RU" dirty="0">
-                <a:latin typeface="Times New Roman" panose="02020603050405020304" pitchFamily="18" charset="0"/>
-                <a:cs typeface="Times New Roman" panose="02020603050405020304" pitchFamily="18" charset="0"/>
-              </a:rPr>
-              <a:t>Аналогично в многозадачной операционной системе ЦП не может выполнять все задания одновременно, поэтому задания необходимо группировать в пакеты, а затем планировать в соответствии с некоторой политикой. Опять же, очередь может быть подходящим вариантом в этом случае</a:t>
-            </a:r>
-          </a:p>
-        </p:txBody>
-      </p:sp>
-      <p:pic>
-        <p:nvPicPr>
-          <p:cNvPr id="21506" name="Picture 2" descr="CS106B Stacks and Queues">
-            <a:extLst>
-              <a:ext uri="{FF2B5EF4-FFF2-40B4-BE49-F238E27FC236}">
-                <a16:creationId xmlns:a16="http://schemas.microsoft.com/office/drawing/2014/main" id="{5BB50EEF-B302-4065-870C-4A5C1354D882}"/>
-              </a:ext>
-            </a:extLst>
-          </p:cNvPr>
-          <p:cNvPicPr>
-            <a:picLocks noChangeAspect="1" noChangeArrowheads="1"/>
-          </p:cNvPicPr>
-          <p:nvPr/>
-        </p:nvPicPr>
-        <p:blipFill rotWithShape="1">
-          <a:blip r:embed="rId3" cstate="print">
-            <a:extLst>
-              <a:ext uri="{28A0092B-C50C-407E-A947-70E740481C1C}">
-                <a14:useLocalDpi xmlns:a14="http://schemas.microsoft.com/office/drawing/2010/main" val="0"/>
-              </a:ext>
-            </a:extLst>
-          </a:blip>
-          <a:srcRect t="-44" b="1866"/>
-          <a:stretch/>
-        </p:blipFill>
-        <p:spPr bwMode="auto">
-          <a:xfrm>
-            <a:off x="6095999" y="4786411"/>
-            <a:ext cx="4656081" cy="1832091"/>
-          </a:xfrm>
-          <a:prstGeom prst="rect">
-            <a:avLst/>
-          </a:prstGeom>
-          <a:noFill/>
-          <a:extLst>
-            <a:ext uri="{909E8E84-426E-40DD-AFC4-6F175D3DCCD1}">
-              <a14:hiddenFill xmlns:a14="http://schemas.microsoft.com/office/drawing/2010/main">
-                <a:solidFill>
-                  <a:srgbClr val="FFFFFF"/>
-                </a:solidFill>
-              </a14:hiddenFill>
-            </a:ext>
-          </a:extLst>
-        </p:spPr>
-      </p:pic>
-    </p:spTree>
-    <p:extLst>
-      <p:ext uri="{BB962C8B-B14F-4D97-AF65-F5344CB8AC3E}">
-        <p14:creationId xmlns:p14="http://schemas.microsoft.com/office/powerpoint/2010/main" val="2061884682"/>
-      </p:ext>
-    </p:extLst>
-  </p:cSld>
-  <p:clrMapOvr>
-    <a:masterClrMapping/>
-  </p:clrMapOvr>
-</p:sld>
-</file>
-
-<file path=ppt/slides/slide42.xml><?xml version="1.0" encoding="utf-8"?>
-<p:sld xmlns:a="http://schemas.openxmlformats.org/drawingml/2006/main" xmlns:r="http://schemas.openxmlformats.org/officeDocument/2006/relationships" xmlns:p="http://schemas.openxmlformats.org/presentationml/2006/main">
-  <p:cSld>
-    <p:spTree>
-      <p:nvGrpSpPr>
-        <p:cNvPr id="1" name=""/>
-        <p:cNvGrpSpPr/>
-        <p:nvPr/>
-      </p:nvGrpSpPr>
-      <p:grpSpPr>
-        <a:xfrm>
-          <a:off x="0" y="0"/>
-          <a:ext cx="0" cy="0"/>
-          <a:chOff x="0" y="0"/>
-          <a:chExt cx="0" cy="0"/>
-        </a:xfrm>
-      </p:grpSpPr>
-      <p:sp>
-        <p:nvSpPr>
-          <p:cNvPr id="2" name="Заголовок 2">
-            <a:extLst>
-              <a:ext uri="{FF2B5EF4-FFF2-40B4-BE49-F238E27FC236}">
-                <a16:creationId xmlns:a16="http://schemas.microsoft.com/office/drawing/2014/main" id="{3E938672-0952-4303-90D6-285843A50533}"/>
-              </a:ext>
-            </a:extLst>
-          </p:cNvPr>
-          <p:cNvSpPr txBox="1">
-            <a:spLocks/>
-          </p:cNvSpPr>
-          <p:nvPr/>
-        </p:nvSpPr>
-        <p:spPr>
-          <a:xfrm>
-            <a:off x="1133141" y="289948"/>
-            <a:ext cx="9925717" cy="927688"/>
-          </a:xfrm>
-          <a:prstGeom prst="rect">
-            <a:avLst/>
-          </a:prstGeom>
-        </p:spPr>
-        <p:txBody>
-          <a:bodyPr vert="horz" lIns="91440" tIns="45720" rIns="91440" bIns="45720" rtlCol="0" anchor="b">
-            <a:normAutofit/>
-          </a:bodyPr>
-          <a:lstStyle>
-            <a:lvl1pPr algn="ctr" defTabSz="914400" rtl="0" eaLnBrk="1" latinLnBrk="0" hangingPunct="1">
-              <a:lnSpc>
-                <a:spcPct val="90000"/>
-              </a:lnSpc>
-              <a:spcBef>
-                <a:spcPct val="0"/>
-              </a:spcBef>
-              <a:buNone/>
-              <a:defRPr sz="6000" kern="1200">
-                <a:solidFill>
-                  <a:schemeClr val="tx1"/>
-                </a:solidFill>
-                <a:latin typeface="+mj-lt"/>
-                <a:ea typeface="+mj-ea"/>
-                <a:cs typeface="+mj-cs"/>
-              </a:defRPr>
-            </a:lvl1pPr>
-          </a:lstStyle>
-          <a:p>
-            <a:r>
-              <a:rPr lang="ru-RU" dirty="0">
-                <a:latin typeface="Times New Roman" panose="02020603050405020304" pitchFamily="18" charset="0"/>
-                <a:cs typeface="Times New Roman" panose="02020603050405020304" pitchFamily="18" charset="0"/>
-              </a:rPr>
-              <a:t>Двусвязный список</a:t>
-            </a:r>
-          </a:p>
-        </p:txBody>
-      </p:sp>
-      <p:sp>
-        <p:nvSpPr>
-          <p:cNvPr id="4" name="TextBox 3">
-            <a:extLst>
-              <a:ext uri="{FF2B5EF4-FFF2-40B4-BE49-F238E27FC236}">
-                <a16:creationId xmlns:a16="http://schemas.microsoft.com/office/drawing/2014/main" id="{D7B63C32-1B2B-4CCF-8036-83917C272CD2}"/>
-              </a:ext>
-            </a:extLst>
-          </p:cNvPr>
-          <p:cNvSpPr txBox="1"/>
-          <p:nvPr/>
-        </p:nvSpPr>
-        <p:spPr>
-          <a:xfrm>
-            <a:off x="1808272" y="1781351"/>
-            <a:ext cx="7427134" cy="1477328"/>
-          </a:xfrm>
-          <a:prstGeom prst="rect">
-            <a:avLst/>
-          </a:prstGeom>
-          <a:noFill/>
-        </p:spPr>
-        <p:txBody>
-          <a:bodyPr wrap="square">
-            <a:spAutoFit/>
-          </a:bodyPr>
-          <a:lstStyle/>
-          <a:p>
+              <a:rPr lang="ru-RU" b="0" dirty="0">
+                <a:solidFill>
+                  <a:srgbClr val="D4D4D4"/>
+                </a:solidFill>
+                <a:effectLst/>
+                <a:latin typeface="Consolas" panose="020B0609020204030204" pitchFamily="49" charset="0"/>
+              </a:rPr>
+              <a:t>*</a:t>
+            </a:r>
             <a:r>
               <a:rPr lang="ru-RU" b="0" dirty="0" err="1">
                 <a:solidFill>
+                  <a:srgbClr val="CCCCCC"/>
+                </a:solidFill>
+                <a:effectLst/>
+                <a:latin typeface="Consolas" panose="020B0609020204030204" pitchFamily="49" charset="0"/>
+              </a:rPr>
+              <a:t>prev</a:t>
+            </a:r>
+            <a:r>
+              <a:rPr lang="ru-RU" b="0" dirty="0">
+                <a:solidFill>
+                  <a:srgbClr val="CCCCCC"/>
+                </a:solidFill>
+                <a:effectLst/>
+                <a:latin typeface="Consolas" panose="020B0609020204030204" pitchFamily="49" charset="0"/>
+              </a:rPr>
+              <a:t>;</a:t>
+            </a:r>
+            <a:r>
+              <a:rPr lang="ru-RU" b="0" dirty="0">
+                <a:solidFill>
+                  <a:srgbClr val="6A9955"/>
+                </a:solidFill>
+                <a:effectLst/>
+                <a:latin typeface="Consolas" panose="020B0609020204030204" pitchFamily="49" charset="0"/>
+              </a:rPr>
+              <a:t> </a:t>
+            </a:r>
+          </a:p>
+          <a:p>
+            <a:r>
+              <a:rPr lang="ru-RU" b="0" dirty="0">
+                <a:solidFill>
+                  <a:srgbClr val="CCCCCC"/>
+                </a:solidFill>
+                <a:effectLst/>
+                <a:latin typeface="Consolas" panose="020B0609020204030204" pitchFamily="49" charset="0"/>
+              </a:rPr>
+              <a:t>    </a:t>
+            </a:r>
+            <a:r>
+              <a:rPr lang="ru-RU" b="0" dirty="0" err="1">
+                <a:solidFill>
+                  <a:srgbClr val="569CD6"/>
+                </a:solidFill>
+                <a:effectLst/>
+                <a:latin typeface="Consolas" panose="020B0609020204030204" pitchFamily="49" charset="0"/>
+              </a:rPr>
+              <a:t>int</a:t>
+            </a:r>
+            <a:r>
+              <a:rPr lang="ru-RU" b="0" dirty="0">
+                <a:solidFill>
+                  <a:srgbClr val="CCCCCC"/>
+                </a:solidFill>
+                <a:effectLst/>
+                <a:latin typeface="Consolas" panose="020B0609020204030204" pitchFamily="49" charset="0"/>
+              </a:rPr>
+              <a:t> </a:t>
+            </a:r>
+            <a:r>
+              <a:rPr lang="ru-RU" b="0" dirty="0" err="1">
+                <a:solidFill>
+                  <a:srgbClr val="CCCCCC"/>
+                </a:solidFill>
+                <a:effectLst/>
+                <a:latin typeface="Consolas" panose="020B0609020204030204" pitchFamily="49" charset="0"/>
+              </a:rPr>
+              <a:t>data</a:t>
+            </a:r>
+            <a:r>
+              <a:rPr lang="ru-RU" b="0" dirty="0">
+                <a:solidFill>
+                  <a:srgbClr val="CCCCCC"/>
+                </a:solidFill>
+                <a:effectLst/>
+                <a:latin typeface="Consolas" panose="020B0609020204030204" pitchFamily="49" charset="0"/>
+              </a:rPr>
+              <a:t>;</a:t>
+            </a:r>
+          </a:p>
+          <a:p>
+            <a:r>
+              <a:rPr lang="ru-RU" b="0" dirty="0">
+                <a:solidFill>
+                  <a:srgbClr val="CCCCCC"/>
+                </a:solidFill>
+                <a:effectLst/>
+                <a:latin typeface="Consolas" panose="020B0609020204030204" pitchFamily="49" charset="0"/>
+              </a:rPr>
+              <a:t>    </a:t>
+            </a:r>
+            <a:r>
+              <a:rPr lang="ru-RU" b="0" dirty="0" err="1">
+                <a:solidFill>
                   <a:srgbClr val="4EC9B0"/>
                 </a:solidFill>
                 <a:effectLst/>
@@ -22497,29 +22264,27 @@
                 <a:effectLst/>
                 <a:latin typeface="Consolas" panose="020B0609020204030204" pitchFamily="49" charset="0"/>
               </a:rPr>
-              <a:t> {</a:t>
-            </a:r>
-          </a:p>
-          <a:p>
+              <a:t> </a:t>
+            </a:r>
             <a:r>
               <a:rPr lang="ru-RU" b="0" dirty="0">
                 <a:solidFill>
+                  <a:srgbClr val="D4D4D4"/>
+                </a:solidFill>
+                <a:effectLst/>
+                <a:latin typeface="Consolas" panose="020B0609020204030204" pitchFamily="49" charset="0"/>
+              </a:rPr>
+              <a:t>*</a:t>
+            </a:r>
+            <a:r>
+              <a:rPr lang="ru-RU" b="0" dirty="0" err="1">
+                <a:solidFill>
                   <a:srgbClr val="CCCCCC"/>
                 </a:solidFill>
                 <a:effectLst/>
                 <a:latin typeface="Consolas" panose="020B0609020204030204" pitchFamily="49" charset="0"/>
               </a:rPr>
-              <a:t>    </a:t>
-            </a:r>
-            <a:r>
-              <a:rPr lang="ru-RU" b="0" dirty="0" err="1">
-                <a:solidFill>
-                  <a:srgbClr val="4EC9B0"/>
-                </a:solidFill>
-                <a:effectLst/>
-                <a:latin typeface="Consolas" panose="020B0609020204030204" pitchFamily="49" charset="0"/>
-              </a:rPr>
-              <a:t>node_t</a:t>
+              <a:t>next</a:t>
             </a:r>
             <a:r>
               <a:rPr lang="ru-RU" b="0" dirty="0">
@@ -22529,203 +22294,8 @@
                 <a:effectLst/>
                 <a:latin typeface="Consolas" panose="020B0609020204030204" pitchFamily="49" charset="0"/>
               </a:rPr>
-              <a:t> </a:t>
-            </a:r>
-            <a:r>
-              <a:rPr lang="ru-RU" b="0" dirty="0">
-                <a:solidFill>
-                  <a:srgbClr val="D4D4D4"/>
-                </a:solidFill>
-                <a:effectLst/>
-                <a:latin typeface="Consolas" panose="020B0609020204030204" pitchFamily="49" charset="0"/>
-              </a:rPr>
-              <a:t>*</a:t>
-            </a:r>
-            <a:r>
-              <a:rPr lang="ru-RU" b="0" dirty="0" err="1">
-                <a:solidFill>
-                  <a:srgbClr val="CCCCCC"/>
-                </a:solidFill>
-                <a:effectLst/>
-                <a:latin typeface="Consolas" panose="020B0609020204030204" pitchFamily="49" charset="0"/>
-              </a:rPr>
-              <a:t>prev</a:t>
-            </a:r>
-            <a:r>
-              <a:rPr lang="ru-RU" b="0" dirty="0">
-                <a:solidFill>
-                  <a:srgbClr val="CCCCCC"/>
-                </a:solidFill>
-                <a:effectLst/>
-                <a:latin typeface="Consolas" panose="020B0609020204030204" pitchFamily="49" charset="0"/>
-              </a:rPr>
               <a:t>;</a:t>
             </a:r>
-            <a:r>
-              <a:rPr lang="ru-RU" b="0" dirty="0">
-                <a:solidFill>
-                  <a:srgbClr val="6A9955"/>
-                </a:solidFill>
-                <a:effectLst/>
-                <a:latin typeface="Consolas" panose="020B0609020204030204" pitchFamily="49" charset="0"/>
-              </a:rPr>
-              <a:t> // указатель на предыдущий узел</a:t>
-            </a:r>
-            <a:endParaRPr lang="ru-RU" b="0" dirty="0">
-              <a:solidFill>
-                <a:srgbClr val="CCCCCC"/>
-              </a:solidFill>
-              <a:effectLst/>
-              <a:latin typeface="Consolas" panose="020B0609020204030204" pitchFamily="49" charset="0"/>
-            </a:endParaRPr>
-          </a:p>
-          <a:p>
-            <a:r>
-              <a:rPr lang="ru-RU" b="0" dirty="0">
-                <a:solidFill>
-                  <a:srgbClr val="CCCCCC"/>
-                </a:solidFill>
-                <a:effectLst/>
-                <a:latin typeface="Consolas" panose="020B0609020204030204" pitchFamily="49" charset="0"/>
-              </a:rPr>
-              <a:t>    </a:t>
-            </a:r>
-            <a:r>
-              <a:rPr lang="ru-RU" b="0" dirty="0" err="1">
-                <a:solidFill>
-                  <a:srgbClr val="569CD6"/>
-                </a:solidFill>
-                <a:effectLst/>
-                <a:latin typeface="Consolas" panose="020B0609020204030204" pitchFamily="49" charset="0"/>
-              </a:rPr>
-              <a:t>int</a:t>
-            </a:r>
-            <a:r>
-              <a:rPr lang="ru-RU" b="0" dirty="0">
-                <a:solidFill>
-                  <a:srgbClr val="CCCCCC"/>
-                </a:solidFill>
-                <a:effectLst/>
-                <a:latin typeface="Consolas" panose="020B0609020204030204" pitchFamily="49" charset="0"/>
-              </a:rPr>
-              <a:t> </a:t>
-            </a:r>
-            <a:r>
-              <a:rPr lang="ru-RU" b="0" dirty="0" err="1">
-                <a:solidFill>
-                  <a:srgbClr val="CCCCCC"/>
-                </a:solidFill>
-                <a:effectLst/>
-                <a:latin typeface="Consolas" panose="020B0609020204030204" pitchFamily="49" charset="0"/>
-              </a:rPr>
-              <a:t>data</a:t>
-            </a:r>
-            <a:r>
-              <a:rPr lang="ru-RU" b="0" dirty="0">
-                <a:solidFill>
-                  <a:srgbClr val="CCCCCC"/>
-                </a:solidFill>
-                <a:effectLst/>
-                <a:latin typeface="Consolas" panose="020B0609020204030204" pitchFamily="49" charset="0"/>
-              </a:rPr>
-              <a:t>;</a:t>
-            </a:r>
-            <a:r>
-              <a:rPr lang="ru-RU" b="0" dirty="0">
-                <a:solidFill>
-                  <a:srgbClr val="6A9955"/>
-                </a:solidFill>
-                <a:effectLst/>
-                <a:latin typeface="Consolas" panose="020B0609020204030204" pitchFamily="49" charset="0"/>
-              </a:rPr>
-              <a:t> // любые данные</a:t>
-            </a:r>
-            <a:endParaRPr lang="ru-RU" b="0" dirty="0">
-              <a:solidFill>
-                <a:srgbClr val="CCCCCC"/>
-              </a:solidFill>
-              <a:effectLst/>
-              <a:latin typeface="Consolas" panose="020B0609020204030204" pitchFamily="49" charset="0"/>
-            </a:endParaRPr>
-          </a:p>
-          <a:p>
-            <a:r>
-              <a:rPr lang="ru-RU" b="0" dirty="0">
-                <a:solidFill>
-                  <a:srgbClr val="CCCCCC"/>
-                </a:solidFill>
-                <a:effectLst/>
-                <a:latin typeface="Consolas" panose="020B0609020204030204" pitchFamily="49" charset="0"/>
-              </a:rPr>
-              <a:t>    </a:t>
-            </a:r>
-            <a:r>
-              <a:rPr lang="ru-RU" b="0" dirty="0" err="1">
-                <a:solidFill>
-                  <a:srgbClr val="4EC9B0"/>
-                </a:solidFill>
-                <a:effectLst/>
-                <a:latin typeface="Consolas" panose="020B0609020204030204" pitchFamily="49" charset="0"/>
-              </a:rPr>
-              <a:t>node_t</a:t>
-            </a:r>
-            <a:r>
-              <a:rPr lang="ru-RU" b="0" dirty="0">
-                <a:solidFill>
-                  <a:srgbClr val="CCCCCC"/>
-                </a:solidFill>
-                <a:effectLst/>
-                <a:latin typeface="Consolas" panose="020B0609020204030204" pitchFamily="49" charset="0"/>
-              </a:rPr>
-              <a:t> </a:t>
-            </a:r>
-            <a:r>
-              <a:rPr lang="ru-RU" b="0" dirty="0">
-                <a:solidFill>
-                  <a:srgbClr val="D4D4D4"/>
-                </a:solidFill>
-                <a:effectLst/>
-                <a:latin typeface="Consolas" panose="020B0609020204030204" pitchFamily="49" charset="0"/>
-              </a:rPr>
-              <a:t>*</a:t>
-            </a:r>
-            <a:r>
-              <a:rPr lang="ru-RU" b="0" dirty="0" err="1">
-                <a:solidFill>
-                  <a:srgbClr val="CCCCCC"/>
-                </a:solidFill>
-                <a:effectLst/>
-                <a:latin typeface="Consolas" panose="020B0609020204030204" pitchFamily="49" charset="0"/>
-              </a:rPr>
-              <a:t>next</a:t>
-            </a:r>
-            <a:r>
-              <a:rPr lang="ru-RU" b="0" dirty="0">
-                <a:solidFill>
-                  <a:srgbClr val="CCCCCC"/>
-                </a:solidFill>
-                <a:effectLst/>
-                <a:latin typeface="Consolas" panose="020B0609020204030204" pitchFamily="49" charset="0"/>
-              </a:rPr>
-              <a:t>;</a:t>
-            </a:r>
-            <a:r>
-              <a:rPr lang="ru-RU" b="0" dirty="0">
-                <a:solidFill>
-                  <a:srgbClr val="6A9955"/>
-                </a:solidFill>
-                <a:effectLst/>
-                <a:latin typeface="Consolas" panose="020B0609020204030204" pitchFamily="49" charset="0"/>
-              </a:rPr>
-              <a:t> // указатель на следующий узел</a:t>
-            </a:r>
-            <a:endParaRPr lang="ru-RU" b="0" dirty="0">
-              <a:solidFill>
-                <a:srgbClr val="CCCCCC"/>
-              </a:solidFill>
-              <a:effectLst/>
-              <a:latin typeface="Consolas" panose="020B0609020204030204" pitchFamily="49" charset="0"/>
-            </a:endParaRPr>
           </a:p>
           <a:p>
             <a:r>
@@ -22770,7 +22340,7 @@
         </p:blipFill>
         <p:spPr bwMode="auto">
           <a:xfrm>
-            <a:off x="1808272" y="3599322"/>
+            <a:off x="3701595" y="1533054"/>
             <a:ext cx="8066887" cy="1973920"/>
           </a:xfrm>
           <a:prstGeom prst="rect">
@@ -22788,6 +22358,211 @@
           </a:extLst>
         </p:spPr>
       </p:pic>
+      <p:sp>
+        <p:nvSpPr>
+          <p:cNvPr id="8" name="TextBox 7">
+            <a:extLst>
+              <a:ext uri="{FF2B5EF4-FFF2-40B4-BE49-F238E27FC236}">
+                <a16:creationId xmlns:a16="http://schemas.microsoft.com/office/drawing/2014/main" id="{27367C70-FD41-418E-BD08-841D67345BB1}"/>
+              </a:ext>
+            </a:extLst>
+          </p:cNvPr>
+          <p:cNvSpPr txBox="1"/>
+          <p:nvPr/>
+        </p:nvSpPr>
+        <p:spPr>
+          <a:xfrm>
+            <a:off x="10325100" y="1190679"/>
+            <a:ext cx="1762125" cy="369332"/>
+          </a:xfrm>
+          <a:prstGeom prst="rect">
+            <a:avLst/>
+          </a:prstGeom>
+          <a:noFill/>
+        </p:spPr>
+        <p:txBody>
+          <a:bodyPr wrap="square">
+            <a:spAutoFit/>
+          </a:bodyPr>
+          <a:lstStyle/>
+          <a:p>
+            <a:r>
+              <a:rPr lang="en-US" dirty="0" err="1"/>
+              <a:t>src</a:t>
+            </a:r>
+            <a:r>
+              <a:rPr lang="en-US" dirty="0"/>
+              <a:t>/</a:t>
+            </a:r>
+            <a:r>
+              <a:rPr lang="en-US" dirty="0" err="1"/>
+              <a:t>doubly_ll.c</a:t>
+            </a:r>
+            <a:endParaRPr lang="ru-RU" dirty="0"/>
+          </a:p>
+        </p:txBody>
+      </p:sp>
+      <p:sp>
+        <p:nvSpPr>
+          <p:cNvPr id="14" name="TextBox 13">
+            <a:extLst>
+              <a:ext uri="{FF2B5EF4-FFF2-40B4-BE49-F238E27FC236}">
+                <a16:creationId xmlns:a16="http://schemas.microsoft.com/office/drawing/2014/main" id="{3B49BCA0-EAA2-4D5B-8123-539A2B50FD75}"/>
+              </a:ext>
+            </a:extLst>
+          </p:cNvPr>
+          <p:cNvSpPr txBox="1"/>
+          <p:nvPr/>
+        </p:nvSpPr>
+        <p:spPr>
+          <a:xfrm>
+            <a:off x="830497" y="4070688"/>
+            <a:ext cx="10793073" cy="2308324"/>
+          </a:xfrm>
+          <a:prstGeom prst="rect">
+            <a:avLst/>
+          </a:prstGeom>
+          <a:noFill/>
+        </p:spPr>
+        <p:txBody>
+          <a:bodyPr wrap="square">
+            <a:spAutoFit/>
+          </a:bodyPr>
+          <a:lstStyle/>
+          <a:p>
+            <a:pPr marL="285750" indent="-285750">
+              <a:buFont typeface="Arial" panose="020B0604020202020204" pitchFamily="34" charset="0"/>
+              <a:buChar char="•"/>
+            </a:pPr>
+            <a:r>
+              <a:rPr lang="ru-RU" sz="2400" dirty="0">
+                <a:latin typeface="Times New Roman" panose="02020603050405020304" pitchFamily="18" charset="0"/>
+                <a:cs typeface="Times New Roman" panose="02020603050405020304" pitchFamily="18" charset="0"/>
+              </a:rPr>
+              <a:t>Кнопки "Назад" и "Вперед" в браузере</a:t>
+            </a:r>
+          </a:p>
+          <a:p>
+            <a:pPr marL="285750" indent="-285750">
+              <a:buFont typeface="Arial" panose="020B0604020202020204" pitchFamily="34" charset="0"/>
+              <a:buChar char="•"/>
+            </a:pPr>
+            <a:r>
+              <a:rPr lang="ru-RU" sz="2400" dirty="0">
+                <a:latin typeface="Times New Roman" panose="02020603050405020304" pitchFamily="18" charset="0"/>
+                <a:cs typeface="Times New Roman" panose="02020603050405020304" pitchFamily="18" charset="0"/>
+              </a:rPr>
+              <a:t>"Плейлист в плеере"</a:t>
+            </a:r>
+            <a:r>
+              <a:rPr lang="en-US" sz="2400" dirty="0">
+                <a:latin typeface="Times New Roman" panose="02020603050405020304" pitchFamily="18" charset="0"/>
+                <a:cs typeface="Times New Roman" panose="02020603050405020304" pitchFamily="18" charset="0"/>
+              </a:rPr>
+              <a:t>/</a:t>
+            </a:r>
+            <a:r>
+              <a:rPr lang="ru-RU" sz="2400" dirty="0" err="1">
+                <a:latin typeface="Times New Roman" panose="02020603050405020304" pitchFamily="18" charset="0"/>
+                <a:cs typeface="Times New Roman" panose="02020603050405020304" pitchFamily="18" charset="0"/>
+              </a:rPr>
+              <a:t>видосы</a:t>
+            </a:r>
+            <a:r>
+              <a:rPr lang="en-US" sz="2400" dirty="0">
+                <a:latin typeface="Times New Roman" panose="02020603050405020304" pitchFamily="18" charset="0"/>
+                <a:cs typeface="Times New Roman" panose="02020603050405020304" pitchFamily="18" charset="0"/>
+              </a:rPr>
+              <a:t>/</a:t>
+            </a:r>
+            <a:r>
+              <a:rPr lang="ru-RU" sz="2400" dirty="0" err="1">
+                <a:latin typeface="Times New Roman" panose="02020603050405020304" pitchFamily="18" charset="0"/>
+                <a:cs typeface="Times New Roman" panose="02020603050405020304" pitchFamily="18" charset="0"/>
+              </a:rPr>
+              <a:t>рилсы</a:t>
+            </a:r>
+            <a:endParaRPr lang="ru-RU" sz="2400" dirty="0">
+              <a:latin typeface="Times New Roman" panose="02020603050405020304" pitchFamily="18" charset="0"/>
+              <a:cs typeface="Times New Roman" panose="02020603050405020304" pitchFamily="18" charset="0"/>
+            </a:endParaRPr>
+          </a:p>
+          <a:p>
+            <a:pPr marL="285750" indent="-285750">
+              <a:buFont typeface="Arial" panose="020B0604020202020204" pitchFamily="34" charset="0"/>
+              <a:buChar char="•"/>
+            </a:pPr>
+            <a:r>
+              <a:rPr lang="ru-RU" sz="2400" dirty="0" err="1">
+                <a:latin typeface="Times New Roman" panose="02020603050405020304" pitchFamily="18" charset="0"/>
+                <a:cs typeface="Times New Roman" panose="02020603050405020304" pitchFamily="18" charset="0"/>
+              </a:rPr>
+              <a:t>Ctrl+Z</a:t>
+            </a:r>
+            <a:r>
+              <a:rPr lang="ru-RU" sz="2400" dirty="0">
+                <a:latin typeface="Times New Roman" panose="02020603050405020304" pitchFamily="18" charset="0"/>
+                <a:cs typeface="Times New Roman" panose="02020603050405020304" pitchFamily="18" charset="0"/>
+              </a:rPr>
+              <a:t> и </a:t>
+            </a:r>
+            <a:r>
+              <a:rPr lang="ru-RU" sz="2400" dirty="0" err="1">
+                <a:latin typeface="Times New Roman" panose="02020603050405020304" pitchFamily="18" charset="0"/>
+                <a:cs typeface="Times New Roman" panose="02020603050405020304" pitchFamily="18" charset="0"/>
+              </a:rPr>
+              <a:t>Ctrl+Y</a:t>
+            </a:r>
+            <a:r>
+              <a:rPr lang="ru-RU" sz="2400" dirty="0">
+                <a:latin typeface="Times New Roman" panose="02020603050405020304" pitchFamily="18" charset="0"/>
+                <a:cs typeface="Times New Roman" panose="02020603050405020304" pitchFamily="18" charset="0"/>
+              </a:rPr>
+              <a:t> (Отмена/Повтор)</a:t>
+            </a:r>
+          </a:p>
+          <a:p>
+            <a:pPr marL="285750" indent="-285750">
+              <a:buFont typeface="Arial" panose="020B0604020202020204" pitchFamily="34" charset="0"/>
+              <a:buChar char="•"/>
+            </a:pPr>
+            <a:r>
+              <a:rPr lang="ru-RU" sz="2400" dirty="0">
+                <a:latin typeface="Times New Roman" panose="02020603050405020304" pitchFamily="18" charset="0"/>
+                <a:cs typeface="Times New Roman" panose="02020603050405020304" pitchFamily="18" charset="0"/>
+              </a:rPr>
+              <a:t>Алгоритмы кэширования (например, LRU)</a:t>
+            </a:r>
+          </a:p>
+          <a:p>
+            <a:pPr marL="285750" indent="-285750">
+              <a:buFont typeface="Arial" panose="020B0604020202020204" pitchFamily="34" charset="0"/>
+              <a:buChar char="•"/>
+            </a:pPr>
+            <a:r>
+              <a:rPr lang="ru-RU" sz="2400" dirty="0">
+                <a:latin typeface="Times New Roman" panose="02020603050405020304" pitchFamily="18" charset="0"/>
+                <a:cs typeface="Times New Roman" panose="02020603050405020304" pitchFamily="18" charset="0"/>
+              </a:rPr>
+              <a:t>Дек (</a:t>
+            </a:r>
+            <a:r>
+              <a:rPr lang="ru-RU" sz="2400" dirty="0" err="1">
+                <a:latin typeface="Times New Roman" panose="02020603050405020304" pitchFamily="18" charset="0"/>
+                <a:cs typeface="Times New Roman" panose="02020603050405020304" pitchFamily="18" charset="0"/>
+              </a:rPr>
+              <a:t>Deque</a:t>
+            </a:r>
+            <a:r>
+              <a:rPr lang="ru-RU" sz="2400" dirty="0">
+                <a:latin typeface="Times New Roman" panose="02020603050405020304" pitchFamily="18" charset="0"/>
+                <a:cs typeface="Times New Roman" panose="02020603050405020304" pitchFamily="18" charset="0"/>
+              </a:rPr>
+              <a:t> - двусторонняя очередь), для эффективной вставки и удаления на обоих концах     </a:t>
+            </a:r>
+          </a:p>
+        </p:txBody>
+      </p:sp>
     </p:spTree>
     <p:extLst>
       <p:ext uri="{BB962C8B-B14F-4D97-AF65-F5344CB8AC3E}">
@@ -22801,7 +22576,7 @@
 </p:sld>
 </file>
 
-<file path=ppt/slides/slide43.xml><?xml version="1.0" encoding="utf-8"?>
+<file path=ppt/slides/slide41.xml><?xml version="1.0" encoding="utf-8"?>
 <p:sld xmlns:a="http://schemas.openxmlformats.org/drawingml/2006/main" xmlns:r="http://schemas.openxmlformats.org/officeDocument/2006/relationships" xmlns:p="http://schemas.openxmlformats.org/presentationml/2006/main">
   <p:cSld>
     <p:spTree>
@@ -22973,6 +22748,45 @@
           </a:extLst>
         </p:spPr>
       </p:pic>
+      <p:sp>
+        <p:nvSpPr>
+          <p:cNvPr id="6" name="TextBox 5">
+            <a:extLst>
+              <a:ext uri="{FF2B5EF4-FFF2-40B4-BE49-F238E27FC236}">
+                <a16:creationId xmlns:a16="http://schemas.microsoft.com/office/drawing/2014/main" id="{57C5D05A-CAF7-4440-81AE-FD2B2F24708D}"/>
+              </a:ext>
+            </a:extLst>
+          </p:cNvPr>
+          <p:cNvSpPr txBox="1"/>
+          <p:nvPr/>
+        </p:nvSpPr>
+        <p:spPr>
+          <a:xfrm>
+            <a:off x="571500" y="6282809"/>
+            <a:ext cx="6096000" cy="369332"/>
+          </a:xfrm>
+          <a:prstGeom prst="rect">
+            <a:avLst/>
+          </a:prstGeom>
+          <a:noFill/>
+        </p:spPr>
+        <p:txBody>
+          <a:bodyPr wrap="square">
+            <a:spAutoFit/>
+          </a:bodyPr>
+          <a:lstStyle/>
+          <a:p>
+            <a:r>
+              <a:rPr lang="ru-RU" dirty="0">
+                <a:latin typeface="Times New Roman" panose="02020603050405020304" pitchFamily="18" charset="0"/>
+                <a:cs typeface="Times New Roman" panose="02020603050405020304" pitchFamily="18" charset="0"/>
+              </a:rPr>
+              <a:t>*Как понять является список зацикленным?</a:t>
+            </a:r>
+            <a:endParaRPr lang="ru-RU" dirty="0"/>
+          </a:p>
+        </p:txBody>
+      </p:sp>
     </p:spTree>
     <p:extLst>
       <p:ext uri="{BB962C8B-B14F-4D97-AF65-F5344CB8AC3E}">
@@ -22986,7 +22800,1049 @@
 </p:sld>
 </file>
 
+<file path=ppt/slides/slide42.xml><?xml version="1.0" encoding="utf-8"?>
+<p:sld xmlns:a="http://schemas.openxmlformats.org/drawingml/2006/main" xmlns:r="http://schemas.openxmlformats.org/officeDocument/2006/relationships" xmlns:p="http://schemas.openxmlformats.org/presentationml/2006/main">
+  <p:cSld>
+    <p:spTree>
+      <p:nvGrpSpPr>
+        <p:cNvPr id="1" name=""/>
+        <p:cNvGrpSpPr/>
+        <p:nvPr/>
+      </p:nvGrpSpPr>
+      <p:grpSpPr>
+        <a:xfrm>
+          <a:off x="0" y="0"/>
+          <a:ext cx="0" cy="0"/>
+          <a:chOff x="0" y="0"/>
+          <a:chExt cx="0" cy="0"/>
+        </a:xfrm>
+      </p:grpSpPr>
+      <p:sp>
+        <p:nvSpPr>
+          <p:cNvPr id="2" name="Заголовок 2">
+            <a:extLst>
+              <a:ext uri="{FF2B5EF4-FFF2-40B4-BE49-F238E27FC236}">
+                <a16:creationId xmlns:a16="http://schemas.microsoft.com/office/drawing/2014/main" id="{3E938672-0952-4303-90D6-285843A50533}"/>
+              </a:ext>
+            </a:extLst>
+          </p:cNvPr>
+          <p:cNvSpPr txBox="1">
+            <a:spLocks/>
+          </p:cNvSpPr>
+          <p:nvPr/>
+        </p:nvSpPr>
+        <p:spPr>
+          <a:xfrm>
+            <a:off x="1133141" y="289948"/>
+            <a:ext cx="9925717" cy="927688"/>
+          </a:xfrm>
+          <a:prstGeom prst="rect">
+            <a:avLst/>
+          </a:prstGeom>
+        </p:spPr>
+        <p:txBody>
+          <a:bodyPr vert="horz" lIns="91440" tIns="45720" rIns="91440" bIns="45720" rtlCol="0" anchor="b">
+            <a:normAutofit/>
+          </a:bodyPr>
+          <a:lstStyle>
+            <a:lvl1pPr algn="ctr" defTabSz="914400" rtl="0" eaLnBrk="1" latinLnBrk="0" hangingPunct="1">
+              <a:lnSpc>
+                <a:spcPct val="90000"/>
+              </a:lnSpc>
+              <a:spcBef>
+                <a:spcPct val="0"/>
+              </a:spcBef>
+              <a:buNone/>
+              <a:defRPr sz="6000" kern="1200">
+                <a:solidFill>
+                  <a:schemeClr val="tx1"/>
+                </a:solidFill>
+                <a:latin typeface="+mj-lt"/>
+                <a:ea typeface="+mj-ea"/>
+                <a:cs typeface="+mj-cs"/>
+              </a:defRPr>
+            </a:lvl1pPr>
+          </a:lstStyle>
+          <a:p>
+            <a:r>
+              <a:rPr lang="ru-RU" dirty="0">
+                <a:latin typeface="Times New Roman" panose="02020603050405020304" pitchFamily="18" charset="0"/>
+                <a:cs typeface="Times New Roman" panose="02020603050405020304" pitchFamily="18" charset="0"/>
+              </a:rPr>
+              <a:t>Итого по спискам</a:t>
+            </a:r>
+            <a:endParaRPr lang="ru-RU" dirty="0"/>
+          </a:p>
+        </p:txBody>
+      </p:sp>
+      <p:sp>
+        <p:nvSpPr>
+          <p:cNvPr id="15" name="TextBox 14">
+            <a:extLst>
+              <a:ext uri="{FF2B5EF4-FFF2-40B4-BE49-F238E27FC236}">
+                <a16:creationId xmlns:a16="http://schemas.microsoft.com/office/drawing/2014/main" id="{8827B313-8D3F-418E-AD56-345E95E89370}"/>
+              </a:ext>
+            </a:extLst>
+          </p:cNvPr>
+          <p:cNvSpPr txBox="1"/>
+          <p:nvPr/>
+        </p:nvSpPr>
+        <p:spPr>
+          <a:xfrm>
+            <a:off x="838199" y="1657351"/>
+            <a:ext cx="10963275" cy="2308324"/>
+          </a:xfrm>
+          <a:prstGeom prst="rect">
+            <a:avLst/>
+          </a:prstGeom>
+          <a:noFill/>
+        </p:spPr>
+        <p:txBody>
+          <a:bodyPr wrap="square">
+            <a:spAutoFit/>
+          </a:bodyPr>
+          <a:lstStyle/>
+          <a:p>
+            <a:r>
+              <a:rPr lang="ru-RU" dirty="0">
+                <a:latin typeface="Times New Roman" panose="02020603050405020304" pitchFamily="18" charset="0"/>
+                <a:cs typeface="Times New Roman" panose="02020603050405020304" pitchFamily="18" charset="0"/>
+              </a:rPr>
+              <a:t>Связанный список — это линейная структура данных, которая используется для хранения набора данных с помощью узлов</a:t>
+            </a:r>
+          </a:p>
+          <a:p>
+            <a:endParaRPr lang="ru-RU" dirty="0">
+              <a:latin typeface="Times New Roman" panose="02020603050405020304" pitchFamily="18" charset="0"/>
+              <a:cs typeface="Times New Roman" panose="02020603050405020304" pitchFamily="18" charset="0"/>
+            </a:endParaRPr>
+          </a:p>
+          <a:p>
+            <a:pPr marL="285750" indent="-285750">
+              <a:buFont typeface="Arial" panose="020B0604020202020204" pitchFamily="34" charset="0"/>
+              <a:buChar char="•"/>
+            </a:pPr>
+            <a:r>
+              <a:rPr lang="ru-RU" dirty="0">
+                <a:latin typeface="Times New Roman" panose="02020603050405020304" pitchFamily="18" charset="0"/>
+                <a:cs typeface="Times New Roman" panose="02020603050405020304" pitchFamily="18" charset="0"/>
+              </a:rPr>
+              <a:t>Последовательные элементы соединены указателями/ссылками.</a:t>
+            </a:r>
+          </a:p>
+          <a:p>
+            <a:pPr marL="285750" indent="-285750">
+              <a:buFont typeface="Arial" panose="020B0604020202020204" pitchFamily="34" charset="0"/>
+              <a:buChar char="•"/>
+            </a:pPr>
+            <a:r>
+              <a:rPr lang="ru-RU" dirty="0">
+                <a:latin typeface="Times New Roman" panose="02020603050405020304" pitchFamily="18" charset="0"/>
+                <a:cs typeface="Times New Roman" panose="02020603050405020304" pitchFamily="18" charset="0"/>
+              </a:rPr>
+              <a:t>Последний узел связанного списка указывает на </a:t>
+            </a:r>
+            <a:r>
+              <a:rPr lang="ru-RU" dirty="0" err="1">
+                <a:latin typeface="Times New Roman" panose="02020603050405020304" pitchFamily="18" charset="0"/>
+                <a:cs typeface="Times New Roman" panose="02020603050405020304" pitchFamily="18" charset="0"/>
+              </a:rPr>
+              <a:t>null</a:t>
+            </a:r>
+            <a:r>
+              <a:rPr lang="ru-RU" dirty="0">
+                <a:latin typeface="Times New Roman" panose="02020603050405020304" pitchFamily="18" charset="0"/>
+                <a:cs typeface="Times New Roman" panose="02020603050405020304" pitchFamily="18" charset="0"/>
+              </a:rPr>
+              <a:t>.</a:t>
+            </a:r>
+          </a:p>
+          <a:p>
+            <a:pPr marL="285750" indent="-285750">
+              <a:buFont typeface="Arial" panose="020B0604020202020204" pitchFamily="34" charset="0"/>
+              <a:buChar char="•"/>
+            </a:pPr>
+            <a:r>
+              <a:rPr lang="ru-RU" dirty="0">
+                <a:latin typeface="Times New Roman" panose="02020603050405020304" pitchFamily="18" charset="0"/>
+                <a:cs typeface="Times New Roman" panose="02020603050405020304" pitchFamily="18" charset="0"/>
+              </a:rPr>
+              <a:t>Точка входа связанного списка называется головой.</a:t>
+            </a:r>
+          </a:p>
+          <a:p>
+            <a:pPr marL="285750" indent="-285750">
+              <a:buFont typeface="Arial" panose="020B0604020202020204" pitchFamily="34" charset="0"/>
+              <a:buChar char="•"/>
+            </a:pPr>
+            <a:endParaRPr lang="ru-RU" dirty="0">
+              <a:latin typeface="Times New Roman" panose="02020603050405020304" pitchFamily="18" charset="0"/>
+              <a:cs typeface="Times New Roman" panose="02020603050405020304" pitchFamily="18" charset="0"/>
+            </a:endParaRPr>
+          </a:p>
+          <a:p>
+            <a:pPr marL="285750" indent="-285750">
+              <a:buFont typeface="Arial" panose="020B0604020202020204" pitchFamily="34" charset="0"/>
+              <a:buChar char="•"/>
+            </a:pPr>
+            <a:r>
+              <a:rPr lang="ru-RU" dirty="0">
+                <a:latin typeface="Times New Roman" panose="02020603050405020304" pitchFamily="18" charset="0"/>
+                <a:cs typeface="Times New Roman" panose="02020603050405020304" pitchFamily="18" charset="0"/>
+              </a:rPr>
+              <a:t>Обычные вариации связанных списков — это </a:t>
+            </a:r>
+            <a:r>
+              <a:rPr lang="ru-RU" dirty="0" err="1">
+                <a:latin typeface="Times New Roman" panose="02020603050405020304" pitchFamily="18" charset="0"/>
+                <a:cs typeface="Times New Roman" panose="02020603050405020304" pitchFamily="18" charset="0"/>
+              </a:rPr>
+              <a:t>Singly</a:t>
+            </a:r>
+            <a:r>
+              <a:rPr lang="ru-RU" dirty="0">
+                <a:latin typeface="Times New Roman" panose="02020603050405020304" pitchFamily="18" charset="0"/>
+                <a:cs typeface="Times New Roman" panose="02020603050405020304" pitchFamily="18" charset="0"/>
+              </a:rPr>
+              <a:t>, </a:t>
+            </a:r>
+            <a:r>
+              <a:rPr lang="ru-RU" dirty="0" err="1">
+                <a:latin typeface="Times New Roman" panose="02020603050405020304" pitchFamily="18" charset="0"/>
+                <a:cs typeface="Times New Roman" panose="02020603050405020304" pitchFamily="18" charset="0"/>
+              </a:rPr>
+              <a:t>Doubly</a:t>
+            </a:r>
+            <a:r>
+              <a:rPr lang="ru-RU" dirty="0">
+                <a:latin typeface="Times New Roman" panose="02020603050405020304" pitchFamily="18" charset="0"/>
+                <a:cs typeface="Times New Roman" panose="02020603050405020304" pitchFamily="18" charset="0"/>
+              </a:rPr>
+              <a:t>, </a:t>
+            </a:r>
+            <a:r>
+              <a:rPr lang="ru-RU" dirty="0" err="1">
+                <a:latin typeface="Times New Roman" panose="02020603050405020304" pitchFamily="18" charset="0"/>
+                <a:cs typeface="Times New Roman" panose="02020603050405020304" pitchFamily="18" charset="0"/>
+              </a:rPr>
+              <a:t>Singly</a:t>
+            </a:r>
+            <a:r>
+              <a:rPr lang="ru-RU" dirty="0">
+                <a:latin typeface="Times New Roman" panose="02020603050405020304" pitchFamily="18" charset="0"/>
+                <a:cs typeface="Times New Roman" panose="02020603050405020304" pitchFamily="18" charset="0"/>
+              </a:rPr>
+              <a:t> </a:t>
+            </a:r>
+            <a:r>
+              <a:rPr lang="ru-RU" dirty="0" err="1">
+                <a:latin typeface="Times New Roman" panose="02020603050405020304" pitchFamily="18" charset="0"/>
+                <a:cs typeface="Times New Roman" panose="02020603050405020304" pitchFamily="18" charset="0"/>
+              </a:rPr>
+              <a:t>Circular</a:t>
+            </a:r>
+            <a:r>
+              <a:rPr lang="ru-RU" dirty="0">
+                <a:latin typeface="Times New Roman" panose="02020603050405020304" pitchFamily="18" charset="0"/>
+                <a:cs typeface="Times New Roman" panose="02020603050405020304" pitchFamily="18" charset="0"/>
+              </a:rPr>
+              <a:t> и </a:t>
+            </a:r>
+            <a:r>
+              <a:rPr lang="ru-RU" dirty="0" err="1">
+                <a:latin typeface="Times New Roman" panose="02020603050405020304" pitchFamily="18" charset="0"/>
+                <a:cs typeface="Times New Roman" panose="02020603050405020304" pitchFamily="18" charset="0"/>
+              </a:rPr>
+              <a:t>Doubly</a:t>
+            </a:r>
+            <a:r>
+              <a:rPr lang="ru-RU" dirty="0">
+                <a:latin typeface="Times New Roman" panose="02020603050405020304" pitchFamily="18" charset="0"/>
+                <a:cs typeface="Times New Roman" panose="02020603050405020304" pitchFamily="18" charset="0"/>
+              </a:rPr>
+              <a:t> </a:t>
+            </a:r>
+            <a:r>
+              <a:rPr lang="ru-RU" dirty="0" err="1">
+                <a:latin typeface="Times New Roman" panose="02020603050405020304" pitchFamily="18" charset="0"/>
+                <a:cs typeface="Times New Roman" panose="02020603050405020304" pitchFamily="18" charset="0"/>
+              </a:rPr>
+              <a:t>Circular</a:t>
+            </a:r>
+            <a:r>
+              <a:rPr lang="ru-RU" dirty="0">
+                <a:latin typeface="Times New Roman" panose="02020603050405020304" pitchFamily="18" charset="0"/>
+                <a:cs typeface="Times New Roman" panose="02020603050405020304" pitchFamily="18" charset="0"/>
+              </a:rPr>
+              <a:t>.</a:t>
+            </a:r>
+            <a:endParaRPr lang="en-US" dirty="0">
+              <a:latin typeface="Times New Roman" panose="02020603050405020304" pitchFamily="18" charset="0"/>
+              <a:cs typeface="Times New Roman" panose="02020603050405020304" pitchFamily="18" charset="0"/>
+            </a:endParaRPr>
+          </a:p>
+        </p:txBody>
+      </p:sp>
+      <p:pic>
+        <p:nvPicPr>
+          <p:cNvPr id="4" name="Picture 4" descr="The Linked List Data Structure. Data Structures | by Julia Di Monte | Medium">
+            <a:extLst>
+              <a:ext uri="{FF2B5EF4-FFF2-40B4-BE49-F238E27FC236}">
+                <a16:creationId xmlns:a16="http://schemas.microsoft.com/office/drawing/2014/main" id="{B37EA964-ABD0-42FB-A0EB-F359402A9A72}"/>
+              </a:ext>
+            </a:extLst>
+          </p:cNvPr>
+          <p:cNvPicPr>
+            <a:picLocks noChangeAspect="1" noChangeArrowheads="1"/>
+          </p:cNvPicPr>
+          <p:nvPr/>
+        </p:nvPicPr>
+        <p:blipFill>
+          <a:blip r:embed="rId3">
+            <a:extLst>
+              <a:ext uri="{28A0092B-C50C-407E-A947-70E740481C1C}">
+                <a14:useLocalDpi xmlns:a14="http://schemas.microsoft.com/office/drawing/2010/main" val="0"/>
+              </a:ext>
+            </a:extLst>
+          </a:blip>
+          <a:srcRect/>
+          <a:stretch>
+            <a:fillRect/>
+          </a:stretch>
+        </p:blipFill>
+        <p:spPr bwMode="auto">
+          <a:xfrm>
+            <a:off x="3225715" y="4744739"/>
+            <a:ext cx="5740570" cy="1661744"/>
+          </a:xfrm>
+          <a:prstGeom prst="rect">
+            <a:avLst/>
+          </a:prstGeom>
+          <a:noFill/>
+          <a:extLst>
+            <a:ext uri="{909E8E84-426E-40DD-AFC4-6F175D3DCCD1}">
+              <a14:hiddenFill xmlns:a14="http://schemas.microsoft.com/office/drawing/2010/main">
+                <a:solidFill>
+                  <a:srgbClr val="FFFFFF"/>
+                </a:solidFill>
+              </a14:hiddenFill>
+            </a:ext>
+          </a:extLst>
+        </p:spPr>
+      </p:pic>
+    </p:spTree>
+    <p:extLst>
+      <p:ext uri="{BB962C8B-B14F-4D97-AF65-F5344CB8AC3E}">
+        <p14:creationId xmlns:p14="http://schemas.microsoft.com/office/powerpoint/2010/main" val="2106487599"/>
+      </p:ext>
+    </p:extLst>
+  </p:cSld>
+  <p:clrMapOvr>
+    <a:masterClrMapping/>
+  </p:clrMapOvr>
+</p:sld>
+</file>
+
+<file path=ppt/slides/slide43.xml><?xml version="1.0" encoding="utf-8"?>
+<p:sld xmlns:a="http://schemas.openxmlformats.org/drawingml/2006/main" xmlns:r="http://schemas.openxmlformats.org/officeDocument/2006/relationships" xmlns:p="http://schemas.openxmlformats.org/presentationml/2006/main">
+  <p:cSld>
+    <p:spTree>
+      <p:nvGrpSpPr>
+        <p:cNvPr id="1" name=""/>
+        <p:cNvGrpSpPr/>
+        <p:nvPr/>
+      </p:nvGrpSpPr>
+      <p:grpSpPr>
+        <a:xfrm>
+          <a:off x="0" y="0"/>
+          <a:ext cx="0" cy="0"/>
+          <a:chOff x="0" y="0"/>
+          <a:chExt cx="0" cy="0"/>
+        </a:xfrm>
+      </p:grpSpPr>
+      <p:sp>
+        <p:nvSpPr>
+          <p:cNvPr id="2" name="Заголовок 2">
+            <a:extLst>
+              <a:ext uri="{FF2B5EF4-FFF2-40B4-BE49-F238E27FC236}">
+                <a16:creationId xmlns:a16="http://schemas.microsoft.com/office/drawing/2014/main" id="{3E938672-0952-4303-90D6-285843A50533}"/>
+              </a:ext>
+            </a:extLst>
+          </p:cNvPr>
+          <p:cNvSpPr txBox="1">
+            <a:spLocks/>
+          </p:cNvSpPr>
+          <p:nvPr/>
+        </p:nvSpPr>
+        <p:spPr>
+          <a:xfrm>
+            <a:off x="1133141" y="289948"/>
+            <a:ext cx="9925717" cy="927688"/>
+          </a:xfrm>
+          <a:prstGeom prst="rect">
+            <a:avLst/>
+          </a:prstGeom>
+        </p:spPr>
+        <p:txBody>
+          <a:bodyPr vert="horz" lIns="91440" tIns="45720" rIns="91440" bIns="45720" rtlCol="0" anchor="b">
+            <a:normAutofit fontScale="55000" lnSpcReduction="20000"/>
+          </a:bodyPr>
+          <a:lstStyle>
+            <a:lvl1pPr algn="ctr" defTabSz="914400" rtl="0" eaLnBrk="1" latinLnBrk="0" hangingPunct="1">
+              <a:lnSpc>
+                <a:spcPct val="90000"/>
+              </a:lnSpc>
+              <a:spcBef>
+                <a:spcPct val="0"/>
+              </a:spcBef>
+              <a:buNone/>
+              <a:defRPr sz="6000" kern="1200">
+                <a:solidFill>
+                  <a:schemeClr val="tx1"/>
+                </a:solidFill>
+                <a:latin typeface="+mj-lt"/>
+                <a:ea typeface="+mj-ea"/>
+                <a:cs typeface="+mj-cs"/>
+              </a:defRPr>
+            </a:lvl1pPr>
+          </a:lstStyle>
+          <a:p>
+            <a:r>
+              <a:rPr lang="ru-RU" dirty="0">
+                <a:latin typeface="Times New Roman" panose="02020603050405020304" pitchFamily="18" charset="0"/>
+                <a:cs typeface="Times New Roman" panose="02020603050405020304" pitchFamily="18" charset="0"/>
+              </a:rPr>
+              <a:t>Преимущества связанных списков (или наиболее распространенные варианты использования):</a:t>
+            </a:r>
+          </a:p>
+        </p:txBody>
+      </p:sp>
+      <p:sp>
+        <p:nvSpPr>
+          <p:cNvPr id="17" name="TextBox 16">
+            <a:extLst>
+              <a:ext uri="{FF2B5EF4-FFF2-40B4-BE49-F238E27FC236}">
+                <a16:creationId xmlns:a16="http://schemas.microsoft.com/office/drawing/2014/main" id="{046C366F-5491-4984-B637-F32BE58AEE81}"/>
+              </a:ext>
+            </a:extLst>
+          </p:cNvPr>
+          <p:cNvSpPr txBox="1"/>
+          <p:nvPr/>
+        </p:nvSpPr>
+        <p:spPr>
+          <a:xfrm>
+            <a:off x="604836" y="1367374"/>
+            <a:ext cx="10982325" cy="4524315"/>
+          </a:xfrm>
+          <a:prstGeom prst="rect">
+            <a:avLst/>
+          </a:prstGeom>
+          <a:noFill/>
+        </p:spPr>
+        <p:txBody>
+          <a:bodyPr wrap="square">
+            <a:spAutoFit/>
+          </a:bodyPr>
+          <a:lstStyle/>
+          <a:p>
+            <a:pPr marL="285750" indent="-285750">
+              <a:buFontTx/>
+              <a:buChar char="-"/>
+            </a:pPr>
+            <a:endParaRPr lang="en-US" dirty="0">
+              <a:latin typeface="Times New Roman" panose="02020603050405020304" pitchFamily="18" charset="0"/>
+              <a:cs typeface="Times New Roman" panose="02020603050405020304" pitchFamily="18" charset="0"/>
+            </a:endParaRPr>
+          </a:p>
+          <a:p>
+            <a:pPr marL="285750" indent="-285750">
+              <a:buFontTx/>
+              <a:buChar char="-"/>
+            </a:pPr>
+            <a:r>
+              <a:rPr lang="ru-RU" dirty="0">
+                <a:latin typeface="Times New Roman" panose="02020603050405020304" pitchFamily="18" charset="0"/>
+                <a:cs typeface="Times New Roman" panose="02020603050405020304" pitchFamily="18" charset="0"/>
+              </a:rPr>
+              <a:t>Связанные списки в основном используются из-за их эффективной вставки и удаления. Нам нужно изменить всего несколько указателей (или ссылок), чтобы вставить (или удалить) элемент в середине</a:t>
+            </a:r>
+            <a:br>
+              <a:rPr lang="ru-RU" dirty="0">
+                <a:latin typeface="Times New Roman" panose="02020603050405020304" pitchFamily="18" charset="0"/>
+                <a:cs typeface="Times New Roman" panose="02020603050405020304" pitchFamily="18" charset="0"/>
+              </a:rPr>
+            </a:br>
+            <a:endParaRPr lang="ru-RU" dirty="0">
+              <a:latin typeface="Times New Roman" panose="02020603050405020304" pitchFamily="18" charset="0"/>
+              <a:cs typeface="Times New Roman" panose="02020603050405020304" pitchFamily="18" charset="0"/>
+            </a:endParaRPr>
+          </a:p>
+          <a:p>
+            <a:pPr marL="285750" indent="-285750">
+              <a:buFontTx/>
+              <a:buChar char="-"/>
+            </a:pPr>
+            <a:r>
+              <a:rPr lang="ru-RU" dirty="0">
+                <a:latin typeface="Times New Roman" panose="02020603050405020304" pitchFamily="18" charset="0"/>
+                <a:cs typeface="Times New Roman" panose="02020603050405020304" pitchFamily="18" charset="0"/>
+              </a:rPr>
+              <a:t>Вставка и удаление в любой точке связанного списка занимает O(1) времени. Тогда как в структуре данных массива вставка/удаление в середине занимает O(n) времени.</a:t>
+            </a:r>
+            <a:br>
+              <a:rPr lang="ru-RU" dirty="0">
+                <a:latin typeface="Times New Roman" panose="02020603050405020304" pitchFamily="18" charset="0"/>
+                <a:cs typeface="Times New Roman" panose="02020603050405020304" pitchFamily="18" charset="0"/>
+              </a:rPr>
+            </a:br>
+            <a:endParaRPr lang="ru-RU" dirty="0">
+              <a:latin typeface="Times New Roman" panose="02020603050405020304" pitchFamily="18" charset="0"/>
+              <a:cs typeface="Times New Roman" panose="02020603050405020304" pitchFamily="18" charset="0"/>
+            </a:endParaRPr>
+          </a:p>
+          <a:p>
+            <a:pPr marL="285750" indent="-285750">
+              <a:buFontTx/>
+              <a:buChar char="-"/>
+            </a:pPr>
+            <a:r>
+              <a:rPr lang="ru-RU" dirty="0">
+                <a:latin typeface="Times New Roman" panose="02020603050405020304" pitchFamily="18" charset="0"/>
+                <a:cs typeface="Times New Roman" panose="02020603050405020304" pitchFamily="18" charset="0"/>
+              </a:rPr>
+              <a:t>Эта структура данных проста и может также использоваться для реализации **стека, очередей и других абстрактных структур данных**. Большинство языковых библиотек используют связанный список внутренне для реализации этих структур данных.</a:t>
+            </a:r>
+            <a:br>
+              <a:rPr lang="ru-RU" dirty="0">
+                <a:latin typeface="Times New Roman" panose="02020603050405020304" pitchFamily="18" charset="0"/>
+                <a:cs typeface="Times New Roman" panose="02020603050405020304" pitchFamily="18" charset="0"/>
+              </a:rPr>
+            </a:br>
+            <a:endParaRPr lang="ru-RU" dirty="0">
+              <a:latin typeface="Times New Roman" panose="02020603050405020304" pitchFamily="18" charset="0"/>
+              <a:cs typeface="Times New Roman" panose="02020603050405020304" pitchFamily="18" charset="0"/>
+            </a:endParaRPr>
+          </a:p>
+          <a:p>
+            <a:pPr marL="285750" indent="-285750">
+              <a:buFontTx/>
+              <a:buChar char="-"/>
+            </a:pPr>
+            <a:r>
+              <a:rPr lang="ru-RU" dirty="0">
+                <a:latin typeface="Times New Roman" panose="02020603050405020304" pitchFamily="18" charset="0"/>
+                <a:cs typeface="Times New Roman" panose="02020603050405020304" pitchFamily="18" charset="0"/>
+              </a:rPr>
+              <a:t>Связанный список может оказаться более эффективным по сравнению с массивами в случаях, когда мы не можем заранее угадать количество элементов. В случае массивов вся память для элементов выделяется вместе. Даже с динамическими массивами, такими как </a:t>
+            </a:r>
+            <a:r>
+              <a:rPr lang="ru-RU" dirty="0" err="1">
+                <a:latin typeface="Times New Roman" panose="02020603050405020304" pitchFamily="18" charset="0"/>
+                <a:cs typeface="Times New Roman" panose="02020603050405020304" pitchFamily="18" charset="0"/>
+              </a:rPr>
+              <a:t>vector</a:t>
+            </a:r>
+            <a:r>
+              <a:rPr lang="ru-RU" dirty="0">
+                <a:latin typeface="Times New Roman" panose="02020603050405020304" pitchFamily="18" charset="0"/>
+                <a:cs typeface="Times New Roman" panose="02020603050405020304" pitchFamily="18" charset="0"/>
+              </a:rPr>
+              <a:t> в C++ или </a:t>
+            </a:r>
+            <a:r>
+              <a:rPr lang="ru-RU" dirty="0" err="1">
+                <a:latin typeface="Times New Roman" panose="02020603050405020304" pitchFamily="18" charset="0"/>
+                <a:cs typeface="Times New Roman" panose="02020603050405020304" pitchFamily="18" charset="0"/>
+              </a:rPr>
+              <a:t>list</a:t>
+            </a:r>
+            <a:r>
+              <a:rPr lang="ru-RU" dirty="0">
+                <a:latin typeface="Times New Roman" panose="02020603050405020304" pitchFamily="18" charset="0"/>
+                <a:cs typeface="Times New Roman" panose="02020603050405020304" pitchFamily="18" charset="0"/>
+              </a:rPr>
+              <a:t> в Python или </a:t>
+            </a:r>
+            <a:r>
+              <a:rPr lang="ru-RU" dirty="0" err="1">
+                <a:latin typeface="Times New Roman" panose="02020603050405020304" pitchFamily="18" charset="0"/>
+                <a:cs typeface="Times New Roman" panose="02020603050405020304" pitchFamily="18" charset="0"/>
+              </a:rPr>
+              <a:t>ArrayList</a:t>
+            </a:r>
+            <a:r>
+              <a:rPr lang="ru-RU" dirty="0">
+                <a:latin typeface="Times New Roman" panose="02020603050405020304" pitchFamily="18" charset="0"/>
+                <a:cs typeface="Times New Roman" panose="02020603050405020304" pitchFamily="18" charset="0"/>
+              </a:rPr>
+              <a:t> в Java. внутренняя работа включает в себя освобождение всей памяти и выделение большего фрагмента, когда вставки происходят за пределами текущей емкости. </a:t>
+            </a:r>
+            <a:endParaRPr lang="ru-RU" dirty="0"/>
+          </a:p>
+        </p:txBody>
+      </p:sp>
+    </p:spTree>
+    <p:extLst>
+      <p:ext uri="{BB962C8B-B14F-4D97-AF65-F5344CB8AC3E}">
+        <p14:creationId xmlns:p14="http://schemas.microsoft.com/office/powerpoint/2010/main" val="2134149037"/>
+      </p:ext>
+    </p:extLst>
+  </p:cSld>
+  <p:clrMapOvr>
+    <a:masterClrMapping/>
+  </p:clrMapOvr>
+</p:sld>
+</file>
+
 <file path=ppt/slides/slide44.xml><?xml version="1.0" encoding="utf-8"?>
+<p:sld xmlns:a="http://schemas.openxmlformats.org/drawingml/2006/main" xmlns:r="http://schemas.openxmlformats.org/officeDocument/2006/relationships" xmlns:p="http://schemas.openxmlformats.org/presentationml/2006/main">
+  <p:cSld>
+    <p:spTree>
+      <p:nvGrpSpPr>
+        <p:cNvPr id="1" name=""/>
+        <p:cNvGrpSpPr/>
+        <p:nvPr/>
+      </p:nvGrpSpPr>
+      <p:grpSpPr>
+        <a:xfrm>
+          <a:off x="0" y="0"/>
+          <a:ext cx="0" cy="0"/>
+          <a:chOff x="0" y="0"/>
+          <a:chExt cx="0" cy="0"/>
+        </a:xfrm>
+      </p:grpSpPr>
+      <p:sp>
+        <p:nvSpPr>
+          <p:cNvPr id="2" name="Заголовок 2">
+            <a:extLst>
+              <a:ext uri="{FF2B5EF4-FFF2-40B4-BE49-F238E27FC236}">
+                <a16:creationId xmlns:a16="http://schemas.microsoft.com/office/drawing/2014/main" id="{3E938672-0952-4303-90D6-285843A50533}"/>
+              </a:ext>
+            </a:extLst>
+          </p:cNvPr>
+          <p:cNvSpPr txBox="1">
+            <a:spLocks/>
+          </p:cNvSpPr>
+          <p:nvPr/>
+        </p:nvSpPr>
+        <p:spPr>
+          <a:xfrm>
+            <a:off x="1133140" y="70873"/>
+            <a:ext cx="9925717" cy="927688"/>
+          </a:xfrm>
+          <a:prstGeom prst="rect">
+            <a:avLst/>
+          </a:prstGeom>
+        </p:spPr>
+        <p:txBody>
+          <a:bodyPr vert="horz" lIns="91440" tIns="45720" rIns="91440" bIns="45720" rtlCol="0" anchor="b">
+            <a:normAutofit fontScale="92500"/>
+          </a:bodyPr>
+          <a:lstStyle>
+            <a:lvl1pPr algn="ctr" defTabSz="914400" rtl="0" eaLnBrk="1" latinLnBrk="0" hangingPunct="1">
+              <a:lnSpc>
+                <a:spcPct val="90000"/>
+              </a:lnSpc>
+              <a:spcBef>
+                <a:spcPct val="0"/>
+              </a:spcBef>
+              <a:buNone/>
+              <a:defRPr sz="6000" kern="1200">
+                <a:solidFill>
+                  <a:schemeClr val="tx1"/>
+                </a:solidFill>
+                <a:latin typeface="+mj-lt"/>
+                <a:ea typeface="+mj-ea"/>
+                <a:cs typeface="+mj-cs"/>
+              </a:defRPr>
+            </a:lvl1pPr>
+          </a:lstStyle>
+          <a:p>
+            <a:r>
+              <a:rPr lang="ru-RU" dirty="0">
+                <a:latin typeface="Times New Roman" panose="02020603050405020304" pitchFamily="18" charset="0"/>
+                <a:cs typeface="Times New Roman" panose="02020603050405020304" pitchFamily="18" charset="0"/>
+              </a:rPr>
+              <a:t>Недостатки связанных списков</a:t>
+            </a:r>
+          </a:p>
+        </p:txBody>
+      </p:sp>
+      <p:sp>
+        <p:nvSpPr>
+          <p:cNvPr id="7" name="TextBox 6">
+            <a:extLst>
+              <a:ext uri="{FF2B5EF4-FFF2-40B4-BE49-F238E27FC236}">
+                <a16:creationId xmlns:a16="http://schemas.microsoft.com/office/drawing/2014/main" id="{B5E2AFC3-D2F6-41D2-B9D4-F72334B0450A}"/>
+              </a:ext>
+            </a:extLst>
+          </p:cNvPr>
+          <p:cNvSpPr txBox="1"/>
+          <p:nvPr/>
+        </p:nvSpPr>
+        <p:spPr>
+          <a:xfrm>
+            <a:off x="923923" y="998561"/>
+            <a:ext cx="10344150" cy="5909310"/>
+          </a:xfrm>
+          <a:prstGeom prst="rect">
+            <a:avLst/>
+          </a:prstGeom>
+          <a:noFill/>
+        </p:spPr>
+        <p:txBody>
+          <a:bodyPr wrap="square">
+            <a:spAutoFit/>
+          </a:bodyPr>
+          <a:lstStyle/>
+          <a:p>
+            <a:r>
+              <a:rPr lang="ru-RU" dirty="0">
+                <a:latin typeface="Times New Roman" panose="02020603050405020304" pitchFamily="18" charset="0"/>
+                <a:cs typeface="Times New Roman" panose="02020603050405020304" pitchFamily="18" charset="0"/>
+              </a:rPr>
+              <a:t>Связанные списки являются популярной структурой данных, но, как и любая другая структура данных, они имеют определенные недостатки. Некоторые из основных недостатков связанных списков:</a:t>
+            </a:r>
+          </a:p>
+          <a:p>
+            <a:endParaRPr lang="ru-RU" dirty="0">
+              <a:latin typeface="Times New Roman" panose="02020603050405020304" pitchFamily="18" charset="0"/>
+              <a:cs typeface="Times New Roman" panose="02020603050405020304" pitchFamily="18" charset="0"/>
+            </a:endParaRPr>
+          </a:p>
+          <a:p>
+            <a:pPr marL="285750" indent="-285750">
+              <a:buFont typeface="Arial" panose="020B0604020202020204" pitchFamily="34" charset="0"/>
+              <a:buChar char="•"/>
+            </a:pPr>
+            <a:r>
+              <a:rPr lang="ru-RU" dirty="0">
+                <a:latin typeface="Times New Roman" panose="02020603050405020304" pitchFamily="18" charset="0"/>
+                <a:cs typeface="Times New Roman" panose="02020603050405020304" pitchFamily="18" charset="0"/>
+              </a:rPr>
+              <a:t>Медленное время доступа: доступ к элементам в связанном списке может быть медленным, так как вам нужно пройти по связанному списку, чтобы найти нужный элемент, что является операцией O(n). Это делает связанные списки плохим выбором для ситуаций, когда вам нужно быстро получить доступ к элементам.</a:t>
+            </a:r>
+            <a:br>
+              <a:rPr lang="ru-RU" dirty="0">
+                <a:latin typeface="Times New Roman" panose="02020603050405020304" pitchFamily="18" charset="0"/>
+                <a:cs typeface="Times New Roman" panose="02020603050405020304" pitchFamily="18" charset="0"/>
+              </a:rPr>
+            </a:br>
+            <a:endParaRPr lang="ru-RU" dirty="0">
+              <a:latin typeface="Times New Roman" panose="02020603050405020304" pitchFamily="18" charset="0"/>
+              <a:cs typeface="Times New Roman" panose="02020603050405020304" pitchFamily="18" charset="0"/>
+            </a:endParaRPr>
+          </a:p>
+          <a:p>
+            <a:pPr marL="285750" indent="-285750">
+              <a:buFont typeface="Arial" panose="020B0604020202020204" pitchFamily="34" charset="0"/>
+              <a:buChar char="•"/>
+            </a:pPr>
+            <a:r>
+              <a:rPr lang="ru-RU" dirty="0">
+                <a:latin typeface="Times New Roman" panose="02020603050405020304" pitchFamily="18" charset="0"/>
+                <a:cs typeface="Times New Roman" panose="02020603050405020304" pitchFamily="18" charset="0"/>
+              </a:rPr>
+              <a:t>Указатели или ссылки: Связанные списки используют указатели или ссылки для доступа к следующему узлу, что может сделать их более сложными для понимания и использования по сравнению с массивами. Эта сложность может сделать связанные списки более трудными для отладки и обслуживания.</a:t>
+            </a:r>
+            <a:br>
+              <a:rPr lang="ru-RU" dirty="0">
+                <a:latin typeface="Times New Roman" panose="02020603050405020304" pitchFamily="18" charset="0"/>
+                <a:cs typeface="Times New Roman" panose="02020603050405020304" pitchFamily="18" charset="0"/>
+              </a:rPr>
+            </a:br>
+            <a:endParaRPr lang="ru-RU" dirty="0">
+              <a:latin typeface="Times New Roman" panose="02020603050405020304" pitchFamily="18" charset="0"/>
+              <a:cs typeface="Times New Roman" panose="02020603050405020304" pitchFamily="18" charset="0"/>
+            </a:endParaRPr>
+          </a:p>
+          <a:p>
+            <a:pPr marL="285750" indent="-285750">
+              <a:buFont typeface="Arial" panose="020B0604020202020204" pitchFamily="34" charset="0"/>
+              <a:buChar char="•"/>
+            </a:pPr>
+            <a:r>
+              <a:rPr lang="ru-RU" dirty="0">
+                <a:latin typeface="Times New Roman" panose="02020603050405020304" pitchFamily="18" charset="0"/>
+                <a:cs typeface="Times New Roman" panose="02020603050405020304" pitchFamily="18" charset="0"/>
+              </a:rPr>
+              <a:t>Более высокие накладные расходы: Связанные списки имеют более высокие накладные расходы по сравнению с массивами, так как каждый узел в связанном списке требует дополнительной памяти для хранения ссылки на следующий узел.</a:t>
+            </a:r>
+            <a:br>
+              <a:rPr lang="ru-RU" dirty="0">
+                <a:latin typeface="Times New Roman" panose="02020603050405020304" pitchFamily="18" charset="0"/>
+                <a:cs typeface="Times New Roman" panose="02020603050405020304" pitchFamily="18" charset="0"/>
+              </a:rPr>
+            </a:br>
+            <a:endParaRPr lang="ru-RU" dirty="0">
+              <a:latin typeface="Times New Roman" panose="02020603050405020304" pitchFamily="18" charset="0"/>
+              <a:cs typeface="Times New Roman" panose="02020603050405020304" pitchFamily="18" charset="0"/>
+            </a:endParaRPr>
+          </a:p>
+          <a:p>
+            <a:pPr marL="285750" indent="-285750">
+              <a:buFont typeface="Arial" panose="020B0604020202020204" pitchFamily="34" charset="0"/>
+              <a:buChar char="•"/>
+            </a:pPr>
+            <a:r>
+              <a:rPr lang="ru-RU" dirty="0">
+                <a:latin typeface="Times New Roman" panose="02020603050405020304" pitchFamily="18" charset="0"/>
+                <a:cs typeface="Times New Roman" panose="02020603050405020304" pitchFamily="18" charset="0"/>
+              </a:rPr>
+              <a:t>Неэффективность кэширования: Связанные списки неэффективны в отношении кэширования, так как память не является непрерывной. Это означает, что при обходе связанного списка вы вряд ли получите нужные вам данные в кэше, что приведет к промахам кэша и низкой производительности.</a:t>
+            </a:r>
+          </a:p>
+          <a:p>
+            <a:r>
+              <a:rPr lang="ru-RU" dirty="0">
+                <a:latin typeface="Times New Roman" panose="02020603050405020304" pitchFamily="18" charset="0"/>
+                <a:cs typeface="Times New Roman" panose="02020603050405020304" pitchFamily="18" charset="0"/>
+              </a:rPr>
+              <a:t> </a:t>
+            </a:r>
+          </a:p>
+        </p:txBody>
+      </p:sp>
+    </p:spTree>
+    <p:extLst>
+      <p:ext uri="{BB962C8B-B14F-4D97-AF65-F5344CB8AC3E}">
+        <p14:creationId xmlns:p14="http://schemas.microsoft.com/office/powerpoint/2010/main" val="1128744357"/>
+      </p:ext>
+    </p:extLst>
+  </p:cSld>
+  <p:clrMapOvr>
+    <a:masterClrMapping/>
+  </p:clrMapOvr>
+</p:sld>
+</file>
+
+<file path=ppt/slides/slide45.xml><?xml version="1.0" encoding="utf-8"?>
+<p:sld xmlns:a="http://schemas.openxmlformats.org/drawingml/2006/main" xmlns:r="http://schemas.openxmlformats.org/officeDocument/2006/relationships" xmlns:p="http://schemas.openxmlformats.org/presentationml/2006/main">
+  <p:cSld>
+    <p:spTree>
+      <p:nvGrpSpPr>
+        <p:cNvPr id="1" name=""/>
+        <p:cNvGrpSpPr/>
+        <p:nvPr/>
+      </p:nvGrpSpPr>
+      <p:grpSpPr>
+        <a:xfrm>
+          <a:off x="0" y="0"/>
+          <a:ext cx="0" cy="0"/>
+          <a:chOff x="0" y="0"/>
+          <a:chExt cx="0" cy="0"/>
+        </a:xfrm>
+      </p:grpSpPr>
+      <p:sp>
+        <p:nvSpPr>
+          <p:cNvPr id="2" name="Заголовок 2">
+            <a:extLst>
+              <a:ext uri="{FF2B5EF4-FFF2-40B4-BE49-F238E27FC236}">
+                <a16:creationId xmlns:a16="http://schemas.microsoft.com/office/drawing/2014/main" id="{3E938672-0952-4303-90D6-285843A50533}"/>
+              </a:ext>
+            </a:extLst>
+          </p:cNvPr>
+          <p:cNvSpPr txBox="1">
+            <a:spLocks/>
+          </p:cNvSpPr>
+          <p:nvPr/>
+        </p:nvSpPr>
+        <p:spPr>
+          <a:xfrm>
+            <a:off x="1133138" y="185173"/>
+            <a:ext cx="9925717" cy="927688"/>
+          </a:xfrm>
+          <a:prstGeom prst="rect">
+            <a:avLst/>
+          </a:prstGeom>
+        </p:spPr>
+        <p:txBody>
+          <a:bodyPr vert="horz" lIns="91440" tIns="45720" rIns="91440" bIns="45720" rtlCol="0" anchor="b">
+            <a:normAutofit fontScale="62500" lnSpcReduction="20000"/>
+          </a:bodyPr>
+          <a:lstStyle>
+            <a:lvl1pPr algn="ctr" defTabSz="914400" rtl="0" eaLnBrk="1" latinLnBrk="0" hangingPunct="1">
+              <a:lnSpc>
+                <a:spcPct val="90000"/>
+              </a:lnSpc>
+              <a:spcBef>
+                <a:spcPct val="0"/>
+              </a:spcBef>
+              <a:buNone/>
+              <a:defRPr sz="6000" kern="1200">
+                <a:solidFill>
+                  <a:schemeClr val="tx1"/>
+                </a:solidFill>
+                <a:latin typeface="+mj-lt"/>
+                <a:ea typeface="+mj-ea"/>
+                <a:cs typeface="+mj-cs"/>
+              </a:defRPr>
+            </a:lvl1pPr>
+          </a:lstStyle>
+          <a:p>
+            <a:r>
+              <a:rPr lang="ru-RU" dirty="0">
+                <a:latin typeface="Times New Roman" panose="02020603050405020304" pitchFamily="18" charset="0"/>
+                <a:cs typeface="Times New Roman" panose="02020603050405020304" pitchFamily="18" charset="0"/>
+              </a:rPr>
+              <a:t>Примеры применения связанных списков в реальном мире</a:t>
+            </a:r>
+          </a:p>
+        </p:txBody>
+      </p:sp>
+      <p:sp>
+        <p:nvSpPr>
+          <p:cNvPr id="8" name="TextBox 7">
+            <a:extLst>
+              <a:ext uri="{FF2B5EF4-FFF2-40B4-BE49-F238E27FC236}">
+                <a16:creationId xmlns:a16="http://schemas.microsoft.com/office/drawing/2014/main" id="{1155759F-D8BA-435B-B4C5-ED2776B34C3B}"/>
+              </a:ext>
+            </a:extLst>
+          </p:cNvPr>
+          <p:cNvSpPr txBox="1"/>
+          <p:nvPr/>
+        </p:nvSpPr>
+        <p:spPr>
+          <a:xfrm>
+            <a:off x="776285" y="1768078"/>
+            <a:ext cx="10639425" cy="3139321"/>
+          </a:xfrm>
+          <a:prstGeom prst="rect">
+            <a:avLst/>
+          </a:prstGeom>
+          <a:noFill/>
+        </p:spPr>
+        <p:txBody>
+          <a:bodyPr wrap="square">
+            <a:spAutoFit/>
+          </a:bodyPr>
+          <a:lstStyle/>
+          <a:p>
+            <a:pPr marL="285750" indent="-285750">
+              <a:buFont typeface="Arial" panose="020B0604020202020204" pitchFamily="34" charset="0"/>
+              <a:buChar char="•"/>
+            </a:pPr>
+            <a:r>
+              <a:rPr lang="ru-RU" dirty="0">
+                <a:latin typeface="Times New Roman" panose="02020603050405020304" pitchFamily="18" charset="0"/>
+                <a:cs typeface="Times New Roman" panose="02020603050405020304" pitchFamily="18" charset="0"/>
+              </a:rPr>
+              <a:t>В веб-браузере URL-адреса предыдущей и следующей веб-страницы могут быть связаны с помощью кнопок «предыдущая» и «следующая» (двухсвязный список)</a:t>
+            </a:r>
+            <a:br>
+              <a:rPr lang="en-US" dirty="0">
+                <a:latin typeface="Times New Roman" panose="02020603050405020304" pitchFamily="18" charset="0"/>
+                <a:cs typeface="Times New Roman" panose="02020603050405020304" pitchFamily="18" charset="0"/>
+              </a:rPr>
+            </a:br>
+            <a:endParaRPr lang="ru-RU" dirty="0">
+              <a:latin typeface="Times New Roman" panose="02020603050405020304" pitchFamily="18" charset="0"/>
+              <a:cs typeface="Times New Roman" panose="02020603050405020304" pitchFamily="18" charset="0"/>
+            </a:endParaRPr>
+          </a:p>
+          <a:p>
+            <a:pPr marL="285750" indent="-285750">
+              <a:buFont typeface="Arial" panose="020B0604020202020204" pitchFamily="34" charset="0"/>
+              <a:buChar char="•"/>
+            </a:pPr>
+            <a:r>
+              <a:rPr lang="ru-RU" dirty="0">
+                <a:latin typeface="Times New Roman" panose="02020603050405020304" pitchFamily="18" charset="0"/>
+                <a:cs typeface="Times New Roman" panose="02020603050405020304" pitchFamily="18" charset="0"/>
+              </a:rPr>
+              <a:t>В средстве просмотра изображений предыдущее и следующее изображения могут быть связаны с помощью кнопок «предыдущая» и «следующая» (двухсвязный список)</a:t>
+            </a:r>
+            <a:br>
+              <a:rPr lang="en-US" dirty="0">
+                <a:latin typeface="Times New Roman" panose="02020603050405020304" pitchFamily="18" charset="0"/>
+                <a:cs typeface="Times New Roman" panose="02020603050405020304" pitchFamily="18" charset="0"/>
+              </a:rPr>
+            </a:br>
+            <a:endParaRPr lang="ru-RU" dirty="0">
+              <a:latin typeface="Times New Roman" panose="02020603050405020304" pitchFamily="18" charset="0"/>
+              <a:cs typeface="Times New Roman" panose="02020603050405020304" pitchFamily="18" charset="0"/>
+            </a:endParaRPr>
+          </a:p>
+          <a:p>
+            <a:pPr marL="285750" indent="-285750">
+              <a:buFont typeface="Arial" panose="020B0604020202020204" pitchFamily="34" charset="0"/>
+              <a:buChar char="•"/>
+            </a:pPr>
+            <a:r>
+              <a:rPr lang="ru-RU" dirty="0">
+                <a:latin typeface="Times New Roman" panose="02020603050405020304" pitchFamily="18" charset="0"/>
+                <a:cs typeface="Times New Roman" panose="02020603050405020304" pitchFamily="18" charset="0"/>
+              </a:rPr>
+              <a:t>Циклические связанные списки могут использоваться для реализации действий в циклическом режиме, когда мы переходим к каждому элементу по одному через время t</a:t>
+            </a:r>
+            <a:br>
+              <a:rPr lang="en-US" dirty="0">
+                <a:latin typeface="Times New Roman" panose="02020603050405020304" pitchFamily="18" charset="0"/>
+                <a:cs typeface="Times New Roman" panose="02020603050405020304" pitchFamily="18" charset="0"/>
+              </a:rPr>
+            </a:br>
+            <a:endParaRPr lang="ru-RU" dirty="0">
+              <a:latin typeface="Times New Roman" panose="02020603050405020304" pitchFamily="18" charset="0"/>
+              <a:cs typeface="Times New Roman" panose="02020603050405020304" pitchFamily="18" charset="0"/>
+            </a:endParaRPr>
+          </a:p>
+          <a:p>
+            <a:pPr marL="285750" indent="-285750">
+              <a:buFont typeface="Arial" panose="020B0604020202020204" pitchFamily="34" charset="0"/>
+              <a:buChar char="•"/>
+            </a:pPr>
+            <a:r>
+              <a:rPr lang="ru-RU" dirty="0">
+                <a:latin typeface="Times New Roman" panose="02020603050405020304" pitchFamily="18" charset="0"/>
+                <a:cs typeface="Times New Roman" panose="02020603050405020304" pitchFamily="18" charset="0"/>
+              </a:rPr>
+              <a:t>Связанные списки предпочтительнее массивов для реализации структур данных </a:t>
+            </a:r>
+            <a:r>
+              <a:rPr lang="ru-RU" dirty="0" err="1">
+                <a:latin typeface="Times New Roman" panose="02020603050405020304" pitchFamily="18" charset="0"/>
+                <a:cs typeface="Times New Roman" panose="02020603050405020304" pitchFamily="18" charset="0"/>
+              </a:rPr>
+              <a:t>Queue</a:t>
+            </a:r>
+            <a:r>
+              <a:rPr lang="ru-RU" dirty="0">
+                <a:latin typeface="Times New Roman" panose="02020603050405020304" pitchFamily="18" charset="0"/>
+                <a:cs typeface="Times New Roman" panose="02020603050405020304" pitchFamily="18" charset="0"/>
+              </a:rPr>
+              <a:t> и </a:t>
+            </a:r>
+            <a:r>
+              <a:rPr lang="ru-RU" dirty="0" err="1">
+                <a:latin typeface="Times New Roman" panose="02020603050405020304" pitchFamily="18" charset="0"/>
+                <a:cs typeface="Times New Roman" panose="02020603050405020304" pitchFamily="18" charset="0"/>
+              </a:rPr>
+              <a:t>Deque</a:t>
+            </a:r>
+            <a:r>
+              <a:rPr lang="ru-RU" dirty="0">
+                <a:latin typeface="Times New Roman" panose="02020603050405020304" pitchFamily="18" charset="0"/>
+                <a:cs typeface="Times New Roman" panose="02020603050405020304" pitchFamily="18" charset="0"/>
+              </a:rPr>
+              <a:t> из-за быстрых удалений (или вставок) из начала связанных списков.</a:t>
+            </a:r>
+          </a:p>
+        </p:txBody>
+      </p:sp>
+    </p:spTree>
+    <p:extLst>
+      <p:ext uri="{BB962C8B-B14F-4D97-AF65-F5344CB8AC3E}">
+        <p14:creationId xmlns:p14="http://schemas.microsoft.com/office/powerpoint/2010/main" val="2123344930"/>
+      </p:ext>
+    </p:extLst>
+  </p:cSld>
+  <p:clrMapOvr>
+    <a:masterClrMapping/>
+  </p:clrMapOvr>
+</p:sld>
+</file>
+
+<file path=ppt/slides/slide46.xml><?xml version="1.0" encoding="utf-8"?>
 <p:sld xmlns:a="http://schemas.openxmlformats.org/drawingml/2006/main" xmlns:r="http://schemas.openxmlformats.org/officeDocument/2006/relationships" xmlns:p="http://schemas.openxmlformats.org/presentationml/2006/main">
   <p:cSld>
     <p:spTree>
